--- a/Amity_Online_Marketing_Manager_Assignment_Paras_Jain_Bloom.pptx
+++ b/Amity_Online_Marketing_Manager_Assignment_Paras_Jain_Bloom.pptx
@@ -18787,7 +18787,7 @@
                 </a:solidFill>
                 <a:latin typeface="Calibri"/>
               </a:rPr>
-              <a:t>Launching Amity Ignite.</a:t>
+              <a:t>Amity Ignite. India's first concert for online learners.</a:t>
             </a:r>
           </a:p>
         </p:txBody>
@@ -18826,7 +18826,7 @@
                 </a:solidFill>
                 <a:latin typeface="Calibri"/>
               </a:rPr>
-              <a:t>A small, on campus moment that gives every Amity Online learner one memory they can show their family.</a:t>
+              <a:t>A campus visit no one would attend. So we threw a concert no one wants to miss. The campus walk becomes the bonus.</a:t>
             </a:r>
           </a:p>
         </p:txBody>
@@ -19074,7 +19074,7 @@
                 </a:solidFill>
                 <a:latin typeface="Calibri"/>
               </a:rPr>
-              <a:t>TASK 1   |   LAUNCH STRATEGY</a:t>
+              <a:t>TASK 1   |   LAUNCH STRATEGY   |   THE CONTRARIAN ONE PAGER</a:t>
             </a:r>
           </a:p>
         </p:txBody>
@@ -19113,7 +19113,7 @@
                 </a:solidFill>
                 <a:latin typeface="Calibri"/>
               </a:rPr>
-              <a:t>Amity Ignite. The launch on one page.</a:t>
+              <a:t>Don't sell the campus. Sell the night.</a:t>
             </a:r>
           </a:p>
         </p:txBody>
@@ -19248,13 +19248,13 @@
               </a:lnSpc>
             </a:pPr>
             <a:r>
-              <a:rPr sz="1250" b="0" i="1">
+              <a:rPr sz="1200" b="0" i="1">
                 <a:solidFill>
                   <a:srgbClr val="52597A"/>
                 </a:solidFill>
                 <a:latin typeface="Calibri"/>
               </a:rPr>
-              <a:t>A small, on campus moment for Rohit and 99 other learners. Pilot first. Prove. Then scale.</a:t>
+              <a:t>Online learners chose online. Asking them to fly for a lecture fails. Asking them to fly for a concert, their family, and a graduation photo they never got, works.</a:t>
             </a:r>
           </a:p>
         </p:txBody>
@@ -19267,8 +19267,8 @@
         </p:nvSpPr>
         <p:spPr>
           <a:xfrm>
-            <a:off x="457200" y="2057400"/>
-            <a:ext cx="3703320" cy="2148840"/>
+            <a:off x="457200" y="2103120"/>
+            <a:ext cx="3703320" cy="2057400"/>
           </a:xfrm>
           <a:prstGeom prst="roundRect">
             <a:avLst>
@@ -19315,7 +19315,7 @@
         </p:nvSpPr>
         <p:spPr>
           <a:xfrm>
-            <a:off x="457200" y="2057400"/>
+            <a:off x="457200" y="2103120"/>
             <a:ext cx="3703320" cy="64008"/>
           </a:xfrm>
           <a:prstGeom prst="rect">
@@ -19359,8 +19359,8 @@
         </p:nvSpPr>
         <p:spPr>
           <a:xfrm>
-            <a:off x="685800" y="2240280"/>
-            <a:ext cx="2743200" cy="274320"/>
+            <a:off x="685800" y="2286000"/>
+            <a:ext cx="3200400" cy="274320"/>
           </a:xfrm>
           <a:prstGeom prst="rect">
             <a:avLst/>
@@ -19398,7 +19398,7 @@
         </p:nvSpPr>
         <p:spPr>
           <a:xfrm>
-            <a:off x="685800" y="2514600"/>
+            <a:off x="685800" y="2560320"/>
             <a:ext cx="3337560" cy="640080"/>
           </a:xfrm>
           <a:prstGeom prst="rect">
@@ -19418,13 +19418,13 @@
               </a:lnSpc>
             </a:pPr>
             <a:r>
-              <a:rPr sz="1500" b="1" i="0">
+              <a:rPr sz="1400" b="1" i="0">
                 <a:solidFill>
                   <a:srgbClr val="1E1B4B"/>
                 </a:solidFill>
                 <a:latin typeface="Calibri"/>
               </a:rPr>
-              <a:t>Largest online learner base in India.</a:t>
+              <a:t>Largest online base. Lowest in person presence.</a:t>
             </a:r>
           </a:p>
         </p:txBody>
@@ -19438,7 +19438,7 @@
         <p:spPr>
           <a:xfrm>
             <a:off x="685800" y="3200400"/>
-            <a:ext cx="3337560" cy="960120"/>
+            <a:ext cx="3337560" cy="914400"/>
           </a:xfrm>
           <a:prstGeom prst="rect">
             <a:avLst/>
@@ -19460,7 +19460,7 @@
               </a:spcBef>
             </a:pPr>
             <a:r>
-              <a:rPr sz="1000" b="1">
+              <a:rPr sz="969" b="1">
                 <a:solidFill>
                   <a:srgbClr val="14B8A6"/>
                 </a:solidFill>
@@ -19469,13 +19469,13 @@
               <a:t>• </a:t>
             </a:r>
             <a:r>
-              <a:rPr sz="1000">
-                <a:solidFill>
-                  <a:srgbClr val="141B2D"/>
-                </a:solidFill>
-                <a:latin typeface="Calibri"/>
-              </a:rPr>
-              <a:t>2,50,000+ learners. 450+ hiring partners.</a:t>
+              <a:rPr sz="969">
+                <a:solidFill>
+                  <a:srgbClr val="1E1B4B"/>
+                </a:solidFill>
+                <a:latin typeface="Calibri"/>
+              </a:rPr>
+              <a:t>2,50,000+ learners. Almost zero campus footprint.</a:t>
             </a:r>
           </a:p>
           <a:p>
@@ -19488,7 +19488,7 @@
               </a:spcBef>
             </a:pPr>
             <a:r>
-              <a:rPr sz="1000" b="1">
+              <a:rPr sz="969" b="1">
                 <a:solidFill>
                   <a:srgbClr val="14B8A6"/>
                 </a:solidFill>
@@ -19497,13 +19497,13 @@
               <a:t>• </a:t>
             </a:r>
             <a:r>
-              <a:rPr sz="1000">
-                <a:solidFill>
-                  <a:srgbClr val="141B2D"/>
-                </a:solidFill>
-                <a:latin typeface="Calibri"/>
-              </a:rPr>
-              <a:t>Almost none have visited the Noida campus.</a:t>
+              <a:rPr sz="969">
+                <a:solidFill>
+                  <a:srgbClr val="1E1B4B"/>
+                </a:solidFill>
+                <a:latin typeface="Calibri"/>
+              </a:rPr>
+              <a:t>450+ hiring partners but no proof in the photo.</a:t>
             </a:r>
           </a:p>
           <a:p>
@@ -19516,7 +19516,7 @@
               </a:spcBef>
             </a:pPr>
             <a:r>
-              <a:rPr sz="1000" b="1">
+              <a:rPr sz="969" b="1">
                 <a:solidFill>
                   <a:srgbClr val="14B8A6"/>
                 </a:solidFill>
@@ -19525,9 +19525,9 @@
               <a:t>• </a:t>
             </a:r>
             <a:r>
-              <a:rPr sz="1000">
-                <a:solidFill>
-                  <a:srgbClr val="141B2D"/>
+              <a:rPr sz="969">
+                <a:solidFill>
+                  <a:srgbClr val="1E1B4B"/>
                 </a:solidFill>
                 <a:latin typeface="Calibri"/>
               </a:rPr>
@@ -19544,8 +19544,8 @@
         </p:nvSpPr>
         <p:spPr>
           <a:xfrm>
-            <a:off x="4325112" y="2057400"/>
-            <a:ext cx="3703320" cy="2148840"/>
+            <a:off x="4325112" y="2103120"/>
+            <a:ext cx="3703320" cy="2057400"/>
           </a:xfrm>
           <a:prstGeom prst="roundRect">
             <a:avLst>
@@ -19592,7 +19592,7 @@
         </p:nvSpPr>
         <p:spPr>
           <a:xfrm>
-            <a:off x="4325112" y="2057400"/>
+            <a:off x="4325112" y="2103120"/>
             <a:ext cx="3703320" cy="64008"/>
           </a:xfrm>
           <a:prstGeom prst="rect">
@@ -19636,8 +19636,8 @@
         </p:nvSpPr>
         <p:spPr>
           <a:xfrm>
-            <a:off x="4553712" y="2240280"/>
-            <a:ext cx="2743200" cy="274320"/>
+            <a:off x="4553712" y="2286000"/>
+            <a:ext cx="3200400" cy="274320"/>
           </a:xfrm>
           <a:prstGeom prst="rect">
             <a:avLst/>
@@ -19662,7 +19662,7 @@
                 </a:solidFill>
                 <a:latin typeface="Calibri"/>
               </a:rPr>
-              <a:t>TARGET LEARNER   |   JOB TO BE DONE</a:t>
+              <a:t>TARGET   |   JOB TO BE DONE</a:t>
             </a:r>
           </a:p>
         </p:txBody>
@@ -19675,7 +19675,7 @@
         </p:nvSpPr>
         <p:spPr>
           <a:xfrm>
-            <a:off x="4553712" y="2514600"/>
+            <a:off x="4553712" y="2560320"/>
             <a:ext cx="3337560" cy="640080"/>
           </a:xfrm>
           <a:prstGeom prst="rect">
@@ -19695,13 +19695,13 @@
               </a:lnSpc>
             </a:pPr>
             <a:r>
-              <a:rPr sz="1500" b="1" i="0">
+              <a:rPr sz="1400" b="1" i="0">
                 <a:solidFill>
                   <a:srgbClr val="1E1B4B"/>
                 </a:solidFill>
                 <a:latin typeface="Calibri"/>
               </a:rPr>
-              <a:t>Rohit. 28. Tier 2 working pro.</a:t>
+              <a:t>Rohit. 28. Has never seen the campus he paid for.</a:t>
             </a:r>
           </a:p>
         </p:txBody>
@@ -19715,7 +19715,7 @@
         <p:spPr>
           <a:xfrm>
             <a:off x="4553712" y="3200400"/>
-            <a:ext cx="3337560" cy="960120"/>
+            <a:ext cx="3337560" cy="914400"/>
           </a:xfrm>
           <a:prstGeom prst="rect">
             <a:avLst/>
@@ -19737,7 +19737,7 @@
               </a:spcBef>
             </a:pPr>
             <a:r>
-              <a:rPr sz="1000" b="1">
+              <a:rPr sz="969" b="1">
                 <a:solidFill>
                   <a:srgbClr val="06B6D4"/>
                 </a:solidFill>
@@ -19746,13 +19746,13 @@
               <a:t>• </a:t>
             </a:r>
             <a:r>
-              <a:rPr sz="1000">
-                <a:solidFill>
-                  <a:srgbClr val="141B2D"/>
-                </a:solidFill>
-                <a:latin typeface="Calibri"/>
-              </a:rPr>
-              <a:t>Pays his own fees. Studies after dinner.</a:t>
+              <a:rPr sz="969">
+                <a:solidFill>
+                  <a:srgbClr val="1E1B4B"/>
+                </a:solidFill>
+                <a:latin typeface="Calibri"/>
+              </a:rPr>
+              <a:t>Wants the Amity name his family is proud of.</a:t>
             </a:r>
           </a:p>
           <a:p>
@@ -19765,7 +19765,7 @@
               </a:spcBef>
             </a:pPr>
             <a:r>
-              <a:rPr sz="1000" b="1">
+              <a:rPr sz="969" b="1">
                 <a:solidFill>
                   <a:srgbClr val="06B6D4"/>
                 </a:solidFill>
@@ -19774,13 +19774,13 @@
               <a:t>• </a:t>
             </a:r>
             <a:r>
-              <a:rPr sz="1000">
-                <a:solidFill>
-                  <a:srgbClr val="141B2D"/>
-                </a:solidFill>
-                <a:latin typeface="Calibri"/>
-              </a:rPr>
-              <a:t>Wants the Amity name his family can be proud of.</a:t>
+              <a:rPr sz="969">
+                <a:solidFill>
+                  <a:srgbClr val="1E1B4B"/>
+                </a:solidFill>
+                <a:latin typeface="Calibri"/>
+              </a:rPr>
+              <a:t>Will not fly for a lecture.</a:t>
             </a:r>
           </a:p>
           <a:p>
@@ -19793,7 +19793,7 @@
               </a:spcBef>
             </a:pPr>
             <a:r>
-              <a:rPr sz="1000" b="1">
+              <a:rPr sz="969" b="1">
                 <a:solidFill>
                   <a:srgbClr val="06B6D4"/>
                 </a:solidFill>
@@ -19802,13 +19802,13 @@
               <a:t>• </a:t>
             </a:r>
             <a:r>
-              <a:rPr sz="1000">
-                <a:solidFill>
-                  <a:srgbClr val="141B2D"/>
-                </a:solidFill>
-                <a:latin typeface="Calibri"/>
-              </a:rPr>
-              <a:t>Wants one moment of belonging.</a:t>
+              <a:rPr sz="969">
+                <a:solidFill>
+                  <a:srgbClr val="1E1B4B"/>
+                </a:solidFill>
+                <a:latin typeface="Calibri"/>
+              </a:rPr>
+              <a:t>Will fly for a concert, comedy, and a photograph.</a:t>
             </a:r>
           </a:p>
         </p:txBody>
@@ -19821,8 +19821,8 @@
         </p:nvSpPr>
         <p:spPr>
           <a:xfrm>
-            <a:off x="8193024" y="2057400"/>
-            <a:ext cx="3703320" cy="2148840"/>
+            <a:off x="8193024" y="2103120"/>
+            <a:ext cx="3703320" cy="2057400"/>
           </a:xfrm>
           <a:prstGeom prst="roundRect">
             <a:avLst>
@@ -19869,7 +19869,7 @@
         </p:nvSpPr>
         <p:spPr>
           <a:xfrm>
-            <a:off x="8193024" y="2057400"/>
+            <a:off x="8193024" y="2103120"/>
             <a:ext cx="3703320" cy="64008"/>
           </a:xfrm>
           <a:prstGeom prst="rect">
@@ -19913,8 +19913,8 @@
         </p:nvSpPr>
         <p:spPr>
           <a:xfrm>
-            <a:off x="8421624" y="2240280"/>
-            <a:ext cx="2743200" cy="274320"/>
+            <a:off x="8421624" y="2286000"/>
+            <a:ext cx="3200400" cy="274320"/>
           </a:xfrm>
           <a:prstGeom prst="rect">
             <a:avLst/>
@@ -19952,7 +19952,7 @@
         </p:nvSpPr>
         <p:spPr>
           <a:xfrm>
-            <a:off x="8421624" y="2514600"/>
+            <a:off x="8421624" y="2560320"/>
             <a:ext cx="3337560" cy="640080"/>
           </a:xfrm>
           <a:prstGeom prst="rect">
@@ -19972,13 +19972,13 @@
               </a:lnSpc>
             </a:pPr>
             <a:r>
-              <a:rPr sz="1500" b="1" i="0">
+              <a:rPr sz="1400" b="1" i="0">
                 <a:solidFill>
                   <a:srgbClr val="1E1B4B"/>
                 </a:solidFill>
                 <a:latin typeface="Calibri"/>
               </a:rPr>
-              <a:t>The only online university where you walk the campus.</a:t>
+              <a:t>The only online university where you walk the stage.</a:t>
             </a:r>
           </a:p>
         </p:txBody>
@@ -19992,7 +19992,7 @@
         <p:spPr>
           <a:xfrm>
             <a:off x="8421624" y="3200400"/>
-            <a:ext cx="3337560" cy="960120"/>
+            <a:ext cx="3337560" cy="914400"/>
           </a:xfrm>
           <a:prstGeom prst="rect">
             <a:avLst/>
@@ -20014,7 +20014,7 @@
               </a:spcBef>
             </a:pPr>
             <a:r>
-              <a:rPr sz="1000" b="1">
+              <a:rPr sz="969" b="1">
                 <a:solidFill>
                   <a:srgbClr val="A855F7"/>
                 </a:solidFill>
@@ -20023,13 +20023,13 @@
               <a:t>• </a:t>
             </a:r>
             <a:r>
-              <a:rPr sz="1000">
-                <a:solidFill>
-                  <a:srgbClr val="141B2D"/>
-                </a:solidFill>
-                <a:latin typeface="Calibri"/>
-              </a:rPr>
-              <a:t>We don't compete on price.</a:t>
+              <a:rPr sz="969">
+                <a:solidFill>
+                  <a:srgbClr val="1E1B4B"/>
+                </a:solidFill>
+                <a:latin typeface="Calibri"/>
+              </a:rPr>
+              <a:t>Don't compete on price.</a:t>
             </a:r>
           </a:p>
           <a:p>
@@ -20042,7 +20042,7 @@
               </a:spcBef>
             </a:pPr>
             <a:r>
-              <a:rPr sz="1000" b="1">
+              <a:rPr sz="969" b="1">
                 <a:solidFill>
                   <a:srgbClr val="A855F7"/>
                 </a:solidFill>
@@ -20051,13 +20051,13 @@
               <a:t>• </a:t>
             </a:r>
             <a:r>
-              <a:rPr sz="1000">
-                <a:solidFill>
-                  <a:srgbClr val="141B2D"/>
-                </a:solidFill>
-                <a:latin typeface="Calibri"/>
-              </a:rPr>
-              <a:t>We compete on experience and the photograph.</a:t>
+              <a:rPr sz="969">
+                <a:solidFill>
+                  <a:srgbClr val="1E1B4B"/>
+                </a:solidFill>
+                <a:latin typeface="Calibri"/>
+              </a:rPr>
+              <a:t>Compete on the night, the family, and the photo.</a:t>
             </a:r>
           </a:p>
           <a:p>
@@ -20070,7 +20070,7 @@
               </a:spcBef>
             </a:pPr>
             <a:r>
-              <a:rPr sz="1000" b="1">
+              <a:rPr sz="969" b="1">
                 <a:solidFill>
                   <a:srgbClr val="A855F7"/>
                 </a:solidFill>
@@ -20079,27 +20079,105 @@
               <a:t>• </a:t>
             </a:r>
             <a:r>
-              <a:rPr sz="1000">
-                <a:solidFill>
-                  <a:srgbClr val="141B2D"/>
-                </a:solidFill>
-                <a:latin typeface="Calibri"/>
-              </a:rPr>
-              <a:t>Differentiation is the brand promise we keep.</a:t>
-            </a:r>
-          </a:p>
-        </p:txBody>
-      </p:sp>
-      <p:sp>
-        <p:nvSpPr>
-          <p:cNvPr id="24" name="Rounded Rectangle 23"/>
+              <a:rPr sz="969">
+                <a:solidFill>
+                  <a:srgbClr val="1E1B4B"/>
+                </a:solidFill>
+                <a:latin typeface="Calibri"/>
+              </a:rPr>
+              <a:t>The brand promise is the experience, not the screen.</a:t>
+            </a:r>
+          </a:p>
+        </p:txBody>
+      </p:sp>
+      <p:sp>
+        <p:nvSpPr>
+          <p:cNvPr id="24" name="TextBox 23"/>
+          <p:cNvSpPr txBox="1"/>
+          <p:nvPr/>
+        </p:nvSpPr>
+        <p:spPr>
+          <a:xfrm>
+            <a:off x="457200" y="4389120"/>
+            <a:ext cx="10972800" cy="365760"/>
+          </a:xfrm>
+          <a:prstGeom prst="rect">
+            <a:avLst/>
+          </a:prstGeom>
+          <a:noFill/>
+        </p:spPr>
+        <p:txBody>
+          <a:bodyPr wrap="square" lIns="45720" rIns="45720" tIns="18288" bIns="18288" anchor="t">
+            <a:spAutoFit/>
+          </a:bodyPr>
+          <a:lstStyle/>
+          <a:p>
+            <a:pPr algn="l">
+              <a:lnSpc>
+                <a:spcPct val="125000"/>
+              </a:lnSpc>
+            </a:pPr>
+            <a:r>
+              <a:rPr sz="1100" b="1" i="0">
+                <a:solidFill>
+                  <a:srgbClr val="1E1B4B"/>
+                </a:solidFill>
+                <a:latin typeface="Calibri"/>
+              </a:rPr>
+              <a:t>FIVE BIG BETS   |   The moves a top tier marketer makes.</a:t>
+            </a:r>
+          </a:p>
+        </p:txBody>
+      </p:sp>
+      <p:sp>
+        <p:nvSpPr>
+          <p:cNvPr id="25" name="TextBox 24"/>
+          <p:cNvSpPr txBox="1"/>
+          <p:nvPr/>
+        </p:nvSpPr>
+        <p:spPr>
+          <a:xfrm>
+            <a:off x="457200" y="4681728"/>
+            <a:ext cx="10972800" cy="274320"/>
+          </a:xfrm>
+          <a:prstGeom prst="rect">
+            <a:avLst/>
+          </a:prstGeom>
+          <a:noFill/>
+        </p:spPr>
+        <p:txBody>
+          <a:bodyPr wrap="square" lIns="45720" rIns="45720" tIns="18288" bIns="18288" anchor="t">
+            <a:spAutoFit/>
+          </a:bodyPr>
+          <a:lstStyle/>
+          <a:p>
+            <a:pPr algn="l">
+              <a:lnSpc>
+                <a:spcPct val="125000"/>
+              </a:lnSpc>
+            </a:pPr>
+            <a:r>
+              <a:rPr sz="1000" b="0" i="1">
+                <a:solidFill>
+                  <a:srgbClr val="52597A"/>
+                </a:solidFill>
+                <a:latin typeface="Calibri"/>
+              </a:rPr>
+              <a:t>Each one is contrarian. Each one is doable inside the Phase 1 budget.</a:t>
+            </a:r>
+          </a:p>
+        </p:txBody>
+      </p:sp>
+      <p:sp>
+        <p:nvSpPr>
+          <p:cNvPr id="26" name="Rounded Rectangle 25"/>
           <p:cNvSpPr/>
           <p:nvPr/>
         </p:nvSpPr>
         <p:spPr>
           <a:xfrm>
-            <a:off x="457200" y="4370832"/>
-            <a:ext cx="3703320" cy="2148840"/>
+            <a:off x="457200" y="5166360"/>
+            <a:ext cx="2145182" cy="1325880"/>
           </a:xfrm>
           <a:prstGeom prst="roundRect">
             <a:avLst>
@@ -20107,7 +20185,7 @@
             </a:avLst>
           </a:prstGeom>
           <a:solidFill>
-            <a:srgbClr val="F4F6FB"/>
+            <a:srgbClr val="FFFFFF"/>
           </a:solidFill>
           <a:ln w="6350">
             <a:solidFill>
@@ -20140,14 +20218,14 @@
       </p:sp>
       <p:sp>
         <p:nvSpPr>
-          <p:cNvPr id="25" name="Rectangle 24"/>
+          <p:cNvPr id="27" name="Rectangle 26"/>
           <p:cNvSpPr/>
           <p:nvPr/>
         </p:nvSpPr>
         <p:spPr>
           <a:xfrm>
-            <a:off x="457200" y="4370832"/>
-            <a:ext cx="3703320" cy="64008"/>
+            <a:off x="457200" y="5166360"/>
+            <a:ext cx="2145182" cy="64008"/>
           </a:xfrm>
           <a:prstGeom prst="rect">
             <a:avLst/>
@@ -20184,199 +20262,131 @@
       </p:sp>
       <p:sp>
         <p:nvSpPr>
-          <p:cNvPr id="26" name="TextBox 25"/>
-          <p:cNvSpPr txBox="1"/>
-          <p:nvPr/>
-        </p:nvSpPr>
-        <p:spPr>
-          <a:xfrm>
-            <a:off x="685800" y="4553712"/>
-            <a:ext cx="2743200" cy="274320"/>
-          </a:xfrm>
-          <a:prstGeom prst="rect">
-            <a:avLst/>
-          </a:prstGeom>
-          <a:noFill/>
-        </p:spPr>
-        <p:txBody>
-          <a:bodyPr wrap="square" lIns="45720" rIns="45720" tIns="18288" bIns="18288" anchor="t">
-            <a:spAutoFit/>
-          </a:bodyPr>
-          <a:lstStyle/>
-          <a:p>
-            <a:pPr algn="l">
-              <a:lnSpc>
-                <a:spcPct val="125000"/>
-              </a:lnSpc>
-            </a:pPr>
-            <a:r>
-              <a:rPr sz="950" b="1" i="0">
+          <p:cNvPr id="28" name="TextBox 27"/>
+          <p:cNvSpPr txBox="1"/>
+          <p:nvPr/>
+        </p:nvSpPr>
+        <p:spPr>
+          <a:xfrm>
+            <a:off x="640080" y="5330952"/>
+            <a:ext cx="640080" cy="274320"/>
+          </a:xfrm>
+          <a:prstGeom prst="rect">
+            <a:avLst/>
+          </a:prstGeom>
+          <a:noFill/>
+        </p:spPr>
+        <p:txBody>
+          <a:bodyPr wrap="square" lIns="45720" rIns="45720" tIns="18288" bIns="18288" anchor="t">
+            <a:spAutoFit/>
+          </a:bodyPr>
+          <a:lstStyle/>
+          <a:p>
+            <a:pPr algn="l">
+              <a:lnSpc>
+                <a:spcPct val="100000"/>
+              </a:lnSpc>
+            </a:pPr>
+            <a:r>
+              <a:rPr sz="1400" b="1" i="0">
                 <a:solidFill>
                   <a:srgbClr val="14B8A6"/>
                 </a:solidFill>
                 <a:latin typeface="Calibri"/>
               </a:rPr>
-              <a:t>SPEND   |   PHASE 1 PILOT</a:t>
-            </a:r>
-          </a:p>
-        </p:txBody>
-      </p:sp>
-      <p:sp>
-        <p:nvSpPr>
-          <p:cNvPr id="27" name="TextBox 26"/>
-          <p:cNvSpPr txBox="1"/>
-          <p:nvPr/>
-        </p:nvSpPr>
-        <p:spPr>
-          <a:xfrm>
-            <a:off x="685800" y="4828032"/>
-            <a:ext cx="3337560" cy="640080"/>
-          </a:xfrm>
-          <a:prstGeom prst="rect">
-            <a:avLst/>
-          </a:prstGeom>
-          <a:noFill/>
-        </p:spPr>
-        <p:txBody>
-          <a:bodyPr wrap="square" lIns="45720" rIns="45720" tIns="18288" bIns="18288" anchor="t">
-            <a:spAutoFit/>
-          </a:bodyPr>
-          <a:lstStyle/>
-          <a:p>
-            <a:pPr algn="l">
-              <a:lnSpc>
-                <a:spcPct val="115000"/>
-              </a:lnSpc>
-            </a:pPr>
-            <a:r>
-              <a:rPr sz="1500" b="1" i="0">
+              <a:t>01</a:t>
+            </a:r>
+          </a:p>
+        </p:txBody>
+      </p:sp>
+      <p:sp>
+        <p:nvSpPr>
+          <p:cNvPr id="29" name="TextBox 28"/>
+          <p:cNvSpPr txBox="1"/>
+          <p:nvPr/>
+        </p:nvSpPr>
+        <p:spPr>
+          <a:xfrm>
+            <a:off x="640080" y="5605272"/>
+            <a:ext cx="1870862" cy="365760"/>
+          </a:xfrm>
+          <a:prstGeom prst="rect">
+            <a:avLst/>
+          </a:prstGeom>
+          <a:noFill/>
+        </p:spPr>
+        <p:txBody>
+          <a:bodyPr wrap="square" lIns="45720" rIns="45720" tIns="18288" bIns="18288" anchor="t">
+            <a:spAutoFit/>
+          </a:bodyPr>
+          <a:lstStyle/>
+          <a:p>
+            <a:pPr algn="l">
+              <a:lnSpc>
+                <a:spcPct val="105000"/>
+              </a:lnSpc>
+            </a:pPr>
+            <a:r>
+              <a:rPr sz="1100" b="1" i="0">
                 <a:solidFill>
                   <a:srgbClr val="1E1B4B"/>
                 </a:solidFill>
                 <a:latin typeface="Calibri"/>
               </a:rPr>
-              <a:t>Approximately Rs 65 lakh.</a:t>
-            </a:r>
-          </a:p>
-        </p:txBody>
-      </p:sp>
-      <p:sp>
-        <p:nvSpPr>
-          <p:cNvPr id="28" name="TextBox 27"/>
-          <p:cNvSpPr txBox="1"/>
-          <p:nvPr/>
-        </p:nvSpPr>
-        <p:spPr>
-          <a:xfrm>
-            <a:off x="685800" y="5513832"/>
-            <a:ext cx="3337560" cy="960120"/>
-          </a:xfrm>
-          <a:prstGeom prst="rect">
-            <a:avLst/>
-          </a:prstGeom>
-          <a:noFill/>
-        </p:spPr>
-        <p:txBody>
-          <a:bodyPr wrap="square" lIns="45720" rIns="45720" tIns="18288" bIns="18288">
-            <a:spAutoFit/>
-          </a:bodyPr>
-          <a:lstStyle/>
-          <a:p>
-            <a:pPr algn="l">
-              <a:lnSpc>
-                <a:spcPct val="140000"/>
-              </a:lnSpc>
-              <a:spcBef>
-                <a:spcPts val="400"/>
-              </a:spcBef>
-            </a:pPr>
-            <a:r>
-              <a:rPr sz="1000" b="1">
-                <a:solidFill>
-                  <a:srgbClr val="14B8A6"/>
-                </a:solidFill>
-                <a:latin typeface="Calibri"/>
-              </a:rPr>
-              <a:t>• </a:t>
-            </a:r>
-            <a:r>
-              <a:rPr sz="1000">
-                <a:solidFill>
-                  <a:srgbClr val="141B2D"/>
-                </a:solidFill>
-                <a:latin typeface="Calibri"/>
-              </a:rPr>
-              <a:t>50% organic content, email, in app.</a:t>
-            </a:r>
-          </a:p>
-          <a:p>
-            <a:pPr algn="l">
-              <a:lnSpc>
-                <a:spcPct val="140000"/>
-              </a:lnSpc>
-              <a:spcBef>
-                <a:spcPts val="400"/>
-              </a:spcBef>
-            </a:pPr>
-            <a:r>
-              <a:rPr sz="1000" b="1">
-                <a:solidFill>
-                  <a:srgbClr val="14B8A6"/>
-                </a:solidFill>
-                <a:latin typeface="Calibri"/>
-              </a:rPr>
-              <a:t>• </a:t>
-            </a:r>
-            <a:r>
-              <a:rPr sz="1000">
-                <a:solidFill>
-                  <a:srgbClr val="141B2D"/>
-                </a:solidFill>
-                <a:latin typeface="Calibri"/>
-              </a:rPr>
-              <a:t>25% reallocated paid media.</a:t>
-            </a:r>
-          </a:p>
-          <a:p>
-            <a:pPr algn="l">
-              <a:lnSpc>
-                <a:spcPct val="140000"/>
-              </a:lnSpc>
-              <a:spcBef>
-                <a:spcPts val="400"/>
-              </a:spcBef>
-            </a:pPr>
-            <a:r>
-              <a:rPr sz="1000" b="1">
-                <a:solidFill>
-                  <a:srgbClr val="14B8A6"/>
-                </a:solidFill>
-                <a:latin typeface="Calibri"/>
-              </a:rPr>
-              <a:t>• </a:t>
-            </a:r>
-            <a:r>
-              <a:rPr sz="1000">
-                <a:solidFill>
-                  <a:srgbClr val="141B2D"/>
-                </a:solidFill>
-                <a:latin typeface="Calibri"/>
-              </a:rPr>
-              <a:t>25% on campus production and earned PR.</a:t>
-            </a:r>
-          </a:p>
-        </p:txBody>
-      </p:sp>
-      <p:sp>
-        <p:nvSpPr>
-          <p:cNvPr id="29" name="Rounded Rectangle 28"/>
+              <a:t>SELL THE CONCERT.</a:t>
+            </a:r>
+          </a:p>
+        </p:txBody>
+      </p:sp>
+      <p:sp>
+        <p:nvSpPr>
+          <p:cNvPr id="30" name="TextBox 29"/>
+          <p:cNvSpPr txBox="1"/>
+          <p:nvPr/>
+        </p:nvSpPr>
+        <p:spPr>
+          <a:xfrm>
+            <a:off x="640080" y="5943600"/>
+            <a:ext cx="1870862" cy="548640"/>
+          </a:xfrm>
+          <a:prstGeom prst="rect">
+            <a:avLst/>
+          </a:prstGeom>
+          <a:noFill/>
+        </p:spPr>
+        <p:txBody>
+          <a:bodyPr wrap="square" lIns="45720" rIns="45720" tIns="18288" bIns="18288" anchor="t">
+            <a:spAutoFit/>
+          </a:bodyPr>
+          <a:lstStyle/>
+          <a:p>
+            <a:pPr algn="l">
+              <a:lnSpc>
+                <a:spcPct val="130000"/>
+              </a:lnSpc>
+            </a:pPr>
+            <a:r>
+              <a:rPr sz="930" b="0" i="1">
+                <a:solidFill>
+                  <a:srgbClr val="1E1B4B"/>
+                </a:solidFill>
+                <a:latin typeface="Calibri"/>
+              </a:rPr>
+              <a:t>Headline event = top comedian or creator. Campus walk is the bonus.</a:t>
+            </a:r>
+          </a:p>
+        </p:txBody>
+      </p:sp>
+      <p:sp>
+        <p:nvSpPr>
+          <p:cNvPr id="31" name="Rounded Rectangle 30"/>
           <p:cNvSpPr/>
           <p:nvPr/>
         </p:nvSpPr>
         <p:spPr>
           <a:xfrm>
-            <a:off x="4325112" y="4370832"/>
-            <a:ext cx="3703320" cy="2148840"/>
+            <a:off x="2739542" y="5166360"/>
+            <a:ext cx="2145182" cy="1325880"/>
           </a:xfrm>
           <a:prstGeom prst="roundRect">
             <a:avLst>
@@ -20384,7 +20394,7 @@
             </a:avLst>
           </a:prstGeom>
           <a:solidFill>
-            <a:srgbClr val="F4F6FB"/>
+            <a:srgbClr val="FFFFFF"/>
           </a:solidFill>
           <a:ln w="6350">
             <a:solidFill>
@@ -20417,14 +20427,14 @@
       </p:sp>
       <p:sp>
         <p:nvSpPr>
-          <p:cNvPr id="30" name="Rectangle 29"/>
+          <p:cNvPr id="32" name="Rectangle 31"/>
           <p:cNvSpPr/>
           <p:nvPr/>
         </p:nvSpPr>
         <p:spPr>
           <a:xfrm>
-            <a:off x="4325112" y="4370832"/>
-            <a:ext cx="3703320" cy="64008"/>
+            <a:off x="2739542" y="5166360"/>
+            <a:ext cx="2145182" cy="64008"/>
           </a:xfrm>
           <a:prstGeom prst="rect">
             <a:avLst/>
@@ -20461,199 +20471,131 @@
       </p:sp>
       <p:sp>
         <p:nvSpPr>
-          <p:cNvPr id="31" name="TextBox 30"/>
-          <p:cNvSpPr txBox="1"/>
-          <p:nvPr/>
-        </p:nvSpPr>
-        <p:spPr>
-          <a:xfrm>
-            <a:off x="4553712" y="4553712"/>
-            <a:ext cx="2743200" cy="274320"/>
-          </a:xfrm>
-          <a:prstGeom prst="rect">
-            <a:avLst/>
-          </a:prstGeom>
-          <a:noFill/>
-        </p:spPr>
-        <p:txBody>
-          <a:bodyPr wrap="square" lIns="45720" rIns="45720" tIns="18288" bIns="18288" anchor="t">
-            <a:spAutoFit/>
-          </a:bodyPr>
-          <a:lstStyle/>
-          <a:p>
-            <a:pPr algn="l">
-              <a:lnSpc>
-                <a:spcPct val="125000"/>
-              </a:lnSpc>
-            </a:pPr>
-            <a:r>
-              <a:rPr sz="950" b="1" i="0">
+          <p:cNvPr id="33" name="TextBox 32"/>
+          <p:cNvSpPr txBox="1"/>
+          <p:nvPr/>
+        </p:nvSpPr>
+        <p:spPr>
+          <a:xfrm>
+            <a:off x="2922422" y="5330952"/>
+            <a:ext cx="640080" cy="274320"/>
+          </a:xfrm>
+          <a:prstGeom prst="rect">
+            <a:avLst/>
+          </a:prstGeom>
+          <a:noFill/>
+        </p:spPr>
+        <p:txBody>
+          <a:bodyPr wrap="square" lIns="45720" rIns="45720" tIns="18288" bIns="18288" anchor="t">
+            <a:spAutoFit/>
+          </a:bodyPr>
+          <a:lstStyle/>
+          <a:p>
+            <a:pPr algn="l">
+              <a:lnSpc>
+                <a:spcPct val="100000"/>
+              </a:lnSpc>
+            </a:pPr>
+            <a:r>
+              <a:rPr sz="1400" b="1" i="0">
                 <a:solidFill>
                   <a:srgbClr val="06B6D4"/>
                 </a:solidFill>
                 <a:latin typeface="Calibri"/>
               </a:rPr>
-              <a:t>GOALS   |   FIRST 90 DAYS</a:t>
-            </a:r>
-          </a:p>
-        </p:txBody>
-      </p:sp>
-      <p:sp>
-        <p:nvSpPr>
-          <p:cNvPr id="32" name="TextBox 31"/>
-          <p:cNvSpPr txBox="1"/>
-          <p:nvPr/>
-        </p:nvSpPr>
-        <p:spPr>
-          <a:xfrm>
-            <a:off x="4553712" y="4828032"/>
-            <a:ext cx="3337560" cy="640080"/>
-          </a:xfrm>
-          <a:prstGeom prst="rect">
-            <a:avLst/>
-          </a:prstGeom>
-          <a:noFill/>
-        </p:spPr>
-        <p:txBody>
-          <a:bodyPr wrap="square" lIns="45720" rIns="45720" tIns="18288" bIns="18288" anchor="t">
-            <a:spAutoFit/>
-          </a:bodyPr>
-          <a:lstStyle/>
-          <a:p>
-            <a:pPr algn="l">
-              <a:lnSpc>
-                <a:spcPct val="115000"/>
-              </a:lnSpc>
-            </a:pPr>
-            <a:r>
-              <a:rPr sz="1500" b="1" i="0">
+              <a:t>02</a:t>
+            </a:r>
+          </a:p>
+        </p:txBody>
+      </p:sp>
+      <p:sp>
+        <p:nvSpPr>
+          <p:cNvPr id="34" name="TextBox 33"/>
+          <p:cNvSpPr txBox="1"/>
+          <p:nvPr/>
+        </p:nvSpPr>
+        <p:spPr>
+          <a:xfrm>
+            <a:off x="2922422" y="5605272"/>
+            <a:ext cx="1870862" cy="365760"/>
+          </a:xfrm>
+          <a:prstGeom prst="rect">
+            <a:avLst/>
+          </a:prstGeom>
+          <a:noFill/>
+        </p:spPr>
+        <p:txBody>
+          <a:bodyPr wrap="square" lIns="45720" rIns="45720" tIns="18288" bIns="18288" anchor="t">
+            <a:spAutoFit/>
+          </a:bodyPr>
+          <a:lstStyle/>
+          <a:p>
+            <a:pPr algn="l">
+              <a:lnSpc>
+                <a:spcPct val="105000"/>
+              </a:lnSpc>
+            </a:pPr>
+            <a:r>
+              <a:rPr sz="1100" b="1" i="0">
                 <a:solidFill>
                   <a:srgbClr val="1E1B4B"/>
                 </a:solidFill>
                 <a:latin typeface="Calibri"/>
               </a:rPr>
-              <a:t>Cohort 0 hits the bar.</a:t>
-            </a:r>
-          </a:p>
-        </p:txBody>
-      </p:sp>
-      <p:sp>
-        <p:nvSpPr>
-          <p:cNvPr id="33" name="TextBox 32"/>
-          <p:cNvSpPr txBox="1"/>
-          <p:nvPr/>
-        </p:nvSpPr>
-        <p:spPr>
-          <a:xfrm>
-            <a:off x="4553712" y="5513832"/>
-            <a:ext cx="3337560" cy="960120"/>
-          </a:xfrm>
-          <a:prstGeom prst="rect">
-            <a:avLst/>
-          </a:prstGeom>
-          <a:noFill/>
-        </p:spPr>
-        <p:txBody>
-          <a:bodyPr wrap="square" lIns="45720" rIns="45720" tIns="18288" bIns="18288">
-            <a:spAutoFit/>
-          </a:bodyPr>
-          <a:lstStyle/>
-          <a:p>
-            <a:pPr algn="l">
-              <a:lnSpc>
-                <a:spcPct val="140000"/>
-              </a:lnSpc>
-              <a:spcBef>
-                <a:spcPts val="400"/>
-              </a:spcBef>
-            </a:pPr>
-            <a:r>
-              <a:rPr sz="1000" b="1">
-                <a:solidFill>
-                  <a:srgbClr val="06B6D4"/>
-                </a:solidFill>
-                <a:latin typeface="Calibri"/>
-              </a:rPr>
-              <a:t>• </a:t>
-            </a:r>
-            <a:r>
-              <a:rPr sz="1000">
-                <a:solidFill>
-                  <a:srgbClr val="141B2D"/>
-                </a:solidFill>
-                <a:latin typeface="Calibri"/>
-              </a:rPr>
-              <a:t>100 learners on Noida campus.</a:t>
-            </a:r>
-          </a:p>
-          <a:p>
-            <a:pPr algn="l">
-              <a:lnSpc>
-                <a:spcPct val="140000"/>
-              </a:lnSpc>
-              <a:spcBef>
-                <a:spcPts val="400"/>
-              </a:spcBef>
-            </a:pPr>
-            <a:r>
-              <a:rPr sz="1000" b="1">
-                <a:solidFill>
-                  <a:srgbClr val="06B6D4"/>
-                </a:solidFill>
-                <a:latin typeface="Calibri"/>
-              </a:rPr>
-              <a:t>• </a:t>
-            </a:r>
-            <a:r>
-              <a:rPr sz="1000">
-                <a:solidFill>
-                  <a:srgbClr val="141B2D"/>
-                </a:solidFill>
-                <a:latin typeface="Calibri"/>
-              </a:rPr>
-              <a:t>NSAT (Net Satisfaction) above 4.5 / 5.</a:t>
-            </a:r>
-          </a:p>
-          <a:p>
-            <a:pPr algn="l">
-              <a:lnSpc>
-                <a:spcPct val="140000"/>
-              </a:lnSpc>
-              <a:spcBef>
-                <a:spcPts val="400"/>
-              </a:spcBef>
-            </a:pPr>
-            <a:r>
-              <a:rPr sz="1000" b="1">
-                <a:solidFill>
-                  <a:srgbClr val="06B6D4"/>
-                </a:solidFill>
-                <a:latin typeface="Calibri"/>
-              </a:rPr>
-              <a:t>• </a:t>
-            </a:r>
-            <a:r>
-              <a:rPr sz="1000">
-                <a:solidFill>
-                  <a:srgbClr val="141B2D"/>
-                </a:solidFill>
-                <a:latin typeface="Calibri"/>
-              </a:rPr>
-              <a:t>More than 50% share publicly within 7 days.</a:t>
-            </a:r>
-          </a:p>
-        </p:txBody>
-      </p:sp>
-      <p:sp>
-        <p:nvSpPr>
-          <p:cNvPr id="34" name="Rounded Rectangle 33"/>
+              <a:t>BRING THE FAMILY.</a:t>
+            </a:r>
+          </a:p>
+        </p:txBody>
+      </p:sp>
+      <p:sp>
+        <p:nvSpPr>
+          <p:cNvPr id="35" name="TextBox 34"/>
+          <p:cNvSpPr txBox="1"/>
+          <p:nvPr/>
+        </p:nvSpPr>
+        <p:spPr>
+          <a:xfrm>
+            <a:off x="2922422" y="5943600"/>
+            <a:ext cx="1870862" cy="548640"/>
+          </a:xfrm>
+          <a:prstGeom prst="rect">
+            <a:avLst/>
+          </a:prstGeom>
+          <a:noFill/>
+        </p:spPr>
+        <p:txBody>
+          <a:bodyPr wrap="square" lIns="45720" rIns="45720" tIns="18288" bIns="18288" anchor="t">
+            <a:spAutoFit/>
+          </a:bodyPr>
+          <a:lstStyle/>
+          <a:p>
+            <a:pPr algn="l">
+              <a:lnSpc>
+                <a:spcPct val="130000"/>
+              </a:lnSpc>
+            </a:pPr>
+            <a:r>
+              <a:rPr sz="930" b="0" i="1">
+                <a:solidFill>
+                  <a:srgbClr val="1E1B4B"/>
+                </a:solidFill>
+                <a:latin typeface="Calibri"/>
+              </a:rPr>
+              <a:t>Each ticket includes one parent. The photograph is the product.</a:t>
+            </a:r>
+          </a:p>
+        </p:txBody>
+      </p:sp>
+      <p:sp>
+        <p:nvSpPr>
+          <p:cNvPr id="36" name="Rounded Rectangle 35"/>
           <p:cNvSpPr/>
           <p:nvPr/>
         </p:nvSpPr>
         <p:spPr>
           <a:xfrm>
-            <a:off x="8193024" y="4370832"/>
-            <a:ext cx="3703320" cy="2148840"/>
+            <a:off x="5021884" y="5166360"/>
+            <a:ext cx="2145182" cy="1325880"/>
           </a:xfrm>
           <a:prstGeom prst="roundRect">
             <a:avLst>
@@ -20661,7 +20603,7 @@
             </a:avLst>
           </a:prstGeom>
           <a:solidFill>
-            <a:srgbClr val="F4F6FB"/>
+            <a:srgbClr val="FFFFFF"/>
           </a:solidFill>
           <a:ln w="6350">
             <a:solidFill>
@@ -20694,14 +20636,14 @@
       </p:sp>
       <p:sp>
         <p:nvSpPr>
-          <p:cNvPr id="35" name="Rectangle 34"/>
+          <p:cNvPr id="37" name="Rectangle 36"/>
           <p:cNvSpPr/>
           <p:nvPr/>
         </p:nvSpPr>
         <p:spPr>
           <a:xfrm>
-            <a:off x="8193024" y="4370832"/>
-            <a:ext cx="3703320" cy="64008"/>
+            <a:off x="5021884" y="5166360"/>
+            <a:ext cx="2145182" cy="64008"/>
           </a:xfrm>
           <a:prstGeom prst="rect">
             <a:avLst/>
@@ -20738,185 +20680,535 @@
       </p:sp>
       <p:sp>
         <p:nvSpPr>
-          <p:cNvPr id="36" name="TextBox 35"/>
-          <p:cNvSpPr txBox="1"/>
-          <p:nvPr/>
-        </p:nvSpPr>
-        <p:spPr>
-          <a:xfrm>
-            <a:off x="8421624" y="4553712"/>
-            <a:ext cx="2743200" cy="274320"/>
-          </a:xfrm>
-          <a:prstGeom prst="rect">
-            <a:avLst/>
-          </a:prstGeom>
-          <a:noFill/>
-        </p:spPr>
-        <p:txBody>
-          <a:bodyPr wrap="square" lIns="45720" rIns="45720" tIns="18288" bIns="18288" anchor="t">
-            <a:spAutoFit/>
-          </a:bodyPr>
-          <a:lstStyle/>
-          <a:p>
-            <a:pPr algn="l">
-              <a:lnSpc>
-                <a:spcPct val="125000"/>
-              </a:lnSpc>
-            </a:pPr>
-            <a:r>
-              <a:rPr sz="950" b="1" i="0">
+          <p:cNvPr id="38" name="TextBox 37"/>
+          <p:cNvSpPr txBox="1"/>
+          <p:nvPr/>
+        </p:nvSpPr>
+        <p:spPr>
+          <a:xfrm>
+            <a:off x="5204764" y="5330952"/>
+            <a:ext cx="640080" cy="274320"/>
+          </a:xfrm>
+          <a:prstGeom prst="rect">
+            <a:avLst/>
+          </a:prstGeom>
+          <a:noFill/>
+        </p:spPr>
+        <p:txBody>
+          <a:bodyPr wrap="square" lIns="45720" rIns="45720" tIns="18288" bIns="18288" anchor="t">
+            <a:spAutoFit/>
+          </a:bodyPr>
+          <a:lstStyle/>
+          <a:p>
+            <a:pPr algn="l">
+              <a:lnSpc>
+                <a:spcPct val="100000"/>
+              </a:lnSpc>
+            </a:pPr>
+            <a:r>
+              <a:rPr sz="1400" b="1" i="0">
                 <a:solidFill>
                   <a:srgbClr val="A855F7"/>
                 </a:solidFill>
                 <a:latin typeface="Calibri"/>
               </a:rPr>
-              <a:t>SUCCESS LOOKS LIKE</a:t>
-            </a:r>
-          </a:p>
-        </p:txBody>
-      </p:sp>
-      <p:sp>
-        <p:nvSpPr>
-          <p:cNvPr id="37" name="TextBox 36"/>
-          <p:cNvSpPr txBox="1"/>
-          <p:nvPr/>
-        </p:nvSpPr>
-        <p:spPr>
-          <a:xfrm>
-            <a:off x="8421624" y="4828032"/>
-            <a:ext cx="3337560" cy="640080"/>
-          </a:xfrm>
-          <a:prstGeom prst="rect">
-            <a:avLst/>
-          </a:prstGeom>
-          <a:noFill/>
-        </p:spPr>
-        <p:txBody>
-          <a:bodyPr wrap="square" lIns="45720" rIns="45720" tIns="18288" bIns="18288" anchor="t">
-            <a:spAutoFit/>
-          </a:bodyPr>
-          <a:lstStyle/>
-          <a:p>
-            <a:pPr algn="l">
-              <a:lnSpc>
-                <a:spcPct val="115000"/>
-              </a:lnSpc>
-            </a:pPr>
-            <a:r>
-              <a:rPr sz="1500" b="1" i="0">
+              <a:t>03</a:t>
+            </a:r>
+          </a:p>
+        </p:txBody>
+      </p:sp>
+      <p:sp>
+        <p:nvSpPr>
+          <p:cNvPr id="39" name="TextBox 38"/>
+          <p:cNvSpPr txBox="1"/>
+          <p:nvPr/>
+        </p:nvSpPr>
+        <p:spPr>
+          <a:xfrm>
+            <a:off x="5204764" y="5605272"/>
+            <a:ext cx="1870862" cy="365760"/>
+          </a:xfrm>
+          <a:prstGeom prst="rect">
+            <a:avLst/>
+          </a:prstGeom>
+          <a:noFill/>
+        </p:spPr>
+        <p:txBody>
+          <a:bodyPr wrap="square" lIns="45720" rIns="45720" tIns="18288" bIns="18288" anchor="t">
+            <a:spAutoFit/>
+          </a:bodyPr>
+          <a:lstStyle/>
+          <a:p>
+            <a:pPr algn="l">
+              <a:lnSpc>
+                <a:spcPct val="105000"/>
+              </a:lnSpc>
+            </a:pPr>
+            <a:r>
+              <a:rPr sz="1100" b="1" i="0">
                 <a:solidFill>
                   <a:srgbClr val="1E1B4B"/>
                 </a:solidFill>
                 <a:latin typeface="Calibri"/>
               </a:rPr>
-              <a:t>Prospects ask the question for us.</a:t>
-            </a:r>
-          </a:p>
-        </p:txBody>
-      </p:sp>
-      <p:sp>
-        <p:nvSpPr>
-          <p:cNvPr id="38" name="TextBox 37"/>
-          <p:cNvSpPr txBox="1"/>
-          <p:nvPr/>
-        </p:nvSpPr>
-        <p:spPr>
-          <a:xfrm>
-            <a:off x="8421624" y="5513832"/>
-            <a:ext cx="3337560" cy="960120"/>
-          </a:xfrm>
-          <a:prstGeom prst="rect">
-            <a:avLst/>
-          </a:prstGeom>
-          <a:noFill/>
-        </p:spPr>
-        <p:txBody>
-          <a:bodyPr wrap="square" lIns="45720" rIns="45720" tIns="18288" bIns="18288">
-            <a:spAutoFit/>
-          </a:bodyPr>
-          <a:lstStyle/>
-          <a:p>
-            <a:pPr algn="l">
-              <a:lnSpc>
-                <a:spcPct val="140000"/>
-              </a:lnSpc>
-              <a:spcBef>
-                <a:spcPts val="400"/>
-              </a:spcBef>
-            </a:pPr>
-            <a:r>
-              <a:rPr sz="1000" b="1">
-                <a:solidFill>
-                  <a:srgbClr val="A855F7"/>
-                </a:solidFill>
-                <a:latin typeface="Calibri"/>
-              </a:rPr>
-              <a:t>• </a:t>
-            </a:r>
-            <a:r>
-              <a:rPr sz="1000">
-                <a:solidFill>
-                  <a:srgbClr val="141B2D"/>
-                </a:solidFill>
-                <a:latin typeface="Calibri"/>
-              </a:rPr>
-              <a:t>By month 6, prospects ask current learners.</a:t>
-            </a:r>
-          </a:p>
-          <a:p>
-            <a:pPr algn="l">
-              <a:lnSpc>
-                <a:spcPct val="140000"/>
-              </a:lnSpc>
-              <a:spcBef>
-                <a:spcPts val="400"/>
-              </a:spcBef>
-            </a:pPr>
-            <a:r>
-              <a:rPr sz="1000" b="1">
-                <a:solidFill>
-                  <a:srgbClr val="A855F7"/>
-                </a:solidFill>
-                <a:latin typeface="Calibri"/>
-              </a:rPr>
-              <a:t>• </a:t>
-            </a:r>
-            <a:r>
-              <a:rPr sz="1000">
-                <a:solidFill>
-                  <a:srgbClr val="141B2D"/>
-                </a:solidFill>
-                <a:latin typeface="Calibri"/>
-              </a:rPr>
-              <a:t>Did you do Ignite? becomes the question.</a:t>
-            </a:r>
-          </a:p>
-          <a:p>
-            <a:pPr algn="l">
-              <a:lnSpc>
-                <a:spcPct val="140000"/>
-              </a:lnSpc>
-              <a:spcBef>
-                <a:spcPts val="400"/>
-              </a:spcBef>
-            </a:pPr>
-            <a:r>
-              <a:rPr sz="1000" b="1">
-                <a:solidFill>
-                  <a:srgbClr val="A855F7"/>
-                </a:solidFill>
-                <a:latin typeface="Calibri"/>
-              </a:rPr>
-              <a:t>• </a:t>
-            </a:r>
-            <a:r>
-              <a:rPr sz="1000">
-                <a:solidFill>
-                  <a:srgbClr val="141B2D"/>
-                </a:solidFill>
-                <a:latin typeface="Calibri"/>
-              </a:rPr>
-              <a:t>Current learners answer with a photo.</a:t>
+              <a:t>SPONSORS PAY 50%.</a:t>
+            </a:r>
+          </a:p>
+        </p:txBody>
+      </p:sp>
+      <p:sp>
+        <p:nvSpPr>
+          <p:cNvPr id="40" name="TextBox 39"/>
+          <p:cNvSpPr txBox="1"/>
+          <p:nvPr/>
+        </p:nvSpPr>
+        <p:spPr>
+          <a:xfrm>
+            <a:off x="5204764" y="5943600"/>
+            <a:ext cx="1870862" cy="548640"/>
+          </a:xfrm>
+          <a:prstGeom prst="rect">
+            <a:avLst/>
+          </a:prstGeom>
+          <a:noFill/>
+        </p:spPr>
+        <p:txBody>
+          <a:bodyPr wrap="square" lIns="45720" rIns="45720" tIns="18288" bIns="18288" anchor="t">
+            <a:spAutoFit/>
+          </a:bodyPr>
+          <a:lstStyle/>
+          <a:p>
+            <a:pPr algn="l">
+              <a:lnSpc>
+                <a:spcPct val="130000"/>
+              </a:lnSpc>
+            </a:pPr>
+            <a:r>
+              <a:rPr sz="930" b="0" i="1">
+                <a:solidFill>
+                  <a:srgbClr val="1E1B4B"/>
+                </a:solidFill>
+                <a:latin typeface="Calibri"/>
+              </a:rPr>
+              <a:t>Boat, Cred, MakeMyTrip stalls. We bring 2.5L learner reach.</a:t>
+            </a:r>
+          </a:p>
+        </p:txBody>
+      </p:sp>
+      <p:sp>
+        <p:nvSpPr>
+          <p:cNvPr id="41" name="Rounded Rectangle 40"/>
+          <p:cNvSpPr/>
+          <p:nvPr/>
+        </p:nvSpPr>
+        <p:spPr>
+          <a:xfrm>
+            <a:off x="7304227" y="5166360"/>
+            <a:ext cx="2145182" cy="1325880"/>
+          </a:xfrm>
+          <a:prstGeom prst="roundRect">
+            <a:avLst>
+              <a:gd name="adj" fmla="val 3000"/>
+            </a:avLst>
+          </a:prstGeom>
+          <a:solidFill>
+            <a:srgbClr val="FFFFFF"/>
+          </a:solidFill>
+          <a:ln w="6350">
+            <a:solidFill>
+              <a:srgbClr val="DDE2EE"/>
+            </a:solidFill>
+          </a:ln>
+          <a:effectLst/>
+        </p:spPr>
+        <p:style>
+          <a:lnRef idx="1">
+            <a:schemeClr val="accent1"/>
+          </a:lnRef>
+          <a:fillRef idx="3">
+            <a:schemeClr val="accent1"/>
+          </a:fillRef>
+          <a:effectRef idx="2">
+            <a:schemeClr val="accent1"/>
+          </a:effectRef>
+          <a:fontRef idx="minor">
+            <a:schemeClr val="lt1"/>
+          </a:fontRef>
+        </p:style>
+        <p:txBody>
+          <a:bodyPr rtlCol="0" anchor="ctr"/>
+          <a:lstStyle/>
+          <a:p>
+            <a:pPr algn="ctr"/>
+          </a:p>
+        </p:txBody>
+      </p:sp>
+      <p:sp>
+        <p:nvSpPr>
+          <p:cNvPr id="42" name="Rectangle 41"/>
+          <p:cNvSpPr/>
+          <p:nvPr/>
+        </p:nvSpPr>
+        <p:spPr>
+          <a:xfrm>
+            <a:off x="7304227" y="5166360"/>
+            <a:ext cx="2145182" cy="64008"/>
+          </a:xfrm>
+          <a:prstGeom prst="rect">
+            <a:avLst/>
+          </a:prstGeom>
+          <a:solidFill>
+            <a:srgbClr val="14B8A6"/>
+          </a:solidFill>
+          <a:ln>
+            <a:noFill/>
+          </a:ln>
+          <a:effectLst/>
+        </p:spPr>
+        <p:style>
+          <a:lnRef idx="1">
+            <a:schemeClr val="accent1"/>
+          </a:lnRef>
+          <a:fillRef idx="3">
+            <a:schemeClr val="accent1"/>
+          </a:fillRef>
+          <a:effectRef idx="2">
+            <a:schemeClr val="accent1"/>
+          </a:effectRef>
+          <a:fontRef idx="minor">
+            <a:schemeClr val="lt1"/>
+          </a:fontRef>
+        </p:style>
+        <p:txBody>
+          <a:bodyPr rtlCol="0" anchor="ctr"/>
+          <a:lstStyle/>
+          <a:p>
+            <a:pPr algn="ctr"/>
+          </a:p>
+        </p:txBody>
+      </p:sp>
+      <p:sp>
+        <p:nvSpPr>
+          <p:cNvPr id="43" name="TextBox 42"/>
+          <p:cNvSpPr txBox="1"/>
+          <p:nvPr/>
+        </p:nvSpPr>
+        <p:spPr>
+          <a:xfrm>
+            <a:off x="7487107" y="5330952"/>
+            <a:ext cx="640080" cy="274320"/>
+          </a:xfrm>
+          <a:prstGeom prst="rect">
+            <a:avLst/>
+          </a:prstGeom>
+          <a:noFill/>
+        </p:spPr>
+        <p:txBody>
+          <a:bodyPr wrap="square" lIns="45720" rIns="45720" tIns="18288" bIns="18288" anchor="t">
+            <a:spAutoFit/>
+          </a:bodyPr>
+          <a:lstStyle/>
+          <a:p>
+            <a:pPr algn="l">
+              <a:lnSpc>
+                <a:spcPct val="100000"/>
+              </a:lnSpc>
+            </a:pPr>
+            <a:r>
+              <a:rPr sz="1400" b="1" i="0">
+                <a:solidFill>
+                  <a:srgbClr val="14B8A6"/>
+                </a:solidFill>
+                <a:latin typeface="Calibri"/>
+              </a:rPr>
+              <a:t>04</a:t>
+            </a:r>
+          </a:p>
+        </p:txBody>
+      </p:sp>
+      <p:sp>
+        <p:nvSpPr>
+          <p:cNvPr id="44" name="TextBox 43"/>
+          <p:cNvSpPr txBox="1"/>
+          <p:nvPr/>
+        </p:nvSpPr>
+        <p:spPr>
+          <a:xfrm>
+            <a:off x="7487107" y="5605272"/>
+            <a:ext cx="1870862" cy="365760"/>
+          </a:xfrm>
+          <a:prstGeom prst="rect">
+            <a:avLst/>
+          </a:prstGeom>
+          <a:noFill/>
+        </p:spPr>
+        <p:txBody>
+          <a:bodyPr wrap="square" lIns="45720" rIns="45720" tIns="18288" bIns="18288" anchor="t">
+            <a:spAutoFit/>
+          </a:bodyPr>
+          <a:lstStyle/>
+          <a:p>
+            <a:pPr algn="l">
+              <a:lnSpc>
+                <a:spcPct val="105000"/>
+              </a:lnSpc>
+            </a:pPr>
+            <a:r>
+              <a:rPr sz="1100" b="1" i="0">
+                <a:solidFill>
+                  <a:srgbClr val="1E1B4B"/>
+                </a:solidFill>
+                <a:latin typeface="Calibri"/>
+              </a:rPr>
+              <a:t>OPEN MIC AUDITION.</a:t>
+            </a:r>
+          </a:p>
+        </p:txBody>
+      </p:sp>
+      <p:sp>
+        <p:nvSpPr>
+          <p:cNvPr id="45" name="TextBox 44"/>
+          <p:cNvSpPr txBox="1"/>
+          <p:nvPr/>
+        </p:nvSpPr>
+        <p:spPr>
+          <a:xfrm>
+            <a:off x="7487107" y="5943600"/>
+            <a:ext cx="1870862" cy="548640"/>
+          </a:xfrm>
+          <a:prstGeom prst="rect">
+            <a:avLst/>
+          </a:prstGeom>
+          <a:noFill/>
+        </p:spPr>
+        <p:txBody>
+          <a:bodyPr wrap="square" lIns="45720" rIns="45720" tIns="18288" bIns="18288" anchor="t">
+            <a:spAutoFit/>
+          </a:bodyPr>
+          <a:lstStyle/>
+          <a:p>
+            <a:pPr algn="l">
+              <a:lnSpc>
+                <a:spcPct val="130000"/>
+              </a:lnSpc>
+            </a:pPr>
+            <a:r>
+              <a:rPr sz="930" b="0" i="1">
+                <a:solidFill>
+                  <a:srgbClr val="1E1B4B"/>
+                </a:solidFill>
+                <a:latin typeface="Calibri"/>
+              </a:rPr>
+              <a:t>Five learners win on beSocial. They open for the headliner.</a:t>
+            </a:r>
+          </a:p>
+        </p:txBody>
+      </p:sp>
+      <p:sp>
+        <p:nvSpPr>
+          <p:cNvPr id="46" name="Rounded Rectangle 45"/>
+          <p:cNvSpPr/>
+          <p:nvPr/>
+        </p:nvSpPr>
+        <p:spPr>
+          <a:xfrm>
+            <a:off x="9586569" y="5166360"/>
+            <a:ext cx="2145182" cy="1325880"/>
+          </a:xfrm>
+          <a:prstGeom prst="roundRect">
+            <a:avLst>
+              <a:gd name="adj" fmla="val 3000"/>
+            </a:avLst>
+          </a:prstGeom>
+          <a:solidFill>
+            <a:srgbClr val="FFFFFF"/>
+          </a:solidFill>
+          <a:ln w="6350">
+            <a:solidFill>
+              <a:srgbClr val="DDE2EE"/>
+            </a:solidFill>
+          </a:ln>
+          <a:effectLst/>
+        </p:spPr>
+        <p:style>
+          <a:lnRef idx="1">
+            <a:schemeClr val="accent1"/>
+          </a:lnRef>
+          <a:fillRef idx="3">
+            <a:schemeClr val="accent1"/>
+          </a:fillRef>
+          <a:effectRef idx="2">
+            <a:schemeClr val="accent1"/>
+          </a:effectRef>
+          <a:fontRef idx="minor">
+            <a:schemeClr val="lt1"/>
+          </a:fontRef>
+        </p:style>
+        <p:txBody>
+          <a:bodyPr rtlCol="0" anchor="ctr"/>
+          <a:lstStyle/>
+          <a:p>
+            <a:pPr algn="ctr"/>
+          </a:p>
+        </p:txBody>
+      </p:sp>
+      <p:sp>
+        <p:nvSpPr>
+          <p:cNvPr id="47" name="Rectangle 46"/>
+          <p:cNvSpPr/>
+          <p:nvPr/>
+        </p:nvSpPr>
+        <p:spPr>
+          <a:xfrm>
+            <a:off x="9586569" y="5166360"/>
+            <a:ext cx="2145182" cy="64008"/>
+          </a:xfrm>
+          <a:prstGeom prst="rect">
+            <a:avLst/>
+          </a:prstGeom>
+          <a:solidFill>
+            <a:srgbClr val="06B6D4"/>
+          </a:solidFill>
+          <a:ln>
+            <a:noFill/>
+          </a:ln>
+          <a:effectLst/>
+        </p:spPr>
+        <p:style>
+          <a:lnRef idx="1">
+            <a:schemeClr val="accent1"/>
+          </a:lnRef>
+          <a:fillRef idx="3">
+            <a:schemeClr val="accent1"/>
+          </a:fillRef>
+          <a:effectRef idx="2">
+            <a:schemeClr val="accent1"/>
+          </a:effectRef>
+          <a:fontRef idx="minor">
+            <a:schemeClr val="lt1"/>
+          </a:fontRef>
+        </p:style>
+        <p:txBody>
+          <a:bodyPr rtlCol="0" anchor="ctr"/>
+          <a:lstStyle/>
+          <a:p>
+            <a:pPr algn="ctr"/>
+          </a:p>
+        </p:txBody>
+      </p:sp>
+      <p:sp>
+        <p:nvSpPr>
+          <p:cNvPr id="48" name="TextBox 47"/>
+          <p:cNvSpPr txBox="1"/>
+          <p:nvPr/>
+        </p:nvSpPr>
+        <p:spPr>
+          <a:xfrm>
+            <a:off x="9769449" y="5330952"/>
+            <a:ext cx="640080" cy="274320"/>
+          </a:xfrm>
+          <a:prstGeom prst="rect">
+            <a:avLst/>
+          </a:prstGeom>
+          <a:noFill/>
+        </p:spPr>
+        <p:txBody>
+          <a:bodyPr wrap="square" lIns="45720" rIns="45720" tIns="18288" bIns="18288" anchor="t">
+            <a:spAutoFit/>
+          </a:bodyPr>
+          <a:lstStyle/>
+          <a:p>
+            <a:pPr algn="l">
+              <a:lnSpc>
+                <a:spcPct val="100000"/>
+              </a:lnSpc>
+            </a:pPr>
+            <a:r>
+              <a:rPr sz="1400" b="1" i="0">
+                <a:solidFill>
+                  <a:srgbClr val="06B6D4"/>
+                </a:solidFill>
+                <a:latin typeface="Calibri"/>
+              </a:rPr>
+              <a:t>05</a:t>
+            </a:r>
+          </a:p>
+        </p:txBody>
+      </p:sp>
+      <p:sp>
+        <p:nvSpPr>
+          <p:cNvPr id="49" name="TextBox 48"/>
+          <p:cNvSpPr txBox="1"/>
+          <p:nvPr/>
+        </p:nvSpPr>
+        <p:spPr>
+          <a:xfrm>
+            <a:off x="9769449" y="5605272"/>
+            <a:ext cx="1870862" cy="365760"/>
+          </a:xfrm>
+          <a:prstGeom prst="rect">
+            <a:avLst/>
+          </a:prstGeom>
+          <a:noFill/>
+        </p:spPr>
+        <p:txBody>
+          <a:bodyPr wrap="square" lIns="45720" rIns="45720" tIns="18288" bIns="18288" anchor="t">
+            <a:spAutoFit/>
+          </a:bodyPr>
+          <a:lstStyle/>
+          <a:p>
+            <a:pPr algn="l">
+              <a:lnSpc>
+                <a:spcPct val="105000"/>
+              </a:lnSpc>
+            </a:pPr>
+            <a:r>
+              <a:rPr sz="1100" b="1" i="0">
+                <a:solidFill>
+                  <a:srgbClr val="1E1B4B"/>
+                </a:solidFill>
+                <a:latin typeface="Calibri"/>
+              </a:rPr>
+              <a:t>DOCUSERIES, NOT AD.</a:t>
+            </a:r>
+          </a:p>
+        </p:txBody>
+      </p:sp>
+      <p:sp>
+        <p:nvSpPr>
+          <p:cNvPr id="50" name="TextBox 49"/>
+          <p:cNvSpPr txBox="1"/>
+          <p:nvPr/>
+        </p:nvSpPr>
+        <p:spPr>
+          <a:xfrm>
+            <a:off x="9769449" y="5943600"/>
+            <a:ext cx="1870862" cy="548640"/>
+          </a:xfrm>
+          <a:prstGeom prst="rect">
+            <a:avLst/>
+          </a:prstGeom>
+          <a:noFill/>
+        </p:spPr>
+        <p:txBody>
+          <a:bodyPr wrap="square" lIns="45720" rIns="45720" tIns="18288" bIns="18288" anchor="t">
+            <a:spAutoFit/>
+          </a:bodyPr>
+          <a:lstStyle/>
+          <a:p>
+            <a:pPr algn="l">
+              <a:lnSpc>
+                <a:spcPct val="130000"/>
+              </a:lnSpc>
+            </a:pPr>
+            <a:r>
+              <a:rPr sz="930" b="0" i="1">
+                <a:solidFill>
+                  <a:srgbClr val="1E1B4B"/>
+                </a:solidFill>
+                <a:latin typeface="Calibri"/>
+              </a:rPr>
+              <a:t>Creator partner films Cohort 0. Distribution is built in.</a:t>
             </a:r>
           </a:p>
         </p:txBody>
@@ -21017,7 +21309,7 @@
                 </a:solidFill>
                 <a:latin typeface="Calibri"/>
               </a:rPr>
-              <a:t>TASK 1   |   EVENT CONCEPT</a:t>
+              <a:t>TASK 1   |   AMITY IGNITE, COHORT 0   |   THE FORMAT</a:t>
             </a:r>
           </a:p>
         </p:txBody>
@@ -21056,7 +21348,7 @@
                 </a:solidFill>
                 <a:latin typeface="Calibri"/>
               </a:rPr>
-              <a:t>Event concept. Amity Ignite, Cohort 0.</a:t>
+              <a:t>Day = campus. Dusk = convocation. Night = concert.</a:t>
             </a:r>
           </a:p>
         </p:txBody>
@@ -21163,9 +21455,48 @@
           </a:p>
         </p:txBody>
       </p:sp>
+      <p:sp>
+        <p:nvSpPr>
+          <p:cNvPr id="8" name="TextBox 7"/>
+          <p:cNvSpPr txBox="1"/>
+          <p:nvPr/>
+        </p:nvSpPr>
+        <p:spPr>
+          <a:xfrm>
+            <a:off x="457200" y="1417320"/>
+            <a:ext cx="11247120" cy="365760"/>
+          </a:xfrm>
+          <a:prstGeom prst="rect">
+            <a:avLst/>
+          </a:prstGeom>
+          <a:noFill/>
+        </p:spPr>
+        <p:txBody>
+          <a:bodyPr wrap="square" lIns="45720" rIns="45720" tIns="18288" bIns="18288" anchor="t">
+            <a:spAutoFit/>
+          </a:bodyPr>
+          <a:lstStyle/>
+          <a:p>
+            <a:pPr algn="l">
+              <a:lnSpc>
+                <a:spcPct val="135000"/>
+              </a:lnSpc>
+            </a:pPr>
+            <a:r>
+              <a:rPr sz="1150" b="0" i="1">
+                <a:solidFill>
+                  <a:srgbClr val="52597A"/>
+                </a:solidFill>
+                <a:latin typeface="Calibri"/>
+              </a:rPr>
+              <a:t>100 learners. 100 family members. One Noida campus. One headliner. Pilot first. Prove. Then take it to 6 cities.</a:t>
+            </a:r>
+          </a:p>
+        </p:txBody>
+      </p:sp>
       <p:pic>
         <p:nvPicPr>
-          <p:cNvPr id="8" name="Picture 7" descr="students_group.jpg"/>
+          <p:cNvPr id="9" name="Picture 8" descr="students_group.jpg"/>
           <p:cNvPicPr>
             <a:picLocks noChangeAspect="1"/>
           </p:cNvPicPr>
@@ -21179,8 +21510,8 @@
         </p:blipFill>
         <p:spPr>
           <a:xfrm>
-            <a:off x="457200" y="1417320"/>
-            <a:ext cx="4023360" cy="4937760"/>
+            <a:off x="457200" y="1920240"/>
+            <a:ext cx="3291840" cy="3520440"/>
           </a:xfrm>
           <a:prstGeom prst="rect">
             <a:avLst/>
@@ -21189,14 +21520,14 @@
       </p:pic>
       <p:sp>
         <p:nvSpPr>
-          <p:cNvPr id="9" name="Rectangle 8"/>
+          <p:cNvPr id="10" name="Rectangle 9"/>
           <p:cNvSpPr/>
           <p:nvPr/>
         </p:nvSpPr>
         <p:spPr>
           <a:xfrm>
-            <a:off x="457200" y="5989320"/>
-            <a:ext cx="4023360" cy="365760"/>
+            <a:off x="457200" y="5120640"/>
+            <a:ext cx="3291840" cy="365760"/>
           </a:xfrm>
           <a:prstGeom prst="rect">
             <a:avLst/>
@@ -21233,14 +21564,14 @@
       </p:sp>
       <p:sp>
         <p:nvSpPr>
-          <p:cNvPr id="10" name="TextBox 9"/>
-          <p:cNvSpPr txBox="1"/>
-          <p:nvPr/>
-        </p:nvSpPr>
-        <p:spPr>
-          <a:xfrm>
-            <a:off x="548640" y="6016752"/>
-            <a:ext cx="4023360" cy="365760"/>
+          <p:cNvPr id="11" name="TextBox 10"/>
+          <p:cNvSpPr txBox="1"/>
+          <p:nvPr/>
+        </p:nvSpPr>
+        <p:spPr>
+          <a:xfrm>
+            <a:off x="548640" y="5138928"/>
+            <a:ext cx="3291840" cy="365760"/>
           </a:xfrm>
           <a:prstGeom prst="rect">
             <a:avLst/>
@@ -21259,105 +21590,1315 @@
               </a:lnSpc>
             </a:pPr>
             <a:r>
-              <a:rPr sz="1050" b="1" i="0">
+              <a:rPr sz="900" b="1" i="0">
                 <a:solidFill>
                   <a:srgbClr val="14B8A6"/>
                 </a:solidFill>
                 <a:latin typeface="Calibri"/>
               </a:rPr>
-              <a:t>1 day   100 learners   Noida campus   Pilot</a:t>
-            </a:r>
-          </a:p>
-        </p:txBody>
-      </p:sp>
-      <p:sp>
-        <p:nvSpPr>
-          <p:cNvPr id="11" name="TextBox 10"/>
-          <p:cNvSpPr txBox="1"/>
-          <p:nvPr/>
-        </p:nvSpPr>
-        <p:spPr>
-          <a:xfrm>
-            <a:off x="4709160" y="1417320"/>
-            <a:ext cx="7040880" cy="411480"/>
-          </a:xfrm>
-          <a:prstGeom prst="rect">
-            <a:avLst/>
-          </a:prstGeom>
-          <a:noFill/>
-        </p:spPr>
-        <p:txBody>
-          <a:bodyPr wrap="square" lIns="45720" rIns="45720" tIns="18288" bIns="18288" anchor="t">
-            <a:spAutoFit/>
-          </a:bodyPr>
-          <a:lstStyle/>
-          <a:p>
-            <a:pPr algn="l">
-              <a:lnSpc>
-                <a:spcPct val="110000"/>
-              </a:lnSpc>
-            </a:pPr>
-            <a:r>
-              <a:rPr sz="1500" b="1" i="1">
+              <a:t>1 DAY   |   100 LEARNERS + 100 FAMILY   |   1 HEADLINER</a:t>
+            </a:r>
+          </a:p>
+        </p:txBody>
+      </p:sp>
+      <p:sp>
+        <p:nvSpPr>
+          <p:cNvPr id="12" name="Rounded Rectangle 11"/>
+          <p:cNvSpPr/>
+          <p:nvPr/>
+        </p:nvSpPr>
+        <p:spPr>
+          <a:xfrm>
+            <a:off x="457200" y="5577840"/>
+            <a:ext cx="3291840" cy="960120"/>
+          </a:xfrm>
+          <a:prstGeom prst="roundRect">
+            <a:avLst>
+              <a:gd name="adj" fmla="val 3000"/>
+            </a:avLst>
+          </a:prstGeom>
+          <a:solidFill>
+            <a:srgbClr val="100E2E"/>
+          </a:solidFill>
+          <a:ln>
+            <a:noFill/>
+          </a:ln>
+          <a:effectLst/>
+        </p:spPr>
+        <p:style>
+          <a:lnRef idx="1">
+            <a:schemeClr val="accent1"/>
+          </a:lnRef>
+          <a:fillRef idx="3">
+            <a:schemeClr val="accent1"/>
+          </a:fillRef>
+          <a:effectRef idx="2">
+            <a:schemeClr val="accent1"/>
+          </a:effectRef>
+          <a:fontRef idx="minor">
+            <a:schemeClr val="lt1"/>
+          </a:fontRef>
+        </p:style>
+        <p:txBody>
+          <a:bodyPr rtlCol="0" anchor="ctr"/>
+          <a:lstStyle/>
+          <a:p>
+            <a:pPr algn="ctr"/>
+          </a:p>
+        </p:txBody>
+      </p:sp>
+      <p:sp>
+        <p:nvSpPr>
+          <p:cNvPr id="13" name="TextBox 12"/>
+          <p:cNvSpPr txBox="1"/>
+          <p:nvPr/>
+        </p:nvSpPr>
+        <p:spPr>
+          <a:xfrm>
+            <a:off x="594360" y="5650992"/>
+            <a:ext cx="3108960" cy="274320"/>
+          </a:xfrm>
+          <a:prstGeom prst="rect">
+            <a:avLst/>
+          </a:prstGeom>
+          <a:noFill/>
+        </p:spPr>
+        <p:txBody>
+          <a:bodyPr wrap="square" lIns="45720" rIns="45720" tIns="18288" bIns="18288" anchor="t">
+            <a:spAutoFit/>
+          </a:bodyPr>
+          <a:lstStyle/>
+          <a:p>
+            <a:pPr algn="l">
+              <a:lnSpc>
+                <a:spcPct val="125000"/>
+              </a:lnSpc>
+            </a:pPr>
+            <a:r>
+              <a:rPr sz="900" b="1" i="0">
+                <a:solidFill>
+                  <a:srgbClr val="14B8A6"/>
+                </a:solidFill>
+                <a:latin typeface="Calibri"/>
+              </a:rPr>
+              <a:t>WHY THIS WORKS</a:t>
+            </a:r>
+          </a:p>
+        </p:txBody>
+      </p:sp>
+      <p:sp>
+        <p:nvSpPr>
+          <p:cNvPr id="14" name="TextBox 13"/>
+          <p:cNvSpPr txBox="1"/>
+          <p:nvPr/>
+        </p:nvSpPr>
+        <p:spPr>
+          <a:xfrm>
+            <a:off x="594360" y="5870448"/>
+            <a:ext cx="3108960" cy="594360"/>
+          </a:xfrm>
+          <a:prstGeom prst="rect">
+            <a:avLst/>
+          </a:prstGeom>
+          <a:noFill/>
+        </p:spPr>
+        <p:txBody>
+          <a:bodyPr wrap="square" lIns="45720" rIns="45720" tIns="18288" bIns="18288" anchor="t">
+            <a:spAutoFit/>
+          </a:bodyPr>
+          <a:lstStyle/>
+          <a:p>
+            <a:pPr algn="l">
+              <a:lnSpc>
+                <a:spcPct val="135000"/>
+              </a:lnSpc>
+            </a:pPr>
+            <a:r>
+              <a:rPr sz="1000" b="0" i="1">
+                <a:solidFill>
+                  <a:srgbClr val="FFFFFF"/>
+                </a:solidFill>
+                <a:latin typeface="Calibri"/>
+              </a:rPr>
+              <a:t>Indian parents have never seen the campus.</a:t>
+            </a:r>
+          </a:p>
+          <a:p>
+            <a:pPr algn="l">
+              <a:lnSpc>
+                <a:spcPct val="135000"/>
+              </a:lnSpc>
+            </a:pPr>
+            <a:r>
+              <a:rPr sz="1000" b="0" i="1">
+                <a:solidFill>
+                  <a:srgbClr val="FFFFFF"/>
+                </a:solidFill>
+                <a:latin typeface="Calibri"/>
+              </a:rPr>
+              <a:t>We give them a photograph they will frame.</a:t>
+            </a:r>
+          </a:p>
+        </p:txBody>
+      </p:sp>
+      <p:sp>
+        <p:nvSpPr>
+          <p:cNvPr id="15" name="Rounded Rectangle 14"/>
+          <p:cNvSpPr/>
+          <p:nvPr/>
+        </p:nvSpPr>
+        <p:spPr>
+          <a:xfrm>
+            <a:off x="3931920" y="1920240"/>
+            <a:ext cx="7818120" cy="1078992"/>
+          </a:xfrm>
+          <a:prstGeom prst="roundRect">
+            <a:avLst>
+              <a:gd name="adj" fmla="val 3000"/>
+            </a:avLst>
+          </a:prstGeom>
+          <a:solidFill>
+            <a:srgbClr val="FFFFFF"/>
+          </a:solidFill>
+          <a:ln w="6350">
+            <a:solidFill>
+              <a:srgbClr val="DDE2EE"/>
+            </a:solidFill>
+          </a:ln>
+          <a:effectLst/>
+        </p:spPr>
+        <p:style>
+          <a:lnRef idx="1">
+            <a:schemeClr val="accent1"/>
+          </a:lnRef>
+          <a:fillRef idx="3">
+            <a:schemeClr val="accent1"/>
+          </a:fillRef>
+          <a:effectRef idx="2">
+            <a:schemeClr val="accent1"/>
+          </a:effectRef>
+          <a:fontRef idx="minor">
+            <a:schemeClr val="lt1"/>
+          </a:fontRef>
+        </p:style>
+        <p:txBody>
+          <a:bodyPr rtlCol="0" anchor="ctr"/>
+          <a:lstStyle/>
+          <a:p>
+            <a:pPr algn="ctr"/>
+          </a:p>
+        </p:txBody>
+      </p:sp>
+      <p:sp>
+        <p:nvSpPr>
+          <p:cNvPr id="16" name="Rectangle 15"/>
+          <p:cNvSpPr/>
+          <p:nvPr/>
+        </p:nvSpPr>
+        <p:spPr>
+          <a:xfrm>
+            <a:off x="3931920" y="1920240"/>
+            <a:ext cx="91440" cy="1078992"/>
+          </a:xfrm>
+          <a:prstGeom prst="rect">
+            <a:avLst/>
+          </a:prstGeom>
+          <a:solidFill>
+            <a:srgbClr val="14B8A6"/>
+          </a:solidFill>
+          <a:ln>
+            <a:noFill/>
+          </a:ln>
+          <a:effectLst/>
+        </p:spPr>
+        <p:style>
+          <a:lnRef idx="1">
+            <a:schemeClr val="accent1"/>
+          </a:lnRef>
+          <a:fillRef idx="3">
+            <a:schemeClr val="accent1"/>
+          </a:fillRef>
+          <a:effectRef idx="2">
+            <a:schemeClr val="accent1"/>
+          </a:effectRef>
+          <a:fontRef idx="minor">
+            <a:schemeClr val="lt1"/>
+          </a:fontRef>
+        </p:style>
+        <p:txBody>
+          <a:bodyPr rtlCol="0" anchor="ctr"/>
+          <a:lstStyle/>
+          <a:p>
+            <a:pPr algn="ctr"/>
+          </a:p>
+        </p:txBody>
+      </p:sp>
+      <p:sp>
+        <p:nvSpPr>
+          <p:cNvPr id="17" name="TextBox 16"/>
+          <p:cNvSpPr txBox="1"/>
+          <p:nvPr/>
+        </p:nvSpPr>
+        <p:spPr>
+          <a:xfrm>
+            <a:off x="4160520" y="2039112"/>
+            <a:ext cx="2011680" cy="274320"/>
+          </a:xfrm>
+          <a:prstGeom prst="rect">
+            <a:avLst/>
+          </a:prstGeom>
+          <a:noFill/>
+        </p:spPr>
+        <p:txBody>
+          <a:bodyPr wrap="square" lIns="45720" rIns="45720" tIns="18288" bIns="18288" anchor="t">
+            <a:spAutoFit/>
+          </a:bodyPr>
+          <a:lstStyle/>
+          <a:p>
+            <a:pPr algn="l">
+              <a:lnSpc>
+                <a:spcPct val="125000"/>
+              </a:lnSpc>
+            </a:pPr>
+            <a:r>
+              <a:rPr sz="880" b="1" i="0">
+                <a:solidFill>
+                  <a:srgbClr val="14B8A6"/>
+                </a:solidFill>
+                <a:latin typeface="Calibri"/>
+              </a:rPr>
+              <a:t>DAY  10:00 to 16:00</a:t>
+            </a:r>
+          </a:p>
+        </p:txBody>
+      </p:sp>
+      <p:sp>
+        <p:nvSpPr>
+          <p:cNvPr id="18" name="TextBox 17"/>
+          <p:cNvSpPr txBox="1"/>
+          <p:nvPr/>
+        </p:nvSpPr>
+        <p:spPr>
+          <a:xfrm>
+            <a:off x="4160520" y="2286000"/>
+            <a:ext cx="2286000" cy="457200"/>
+          </a:xfrm>
+          <a:prstGeom prst="rect">
+            <a:avLst/>
+          </a:prstGeom>
+          <a:noFill/>
+        </p:spPr>
+        <p:txBody>
+          <a:bodyPr wrap="square" lIns="45720" rIns="45720" tIns="18288" bIns="18288" anchor="t">
+            <a:spAutoFit/>
+          </a:bodyPr>
+          <a:lstStyle/>
+          <a:p>
+            <a:pPr algn="l">
+              <a:lnSpc>
+                <a:spcPct val="100000"/>
+              </a:lnSpc>
+            </a:pPr>
+            <a:r>
+              <a:rPr sz="1500" b="1" i="0">
                 <a:solidFill>
                   <a:srgbClr val="1E1B4B"/>
                 </a:solidFill>
                 <a:latin typeface="Calibri"/>
               </a:rPr>
-              <a:t>Three feelings, in order. Belong. Build. Broadcast.</a:t>
-            </a:r>
-          </a:p>
-        </p:txBody>
-      </p:sp>
-      <p:sp>
-        <p:nvSpPr>
-          <p:cNvPr id="12" name="TextBox 11"/>
-          <p:cNvSpPr txBox="1"/>
-          <p:nvPr/>
-        </p:nvSpPr>
-        <p:spPr>
-          <a:xfrm>
-            <a:off x="4709160" y="1874519"/>
-            <a:ext cx="7040880" cy="365760"/>
-          </a:xfrm>
-          <a:prstGeom prst="rect">
-            <a:avLst/>
-          </a:prstGeom>
-          <a:noFill/>
-        </p:spPr>
-        <p:txBody>
-          <a:bodyPr wrap="square" lIns="45720" rIns="45720" tIns="18288" bIns="18288" anchor="t">
-            <a:spAutoFit/>
-          </a:bodyPr>
-          <a:lstStyle/>
-          <a:p>
-            <a:pPr algn="l">
-              <a:lnSpc>
-                <a:spcPct val="135000"/>
-              </a:lnSpc>
-            </a:pPr>
-            <a:r>
-              <a:rPr sz="1050" b="0" i="1">
-                <a:solidFill>
-                  <a:srgbClr val="52597A"/>
-                </a:solidFill>
-                <a:latin typeface="Calibri"/>
-              </a:rPr>
-              <a:t>Existing campus. No flights. No celebrities. No embroidered jackets.</a:t>
-            </a:r>
-          </a:p>
-        </p:txBody>
-      </p:sp>
-      <p:sp>
-        <p:nvSpPr>
-          <p:cNvPr id="13" name="Rounded Rectangle 12"/>
+              <a:t>BELONG.</a:t>
+            </a:r>
+          </a:p>
+        </p:txBody>
+      </p:sp>
+      <p:sp>
+        <p:nvSpPr>
+          <p:cNvPr id="19" name="TextBox 18"/>
+          <p:cNvSpPr txBox="1"/>
+          <p:nvPr/>
+        </p:nvSpPr>
+        <p:spPr>
+          <a:xfrm>
+            <a:off x="6537960" y="2039112"/>
+            <a:ext cx="5074920" cy="292608"/>
+          </a:xfrm>
+          <a:prstGeom prst="rect">
+            <a:avLst/>
+          </a:prstGeom>
+          <a:noFill/>
+        </p:spPr>
+        <p:txBody>
+          <a:bodyPr wrap="square" lIns="45720" rIns="45720" tIns="18288" bIns="18288" anchor="t">
+            <a:spAutoFit/>
+          </a:bodyPr>
+          <a:lstStyle/>
+          <a:p>
+            <a:pPr algn="l">
+              <a:lnSpc>
+                <a:spcPct val="125000"/>
+              </a:lnSpc>
+            </a:pPr>
+            <a:r>
+              <a:rPr sz="950" b="0" i="0">
+                <a:solidFill>
+                  <a:srgbClr val="1E1B4B"/>
+                </a:solidFill>
+                <a:latin typeface="Calibri"/>
+              </a:rPr>
+              <a:t>• Welcome by Amity Online team. Campus walkthrough.</a:t>
+            </a:r>
+          </a:p>
+        </p:txBody>
+      </p:sp>
+      <p:sp>
+        <p:nvSpPr>
+          <p:cNvPr id="20" name="TextBox 19"/>
+          <p:cNvSpPr txBox="1"/>
+          <p:nvPr/>
+        </p:nvSpPr>
+        <p:spPr>
+          <a:xfrm>
+            <a:off x="6537960" y="2331720"/>
+            <a:ext cx="5074920" cy="292608"/>
+          </a:xfrm>
+          <a:prstGeom prst="rect">
+            <a:avLst/>
+          </a:prstGeom>
+          <a:noFill/>
+        </p:spPr>
+        <p:txBody>
+          <a:bodyPr wrap="square" lIns="45720" rIns="45720" tIns="18288" bIns="18288" anchor="t">
+            <a:spAutoFit/>
+          </a:bodyPr>
+          <a:lstStyle/>
+          <a:p>
+            <a:pPr algn="l">
+              <a:lnSpc>
+                <a:spcPct val="125000"/>
+              </a:lnSpc>
+            </a:pPr>
+            <a:r>
+              <a:rPr sz="950" b="0" i="0">
+                <a:solidFill>
+                  <a:srgbClr val="1E1B4B"/>
+                </a:solidFill>
+                <a:latin typeface="Calibri"/>
+              </a:rPr>
+              <a:t>• Family lunch with faculty and select alumni.</a:t>
+            </a:r>
+          </a:p>
+        </p:txBody>
+      </p:sp>
+      <p:sp>
+        <p:nvSpPr>
+          <p:cNvPr id="21" name="TextBox 20"/>
+          <p:cNvSpPr txBox="1"/>
+          <p:nvPr/>
+        </p:nvSpPr>
+        <p:spPr>
+          <a:xfrm>
+            <a:off x="6537960" y="2624328"/>
+            <a:ext cx="5074920" cy="292608"/>
+          </a:xfrm>
+          <a:prstGeom prst="rect">
+            <a:avLst/>
+          </a:prstGeom>
+          <a:noFill/>
+        </p:spPr>
+        <p:txBody>
+          <a:bodyPr wrap="square" lIns="45720" rIns="45720" tIns="18288" bIns="18288" anchor="t">
+            <a:spAutoFit/>
+          </a:bodyPr>
+          <a:lstStyle/>
+          <a:p>
+            <a:pPr algn="l">
+              <a:lnSpc>
+                <a:spcPct val="125000"/>
+              </a:lnSpc>
+            </a:pPr>
+            <a:r>
+              <a:rPr sz="950" b="0" i="0">
+                <a:solidFill>
+                  <a:srgbClr val="1E1B4B"/>
+                </a:solidFill>
+                <a:latin typeface="Calibri"/>
+              </a:rPr>
+              <a:t>• Two short masterclasses (Career, Industry).</a:t>
+            </a:r>
+          </a:p>
+        </p:txBody>
+      </p:sp>
+      <p:sp>
+        <p:nvSpPr>
+          <p:cNvPr id="22" name="Rounded Rectangle 21"/>
           <p:cNvSpPr/>
           <p:nvPr/>
         </p:nvSpPr>
         <p:spPr>
           <a:xfrm>
-            <a:off x="4709160" y="2331720"/>
-            <a:ext cx="7040880" cy="1325880"/>
+            <a:off x="3931920" y="3090672"/>
+            <a:ext cx="7818120" cy="1078992"/>
+          </a:xfrm>
+          <a:prstGeom prst="roundRect">
+            <a:avLst>
+              <a:gd name="adj" fmla="val 3000"/>
+            </a:avLst>
+          </a:prstGeom>
+          <a:solidFill>
+            <a:srgbClr val="FFFFFF"/>
+          </a:solidFill>
+          <a:ln w="6350">
+            <a:solidFill>
+              <a:srgbClr val="DDE2EE"/>
+            </a:solidFill>
+          </a:ln>
+          <a:effectLst/>
+        </p:spPr>
+        <p:style>
+          <a:lnRef idx="1">
+            <a:schemeClr val="accent1"/>
+          </a:lnRef>
+          <a:fillRef idx="3">
+            <a:schemeClr val="accent1"/>
+          </a:fillRef>
+          <a:effectRef idx="2">
+            <a:schemeClr val="accent1"/>
+          </a:effectRef>
+          <a:fontRef idx="minor">
+            <a:schemeClr val="lt1"/>
+          </a:fontRef>
+        </p:style>
+        <p:txBody>
+          <a:bodyPr rtlCol="0" anchor="ctr"/>
+          <a:lstStyle/>
+          <a:p>
+            <a:pPr algn="ctr"/>
+          </a:p>
+        </p:txBody>
+      </p:sp>
+      <p:sp>
+        <p:nvSpPr>
+          <p:cNvPr id="23" name="Rectangle 22"/>
+          <p:cNvSpPr/>
+          <p:nvPr/>
+        </p:nvSpPr>
+        <p:spPr>
+          <a:xfrm>
+            <a:off x="3931920" y="3090672"/>
+            <a:ext cx="91440" cy="1078992"/>
+          </a:xfrm>
+          <a:prstGeom prst="rect">
+            <a:avLst/>
+          </a:prstGeom>
+          <a:solidFill>
+            <a:srgbClr val="06B6D4"/>
+          </a:solidFill>
+          <a:ln>
+            <a:noFill/>
+          </a:ln>
+          <a:effectLst/>
+        </p:spPr>
+        <p:style>
+          <a:lnRef idx="1">
+            <a:schemeClr val="accent1"/>
+          </a:lnRef>
+          <a:fillRef idx="3">
+            <a:schemeClr val="accent1"/>
+          </a:fillRef>
+          <a:effectRef idx="2">
+            <a:schemeClr val="accent1"/>
+          </a:effectRef>
+          <a:fontRef idx="minor">
+            <a:schemeClr val="lt1"/>
+          </a:fontRef>
+        </p:style>
+        <p:txBody>
+          <a:bodyPr rtlCol="0" anchor="ctr"/>
+          <a:lstStyle/>
+          <a:p>
+            <a:pPr algn="ctr"/>
+          </a:p>
+        </p:txBody>
+      </p:sp>
+      <p:sp>
+        <p:nvSpPr>
+          <p:cNvPr id="24" name="TextBox 23"/>
+          <p:cNvSpPr txBox="1"/>
+          <p:nvPr/>
+        </p:nvSpPr>
+        <p:spPr>
+          <a:xfrm>
+            <a:off x="4160520" y="3209544"/>
+            <a:ext cx="2011680" cy="274320"/>
+          </a:xfrm>
+          <a:prstGeom prst="rect">
+            <a:avLst/>
+          </a:prstGeom>
+          <a:noFill/>
+        </p:spPr>
+        <p:txBody>
+          <a:bodyPr wrap="square" lIns="45720" rIns="45720" tIns="18288" bIns="18288" anchor="t">
+            <a:spAutoFit/>
+          </a:bodyPr>
+          <a:lstStyle/>
+          <a:p>
+            <a:pPr algn="l">
+              <a:lnSpc>
+                <a:spcPct val="125000"/>
+              </a:lnSpc>
+            </a:pPr>
+            <a:r>
+              <a:rPr sz="880" b="1" i="0">
+                <a:solidFill>
+                  <a:srgbClr val="06B6D4"/>
+                </a:solidFill>
+                <a:latin typeface="Calibri"/>
+              </a:rPr>
+              <a:t>DUSK  16:30 to 17:30</a:t>
+            </a:r>
+          </a:p>
+        </p:txBody>
+      </p:sp>
+      <p:sp>
+        <p:nvSpPr>
+          <p:cNvPr id="25" name="TextBox 24"/>
+          <p:cNvSpPr txBox="1"/>
+          <p:nvPr/>
+        </p:nvSpPr>
+        <p:spPr>
+          <a:xfrm>
+            <a:off x="4160520" y="3456432"/>
+            <a:ext cx="2286000" cy="457200"/>
+          </a:xfrm>
+          <a:prstGeom prst="rect">
+            <a:avLst/>
+          </a:prstGeom>
+          <a:noFill/>
+        </p:spPr>
+        <p:txBody>
+          <a:bodyPr wrap="square" lIns="45720" rIns="45720" tIns="18288" bIns="18288" anchor="t">
+            <a:spAutoFit/>
+          </a:bodyPr>
+          <a:lstStyle/>
+          <a:p>
+            <a:pPr algn="l">
+              <a:lnSpc>
+                <a:spcPct val="100000"/>
+              </a:lnSpc>
+            </a:pPr>
+            <a:r>
+              <a:rPr sz="1500" b="1" i="0">
+                <a:solidFill>
+                  <a:srgbClr val="1E1B4B"/>
+                </a:solidFill>
+                <a:latin typeface="Calibri"/>
+              </a:rPr>
+              <a:t>MINI CONVOCATION.</a:t>
+            </a:r>
+          </a:p>
+        </p:txBody>
+      </p:sp>
+      <p:sp>
+        <p:nvSpPr>
+          <p:cNvPr id="26" name="TextBox 25"/>
+          <p:cNvSpPr txBox="1"/>
+          <p:nvPr/>
+        </p:nvSpPr>
+        <p:spPr>
+          <a:xfrm>
+            <a:off x="6537960" y="3209544"/>
+            <a:ext cx="5074920" cy="292608"/>
+          </a:xfrm>
+          <a:prstGeom prst="rect">
+            <a:avLst/>
+          </a:prstGeom>
+          <a:noFill/>
+        </p:spPr>
+        <p:txBody>
+          <a:bodyPr wrap="square" lIns="45720" rIns="45720" tIns="18288" bIns="18288" anchor="t">
+            <a:spAutoFit/>
+          </a:bodyPr>
+          <a:lstStyle/>
+          <a:p>
+            <a:pPr algn="l">
+              <a:lnSpc>
+                <a:spcPct val="125000"/>
+              </a:lnSpc>
+            </a:pPr>
+            <a:r>
+              <a:rPr sz="950" b="0" i="0">
+                <a:solidFill>
+                  <a:srgbClr val="1E1B4B"/>
+                </a:solidFill>
+                <a:latin typeface="Calibri"/>
+              </a:rPr>
+              <a:t>• Stole, certificate, photo on the convocation stage.</a:t>
+            </a:r>
+          </a:p>
+        </p:txBody>
+      </p:sp>
+      <p:sp>
+        <p:nvSpPr>
+          <p:cNvPr id="27" name="TextBox 26"/>
+          <p:cNvSpPr txBox="1"/>
+          <p:nvPr/>
+        </p:nvSpPr>
+        <p:spPr>
+          <a:xfrm>
+            <a:off x="6537960" y="3502152"/>
+            <a:ext cx="5074920" cy="292608"/>
+          </a:xfrm>
+          <a:prstGeom prst="rect">
+            <a:avLst/>
+          </a:prstGeom>
+          <a:noFill/>
+        </p:spPr>
+        <p:txBody>
+          <a:bodyPr wrap="square" lIns="45720" rIns="45720" tIns="18288" bIns="18288" anchor="t">
+            <a:spAutoFit/>
+          </a:bodyPr>
+          <a:lstStyle/>
+          <a:p>
+            <a:pPr algn="l">
+              <a:lnSpc>
+                <a:spcPct val="125000"/>
+              </a:lnSpc>
+            </a:pPr>
+            <a:r>
+              <a:rPr sz="950" b="0" i="0">
+                <a:solidFill>
+                  <a:srgbClr val="1E1B4B"/>
+                </a:solidFill>
+                <a:latin typeface="Calibri"/>
+              </a:rPr>
+              <a:t>• Family in frame. Pro photographer + 60s reel each.</a:t>
+            </a:r>
+          </a:p>
+        </p:txBody>
+      </p:sp>
+      <p:sp>
+        <p:nvSpPr>
+          <p:cNvPr id="28" name="TextBox 27"/>
+          <p:cNvSpPr txBox="1"/>
+          <p:nvPr/>
+        </p:nvSpPr>
+        <p:spPr>
+          <a:xfrm>
+            <a:off x="6537960" y="3794760"/>
+            <a:ext cx="5074920" cy="292608"/>
+          </a:xfrm>
+          <a:prstGeom prst="rect">
+            <a:avLst/>
+          </a:prstGeom>
+          <a:noFill/>
+        </p:spPr>
+        <p:txBody>
+          <a:bodyPr wrap="square" lIns="45720" rIns="45720" tIns="18288" bIns="18288" anchor="t">
+            <a:spAutoFit/>
+          </a:bodyPr>
+          <a:lstStyle/>
+          <a:p>
+            <a:pPr algn="l">
+              <a:lnSpc>
+                <a:spcPct val="125000"/>
+              </a:lnSpc>
+            </a:pPr>
+            <a:r>
+              <a:rPr sz="950" b="0" i="0">
+                <a:solidFill>
+                  <a:srgbClr val="1E1B4B"/>
+                </a:solidFill>
+                <a:latin typeface="Calibri"/>
+              </a:rPr>
+              <a:t>• The graduation moment online learners never got.</a:t>
+            </a:r>
+          </a:p>
+        </p:txBody>
+      </p:sp>
+      <p:sp>
+        <p:nvSpPr>
+          <p:cNvPr id="29" name="Rounded Rectangle 28"/>
+          <p:cNvSpPr/>
+          <p:nvPr/>
+        </p:nvSpPr>
+        <p:spPr>
+          <a:xfrm>
+            <a:off x="3931920" y="4261104"/>
+            <a:ext cx="7818120" cy="1078992"/>
+          </a:xfrm>
+          <a:prstGeom prst="roundRect">
+            <a:avLst>
+              <a:gd name="adj" fmla="val 3000"/>
+            </a:avLst>
+          </a:prstGeom>
+          <a:solidFill>
+            <a:srgbClr val="FFFFFF"/>
+          </a:solidFill>
+          <a:ln w="6350">
+            <a:solidFill>
+              <a:srgbClr val="DDE2EE"/>
+            </a:solidFill>
+          </a:ln>
+          <a:effectLst/>
+        </p:spPr>
+        <p:style>
+          <a:lnRef idx="1">
+            <a:schemeClr val="accent1"/>
+          </a:lnRef>
+          <a:fillRef idx="3">
+            <a:schemeClr val="accent1"/>
+          </a:fillRef>
+          <a:effectRef idx="2">
+            <a:schemeClr val="accent1"/>
+          </a:effectRef>
+          <a:fontRef idx="minor">
+            <a:schemeClr val="lt1"/>
+          </a:fontRef>
+        </p:style>
+        <p:txBody>
+          <a:bodyPr rtlCol="0" anchor="ctr"/>
+          <a:lstStyle/>
+          <a:p>
+            <a:pPr algn="ctr"/>
+          </a:p>
+        </p:txBody>
+      </p:sp>
+      <p:sp>
+        <p:nvSpPr>
+          <p:cNvPr id="30" name="Rectangle 29"/>
+          <p:cNvSpPr/>
+          <p:nvPr/>
+        </p:nvSpPr>
+        <p:spPr>
+          <a:xfrm>
+            <a:off x="3931920" y="4261104"/>
+            <a:ext cx="91440" cy="1078992"/>
+          </a:xfrm>
+          <a:prstGeom prst="rect">
+            <a:avLst/>
+          </a:prstGeom>
+          <a:solidFill>
+            <a:srgbClr val="A855F7"/>
+          </a:solidFill>
+          <a:ln>
+            <a:noFill/>
+          </a:ln>
+          <a:effectLst/>
+        </p:spPr>
+        <p:style>
+          <a:lnRef idx="1">
+            <a:schemeClr val="accent1"/>
+          </a:lnRef>
+          <a:fillRef idx="3">
+            <a:schemeClr val="accent1"/>
+          </a:fillRef>
+          <a:effectRef idx="2">
+            <a:schemeClr val="accent1"/>
+          </a:effectRef>
+          <a:fontRef idx="minor">
+            <a:schemeClr val="lt1"/>
+          </a:fontRef>
+        </p:style>
+        <p:txBody>
+          <a:bodyPr rtlCol="0" anchor="ctr"/>
+          <a:lstStyle/>
+          <a:p>
+            <a:pPr algn="ctr"/>
+          </a:p>
+        </p:txBody>
+      </p:sp>
+      <p:sp>
+        <p:nvSpPr>
+          <p:cNvPr id="31" name="TextBox 30"/>
+          <p:cNvSpPr txBox="1"/>
+          <p:nvPr/>
+        </p:nvSpPr>
+        <p:spPr>
+          <a:xfrm>
+            <a:off x="4160520" y="4379976"/>
+            <a:ext cx="2011680" cy="274320"/>
+          </a:xfrm>
+          <a:prstGeom prst="rect">
+            <a:avLst/>
+          </a:prstGeom>
+          <a:noFill/>
+        </p:spPr>
+        <p:txBody>
+          <a:bodyPr wrap="square" lIns="45720" rIns="45720" tIns="18288" bIns="18288" anchor="t">
+            <a:spAutoFit/>
+          </a:bodyPr>
+          <a:lstStyle/>
+          <a:p>
+            <a:pPr algn="l">
+              <a:lnSpc>
+                <a:spcPct val="125000"/>
+              </a:lnSpc>
+            </a:pPr>
+            <a:r>
+              <a:rPr sz="880" b="1" i="0">
+                <a:solidFill>
+                  <a:srgbClr val="A855F7"/>
+                </a:solidFill>
+                <a:latin typeface="Calibri"/>
+              </a:rPr>
+              <a:t>NIGHT  18:00 to 21:00</a:t>
+            </a:r>
+          </a:p>
+        </p:txBody>
+      </p:sp>
+      <p:sp>
+        <p:nvSpPr>
+          <p:cNvPr id="32" name="TextBox 31"/>
+          <p:cNvSpPr txBox="1"/>
+          <p:nvPr/>
+        </p:nvSpPr>
+        <p:spPr>
+          <a:xfrm>
+            <a:off x="4160520" y="4626864"/>
+            <a:ext cx="2286000" cy="457200"/>
+          </a:xfrm>
+          <a:prstGeom prst="rect">
+            <a:avLst/>
+          </a:prstGeom>
+          <a:noFill/>
+        </p:spPr>
+        <p:txBody>
+          <a:bodyPr wrap="square" lIns="45720" rIns="45720" tIns="18288" bIns="18288" anchor="t">
+            <a:spAutoFit/>
+          </a:bodyPr>
+          <a:lstStyle/>
+          <a:p>
+            <a:pPr algn="l">
+              <a:lnSpc>
+                <a:spcPct val="100000"/>
+              </a:lnSpc>
+            </a:pPr>
+            <a:r>
+              <a:rPr sz="1500" b="1" i="0">
+                <a:solidFill>
+                  <a:srgbClr val="1E1B4B"/>
+                </a:solidFill>
+                <a:latin typeface="Calibri"/>
+              </a:rPr>
+              <a:t>CONCERT.</a:t>
+            </a:r>
+          </a:p>
+        </p:txBody>
+      </p:sp>
+      <p:sp>
+        <p:nvSpPr>
+          <p:cNvPr id="33" name="TextBox 32"/>
+          <p:cNvSpPr txBox="1"/>
+          <p:nvPr/>
+        </p:nvSpPr>
+        <p:spPr>
+          <a:xfrm>
+            <a:off x="6537960" y="4379976"/>
+            <a:ext cx="5074920" cy="292608"/>
+          </a:xfrm>
+          <a:prstGeom prst="rect">
+            <a:avLst/>
+          </a:prstGeom>
+          <a:noFill/>
+        </p:spPr>
+        <p:txBody>
+          <a:bodyPr wrap="square" lIns="45720" rIns="45720" tIns="18288" bIns="18288" anchor="t">
+            <a:spAutoFit/>
+          </a:bodyPr>
+          <a:lstStyle/>
+          <a:p>
+            <a:pPr algn="l">
+              <a:lnSpc>
+                <a:spcPct val="125000"/>
+              </a:lnSpc>
+            </a:pPr>
+            <a:r>
+              <a:rPr sz="950" b="0" i="0">
+                <a:solidFill>
+                  <a:srgbClr val="1E1B4B"/>
+                </a:solidFill>
+                <a:latin typeface="Calibri"/>
+              </a:rPr>
+              <a:t>• Headliner. Top comedian or creator (Rs 8 to 15 lakh).</a:t>
+            </a:r>
+          </a:p>
+        </p:txBody>
+      </p:sp>
+      <p:sp>
+        <p:nvSpPr>
+          <p:cNvPr id="34" name="TextBox 33"/>
+          <p:cNvSpPr txBox="1"/>
+          <p:nvPr/>
+        </p:nvSpPr>
+        <p:spPr>
+          <a:xfrm>
+            <a:off x="6537960" y="4672584"/>
+            <a:ext cx="5074920" cy="292608"/>
+          </a:xfrm>
+          <a:prstGeom prst="rect">
+            <a:avLst/>
+          </a:prstGeom>
+          <a:noFill/>
+        </p:spPr>
+        <p:txBody>
+          <a:bodyPr wrap="square" lIns="45720" rIns="45720" tIns="18288" bIns="18288" anchor="t">
+            <a:spAutoFit/>
+          </a:bodyPr>
+          <a:lstStyle/>
+          <a:p>
+            <a:pPr algn="l">
+              <a:lnSpc>
+                <a:spcPct val="125000"/>
+              </a:lnSpc>
+            </a:pPr>
+            <a:r>
+              <a:rPr sz="950" b="0" i="0">
+                <a:solidFill>
+                  <a:srgbClr val="1E1B4B"/>
+                </a:solidFill>
+                <a:latin typeface="Calibri"/>
+              </a:rPr>
+              <a:t>• Five learner finalists open via beSocial audition.</a:t>
+            </a:r>
+          </a:p>
+        </p:txBody>
+      </p:sp>
+      <p:sp>
+        <p:nvSpPr>
+          <p:cNvPr id="35" name="TextBox 34"/>
+          <p:cNvSpPr txBox="1"/>
+          <p:nvPr/>
+        </p:nvSpPr>
+        <p:spPr>
+          <a:xfrm>
+            <a:off x="6537960" y="4965192"/>
+            <a:ext cx="5074920" cy="292608"/>
+          </a:xfrm>
+          <a:prstGeom prst="rect">
+            <a:avLst/>
+          </a:prstGeom>
+          <a:noFill/>
+        </p:spPr>
+        <p:txBody>
+          <a:bodyPr wrap="square" lIns="45720" rIns="45720" tIns="18288" bIns="18288" anchor="t">
+            <a:spAutoFit/>
+          </a:bodyPr>
+          <a:lstStyle/>
+          <a:p>
+            <a:pPr algn="l">
+              <a:lnSpc>
+                <a:spcPct val="125000"/>
+              </a:lnSpc>
+            </a:pPr>
+            <a:r>
+              <a:rPr sz="950" b="0" i="0">
+                <a:solidFill>
+                  <a:srgbClr val="1E1B4B"/>
+                </a:solidFill>
+                <a:latin typeface="Calibri"/>
+              </a:rPr>
+              <a:t>• Brand stalls. Boat, Cred, MakeMyTrip. Sponsor offset.</a:t>
+            </a:r>
+          </a:p>
+        </p:txBody>
+      </p:sp>
+      <p:sp>
+        <p:nvSpPr>
+          <p:cNvPr id="36" name="Rounded Rectangle 35"/>
+          <p:cNvSpPr/>
+          <p:nvPr/>
+        </p:nvSpPr>
+        <p:spPr>
+          <a:xfrm>
+            <a:off x="3931920" y="5431536"/>
+            <a:ext cx="7818120" cy="1078992"/>
+          </a:xfrm>
+          <a:prstGeom prst="roundRect">
+            <a:avLst>
+              <a:gd name="adj" fmla="val 3000"/>
+            </a:avLst>
+          </a:prstGeom>
+          <a:solidFill>
+            <a:srgbClr val="FFFFFF"/>
+          </a:solidFill>
+          <a:ln w="6350">
+            <a:solidFill>
+              <a:srgbClr val="DDE2EE"/>
+            </a:solidFill>
+          </a:ln>
+          <a:effectLst/>
+        </p:spPr>
+        <p:style>
+          <a:lnRef idx="1">
+            <a:schemeClr val="accent1"/>
+          </a:lnRef>
+          <a:fillRef idx="3">
+            <a:schemeClr val="accent1"/>
+          </a:fillRef>
+          <a:effectRef idx="2">
+            <a:schemeClr val="accent1"/>
+          </a:effectRef>
+          <a:fontRef idx="minor">
+            <a:schemeClr val="lt1"/>
+          </a:fontRef>
+        </p:style>
+        <p:txBody>
+          <a:bodyPr rtlCol="0" anchor="ctr"/>
+          <a:lstStyle/>
+          <a:p>
+            <a:pPr algn="ctr"/>
+          </a:p>
+        </p:txBody>
+      </p:sp>
+      <p:sp>
+        <p:nvSpPr>
+          <p:cNvPr id="37" name="Rectangle 36"/>
+          <p:cNvSpPr/>
+          <p:nvPr/>
+        </p:nvSpPr>
+        <p:spPr>
+          <a:xfrm>
+            <a:off x="3931920" y="5431536"/>
+            <a:ext cx="91440" cy="1078992"/>
+          </a:xfrm>
+          <a:prstGeom prst="rect">
+            <a:avLst/>
+          </a:prstGeom>
+          <a:solidFill>
+            <a:srgbClr val="1E1B4B"/>
+          </a:solidFill>
+          <a:ln>
+            <a:noFill/>
+          </a:ln>
+          <a:effectLst/>
+        </p:spPr>
+        <p:style>
+          <a:lnRef idx="1">
+            <a:schemeClr val="accent1"/>
+          </a:lnRef>
+          <a:fillRef idx="3">
+            <a:schemeClr val="accent1"/>
+          </a:fillRef>
+          <a:effectRef idx="2">
+            <a:schemeClr val="accent1"/>
+          </a:effectRef>
+          <a:fontRef idx="minor">
+            <a:schemeClr val="lt1"/>
+          </a:fontRef>
+        </p:style>
+        <p:txBody>
+          <a:bodyPr rtlCol="0" anchor="ctr"/>
+          <a:lstStyle/>
+          <a:p>
+            <a:pPr algn="ctr"/>
+          </a:p>
+        </p:txBody>
+      </p:sp>
+      <p:sp>
+        <p:nvSpPr>
+          <p:cNvPr id="38" name="TextBox 37"/>
+          <p:cNvSpPr txBox="1"/>
+          <p:nvPr/>
+        </p:nvSpPr>
+        <p:spPr>
+          <a:xfrm>
+            <a:off x="4160520" y="5550408"/>
+            <a:ext cx="2011680" cy="274320"/>
+          </a:xfrm>
+          <a:prstGeom prst="rect">
+            <a:avLst/>
+          </a:prstGeom>
+          <a:noFill/>
+        </p:spPr>
+        <p:txBody>
+          <a:bodyPr wrap="square" lIns="45720" rIns="45720" tIns="18288" bIns="18288" anchor="t">
+            <a:spAutoFit/>
+          </a:bodyPr>
+          <a:lstStyle/>
+          <a:p>
+            <a:pPr algn="l">
+              <a:lnSpc>
+                <a:spcPct val="125000"/>
+              </a:lnSpc>
+            </a:pPr>
+            <a:r>
+              <a:rPr sz="880" b="1" i="0">
+                <a:solidFill>
+                  <a:srgbClr val="1E1B4B"/>
+                </a:solidFill>
+                <a:latin typeface="Calibri"/>
+              </a:rPr>
+              <a:t>AFTER  T+7 to T+30</a:t>
+            </a:r>
+          </a:p>
+        </p:txBody>
+      </p:sp>
+      <p:sp>
+        <p:nvSpPr>
+          <p:cNvPr id="39" name="TextBox 38"/>
+          <p:cNvSpPr txBox="1"/>
+          <p:nvPr/>
+        </p:nvSpPr>
+        <p:spPr>
+          <a:xfrm>
+            <a:off x="4160520" y="5797296"/>
+            <a:ext cx="2286000" cy="457200"/>
+          </a:xfrm>
+          <a:prstGeom prst="rect">
+            <a:avLst/>
+          </a:prstGeom>
+          <a:noFill/>
+        </p:spPr>
+        <p:txBody>
+          <a:bodyPr wrap="square" lIns="45720" rIns="45720" tIns="18288" bIns="18288" anchor="t">
+            <a:spAutoFit/>
+          </a:bodyPr>
+          <a:lstStyle/>
+          <a:p>
+            <a:pPr algn="l">
+              <a:lnSpc>
+                <a:spcPct val="100000"/>
+              </a:lnSpc>
+            </a:pPr>
+            <a:r>
+              <a:rPr sz="1500" b="1" i="0">
+                <a:solidFill>
+                  <a:srgbClr val="1E1B4B"/>
+                </a:solidFill>
+                <a:latin typeface="Calibri"/>
+              </a:rPr>
+              <a:t>CONTENT FLYWHEEL.</a:t>
+            </a:r>
+          </a:p>
+        </p:txBody>
+      </p:sp>
+      <p:sp>
+        <p:nvSpPr>
+          <p:cNvPr id="40" name="TextBox 39"/>
+          <p:cNvSpPr txBox="1"/>
+          <p:nvPr/>
+        </p:nvSpPr>
+        <p:spPr>
+          <a:xfrm>
+            <a:off x="6537960" y="5550408"/>
+            <a:ext cx="5074920" cy="292608"/>
+          </a:xfrm>
+          <a:prstGeom prst="rect">
+            <a:avLst/>
+          </a:prstGeom>
+          <a:noFill/>
+        </p:spPr>
+        <p:txBody>
+          <a:bodyPr wrap="square" lIns="45720" rIns="45720" tIns="18288" bIns="18288" anchor="t">
+            <a:spAutoFit/>
+          </a:bodyPr>
+          <a:lstStyle/>
+          <a:p>
+            <a:pPr algn="l">
+              <a:lnSpc>
+                <a:spcPct val="125000"/>
+              </a:lnSpc>
+            </a:pPr>
+            <a:r>
+              <a:rPr sz="950" b="0" i="0">
+                <a:solidFill>
+                  <a:srgbClr val="1E1B4B"/>
+                </a:solidFill>
+                <a:latin typeface="Calibri"/>
+              </a:rPr>
+              <a:t>• Creator partner films a 3 part docuseries.</a:t>
+            </a:r>
+          </a:p>
+        </p:txBody>
+      </p:sp>
+      <p:sp>
+        <p:nvSpPr>
+          <p:cNvPr id="41" name="TextBox 40"/>
+          <p:cNvSpPr txBox="1"/>
+          <p:nvPr/>
+        </p:nvSpPr>
+        <p:spPr>
+          <a:xfrm>
+            <a:off x="6537960" y="5843016"/>
+            <a:ext cx="5074920" cy="292608"/>
+          </a:xfrm>
+          <a:prstGeom prst="rect">
+            <a:avLst/>
+          </a:prstGeom>
+          <a:noFill/>
+        </p:spPr>
+        <p:txBody>
+          <a:bodyPr wrap="square" lIns="45720" rIns="45720" tIns="18288" bIns="18288" anchor="t">
+            <a:spAutoFit/>
+          </a:bodyPr>
+          <a:lstStyle/>
+          <a:p>
+            <a:pPr algn="l">
+              <a:lnSpc>
+                <a:spcPct val="125000"/>
+              </a:lnSpc>
+            </a:pPr>
+            <a:r>
+              <a:rPr sz="950" b="0" i="0">
+                <a:solidFill>
+                  <a:srgbClr val="1E1B4B"/>
+                </a:solidFill>
+                <a:latin typeface="Calibri"/>
+              </a:rPr>
+              <a:t>• Each attendee posts their reel. Tagged #AmityIgnite.</a:t>
+            </a:r>
+          </a:p>
+        </p:txBody>
+      </p:sp>
+      <p:sp>
+        <p:nvSpPr>
+          <p:cNvPr id="42" name="TextBox 41"/>
+          <p:cNvSpPr txBox="1"/>
+          <p:nvPr/>
+        </p:nvSpPr>
+        <p:spPr>
+          <a:xfrm>
+            <a:off x="6537960" y="6135624"/>
+            <a:ext cx="5074920" cy="292608"/>
+          </a:xfrm>
+          <a:prstGeom prst="rect">
+            <a:avLst/>
+          </a:prstGeom>
+          <a:noFill/>
+        </p:spPr>
+        <p:txBody>
+          <a:bodyPr wrap="square" lIns="45720" rIns="45720" tIns="18288" bIns="18288" anchor="t">
+            <a:spAutoFit/>
+          </a:bodyPr>
+          <a:lstStyle/>
+          <a:p>
+            <a:pPr algn="l">
+              <a:lnSpc>
+                <a:spcPct val="125000"/>
+              </a:lnSpc>
+            </a:pPr>
+            <a:r>
+              <a:rPr sz="950" b="0" i="0">
+                <a:solidFill>
+                  <a:srgbClr val="1E1B4B"/>
+                </a:solidFill>
+                <a:latin typeface="Calibri"/>
+              </a:rPr>
+              <a:t>• Press hook. India's first concert for online learners.</a:t>
+            </a:r>
+          </a:p>
+        </p:txBody>
+      </p:sp>
+      <p:sp>
+        <p:nvSpPr>
+          <p:cNvPr id="43" name="Rounded Rectangle 42"/>
+          <p:cNvSpPr/>
+          <p:nvPr/>
+        </p:nvSpPr>
+        <p:spPr>
+          <a:xfrm>
+            <a:off x="3931920" y="5623560"/>
+            <a:ext cx="7818120" cy="1097280"/>
           </a:xfrm>
           <a:prstGeom prst="roundRect">
             <a:avLst>
@@ -21398,58 +22939,14 @@
       </p:sp>
       <p:sp>
         <p:nvSpPr>
-          <p:cNvPr id="14" name="Rectangle 13"/>
-          <p:cNvSpPr/>
-          <p:nvPr/>
-        </p:nvSpPr>
-        <p:spPr>
-          <a:xfrm>
-            <a:off x="4709160" y="2331720"/>
-            <a:ext cx="91440" cy="1325880"/>
-          </a:xfrm>
-          <a:prstGeom prst="rect">
-            <a:avLst/>
-          </a:prstGeom>
-          <a:solidFill>
-            <a:srgbClr val="14B8A6"/>
-          </a:solidFill>
-          <a:ln>
-            <a:noFill/>
-          </a:ln>
-          <a:effectLst/>
-        </p:spPr>
-        <p:style>
-          <a:lnRef idx="1">
-            <a:schemeClr val="accent1"/>
-          </a:lnRef>
-          <a:fillRef idx="3">
-            <a:schemeClr val="accent1"/>
-          </a:fillRef>
-          <a:effectRef idx="2">
-            <a:schemeClr val="accent1"/>
-          </a:effectRef>
-          <a:fontRef idx="minor">
-            <a:schemeClr val="lt1"/>
-          </a:fontRef>
-        </p:style>
-        <p:txBody>
-          <a:bodyPr rtlCol="0" anchor="ctr"/>
-          <a:lstStyle/>
-          <a:p>
-            <a:pPr algn="ctr"/>
-          </a:p>
-        </p:txBody>
-      </p:sp>
-      <p:sp>
-        <p:nvSpPr>
-          <p:cNvPr id="15" name="TextBox 14"/>
-          <p:cNvSpPr txBox="1"/>
-          <p:nvPr/>
-        </p:nvSpPr>
-        <p:spPr>
-          <a:xfrm>
-            <a:off x="4937760" y="2450592"/>
-            <a:ext cx="7040880" cy="292608"/>
+          <p:cNvPr id="44" name="TextBox 43"/>
+          <p:cNvSpPr txBox="1"/>
+          <p:nvPr/>
+        </p:nvSpPr>
+        <p:spPr>
+          <a:xfrm>
+            <a:off x="4114800" y="5687568"/>
+            <a:ext cx="5486400" cy="274320"/>
           </a:xfrm>
           <a:prstGeom prst="rect">
             <a:avLst/>
@@ -21468,743 +22965,52 @@
               </a:lnSpc>
             </a:pPr>
             <a:r>
-              <a:rPr sz="1050" b="1" i="0">
+              <a:rPr sz="950" b="1" i="0">
                 <a:solidFill>
                   <a:srgbClr val="14B8A6"/>
                 </a:solidFill>
                 <a:latin typeface="Calibri"/>
               </a:rPr>
-              <a:t>MORNING.   BELONG.</a:t>
-            </a:r>
-          </a:p>
-        </p:txBody>
-      </p:sp>
-      <p:sp>
-        <p:nvSpPr>
-          <p:cNvPr id="16" name="TextBox 15"/>
-          <p:cNvSpPr txBox="1"/>
-          <p:nvPr/>
-        </p:nvSpPr>
-        <p:spPr>
-          <a:xfrm>
-            <a:off x="4937760" y="2788920"/>
-            <a:ext cx="3337560" cy="365760"/>
-          </a:xfrm>
-          <a:prstGeom prst="rect">
-            <a:avLst/>
-          </a:prstGeom>
-          <a:noFill/>
-        </p:spPr>
-        <p:txBody>
-          <a:bodyPr wrap="square" lIns="45720" rIns="45720" tIns="18288" bIns="18288" anchor="t">
-            <a:spAutoFit/>
-          </a:bodyPr>
-          <a:lstStyle/>
-          <a:p>
-            <a:pPr algn="l">
-              <a:lnSpc>
-                <a:spcPct val="130000"/>
-              </a:lnSpc>
-            </a:pPr>
-            <a:r>
-              <a:rPr sz="969" b="0" i="0">
+              <a:t>BUDGET MATH   |   Cohort 0</a:t>
+            </a:r>
+          </a:p>
+        </p:txBody>
+      </p:sp>
+      <p:sp>
+        <p:nvSpPr>
+          <p:cNvPr id="45" name="TextBox 44"/>
+          <p:cNvSpPr txBox="1"/>
+          <p:nvPr/>
+        </p:nvSpPr>
+        <p:spPr>
+          <a:xfrm>
+            <a:off x="4114800" y="5943600"/>
+            <a:ext cx="7452360" cy="777240"/>
+          </a:xfrm>
+          <a:prstGeom prst="rect">
+            <a:avLst/>
+          </a:prstGeom>
+          <a:noFill/>
+        </p:spPr>
+        <p:txBody>
+          <a:bodyPr wrap="square" lIns="45720" rIns="45720" tIns="18288" bIns="18288" anchor="t">
+            <a:spAutoFit/>
+          </a:bodyPr>
+          <a:lstStyle/>
+          <a:p>
+            <a:pPr algn="l">
+              <a:lnSpc>
+                <a:spcPct val="140000"/>
+              </a:lnSpc>
+            </a:pPr>
+            <a:r>
+              <a:rPr sz="1000" b="0" i="0">
                 <a:solidFill>
                   <a:srgbClr val="1E1B4B"/>
                 </a:solidFill>
                 <a:latin typeface="Calibri"/>
               </a:rPr>
-              <a:t>• Welcome by Amity Online team.</a:t>
-            </a:r>
-          </a:p>
-        </p:txBody>
-      </p:sp>
-      <p:sp>
-        <p:nvSpPr>
-          <p:cNvPr id="17" name="TextBox 16"/>
-          <p:cNvSpPr txBox="1"/>
-          <p:nvPr/>
-        </p:nvSpPr>
-        <p:spPr>
-          <a:xfrm>
-            <a:off x="8275320" y="2788920"/>
-            <a:ext cx="3337560" cy="365760"/>
-          </a:xfrm>
-          <a:prstGeom prst="rect">
-            <a:avLst/>
-          </a:prstGeom>
-          <a:noFill/>
-        </p:spPr>
-        <p:txBody>
-          <a:bodyPr wrap="square" lIns="45720" rIns="45720" tIns="18288" bIns="18288" anchor="t">
-            <a:spAutoFit/>
-          </a:bodyPr>
-          <a:lstStyle/>
-          <a:p>
-            <a:pPr algn="l">
-              <a:lnSpc>
-                <a:spcPct val="130000"/>
-              </a:lnSpc>
-            </a:pPr>
-            <a:r>
-              <a:rPr sz="969" b="0" i="0">
-                <a:solidFill>
-                  <a:srgbClr val="1E1B4B"/>
-                </a:solidFill>
-                <a:latin typeface="Calibri"/>
-              </a:rPr>
-              <a:t>• Campus walkthrough.</a:t>
-            </a:r>
-          </a:p>
-        </p:txBody>
-      </p:sp>
-      <p:sp>
-        <p:nvSpPr>
-          <p:cNvPr id="18" name="TextBox 17"/>
-          <p:cNvSpPr txBox="1"/>
-          <p:nvPr/>
-        </p:nvSpPr>
-        <p:spPr>
-          <a:xfrm>
-            <a:off x="4937760" y="3154680"/>
-            <a:ext cx="3337560" cy="365760"/>
-          </a:xfrm>
-          <a:prstGeom prst="rect">
-            <a:avLst/>
-          </a:prstGeom>
-          <a:noFill/>
-        </p:spPr>
-        <p:txBody>
-          <a:bodyPr wrap="square" lIns="45720" rIns="45720" tIns="18288" bIns="18288" anchor="t">
-            <a:spAutoFit/>
-          </a:bodyPr>
-          <a:lstStyle/>
-          <a:p>
-            <a:pPr algn="l">
-              <a:lnSpc>
-                <a:spcPct val="130000"/>
-              </a:lnSpc>
-            </a:pPr>
-            <a:r>
-              <a:rPr sz="969" b="0" i="0">
-                <a:solidFill>
-                  <a:srgbClr val="1E1B4B"/>
-                </a:solidFill>
-                <a:latin typeface="Calibri"/>
-              </a:rPr>
-              <a:t>• Lunch with faculty and a few alumni.</a:t>
-            </a:r>
-          </a:p>
-        </p:txBody>
-      </p:sp>
-      <p:sp>
-        <p:nvSpPr>
-          <p:cNvPr id="19" name="TextBox 18"/>
-          <p:cNvSpPr txBox="1"/>
-          <p:nvPr/>
-        </p:nvSpPr>
-        <p:spPr>
-          <a:xfrm>
-            <a:off x="8275320" y="3154680"/>
-            <a:ext cx="3337560" cy="365760"/>
-          </a:xfrm>
-          <a:prstGeom prst="rect">
-            <a:avLst/>
-          </a:prstGeom>
-          <a:noFill/>
-        </p:spPr>
-        <p:txBody>
-          <a:bodyPr wrap="square" lIns="45720" rIns="45720" tIns="18288" bIns="18288" anchor="t">
-            <a:spAutoFit/>
-          </a:bodyPr>
-          <a:lstStyle/>
-          <a:p>
-            <a:pPr algn="l">
-              <a:lnSpc>
-                <a:spcPct val="130000"/>
-              </a:lnSpc>
-            </a:pPr>
-            <a:r>
-              <a:rPr sz="969" b="0" i="0">
-                <a:solidFill>
-                  <a:srgbClr val="1E1B4B"/>
-                </a:solidFill>
-                <a:latin typeface="Calibri"/>
-              </a:rPr>
-              <a:t>• Group photo learners can share home.</a:t>
-            </a:r>
-          </a:p>
-        </p:txBody>
-      </p:sp>
-      <p:sp>
-        <p:nvSpPr>
-          <p:cNvPr id="20" name="Rounded Rectangle 19"/>
-          <p:cNvSpPr/>
-          <p:nvPr/>
-        </p:nvSpPr>
-        <p:spPr>
-          <a:xfrm>
-            <a:off x="4709160" y="3767328"/>
-            <a:ext cx="7040880" cy="1325880"/>
-          </a:xfrm>
-          <a:prstGeom prst="roundRect">
-            <a:avLst>
-              <a:gd name="adj" fmla="val 3000"/>
-            </a:avLst>
-          </a:prstGeom>
-          <a:solidFill>
-            <a:srgbClr val="F4F6FB"/>
-          </a:solidFill>
-          <a:ln w="6350">
-            <a:solidFill>
-              <a:srgbClr val="DDE2EE"/>
-            </a:solidFill>
-          </a:ln>
-          <a:effectLst/>
-        </p:spPr>
-        <p:style>
-          <a:lnRef idx="1">
-            <a:schemeClr val="accent1"/>
-          </a:lnRef>
-          <a:fillRef idx="3">
-            <a:schemeClr val="accent1"/>
-          </a:fillRef>
-          <a:effectRef idx="2">
-            <a:schemeClr val="accent1"/>
-          </a:effectRef>
-          <a:fontRef idx="minor">
-            <a:schemeClr val="lt1"/>
-          </a:fontRef>
-        </p:style>
-        <p:txBody>
-          <a:bodyPr rtlCol="0" anchor="ctr"/>
-          <a:lstStyle/>
-          <a:p>
-            <a:pPr algn="ctr"/>
-          </a:p>
-        </p:txBody>
-      </p:sp>
-      <p:sp>
-        <p:nvSpPr>
-          <p:cNvPr id="21" name="Rectangle 20"/>
-          <p:cNvSpPr/>
-          <p:nvPr/>
-        </p:nvSpPr>
-        <p:spPr>
-          <a:xfrm>
-            <a:off x="4709160" y="3767328"/>
-            <a:ext cx="91440" cy="1325880"/>
-          </a:xfrm>
-          <a:prstGeom prst="rect">
-            <a:avLst/>
-          </a:prstGeom>
-          <a:solidFill>
-            <a:srgbClr val="06B6D4"/>
-          </a:solidFill>
-          <a:ln>
-            <a:noFill/>
-          </a:ln>
-          <a:effectLst/>
-        </p:spPr>
-        <p:style>
-          <a:lnRef idx="1">
-            <a:schemeClr val="accent1"/>
-          </a:lnRef>
-          <a:fillRef idx="3">
-            <a:schemeClr val="accent1"/>
-          </a:fillRef>
-          <a:effectRef idx="2">
-            <a:schemeClr val="accent1"/>
-          </a:effectRef>
-          <a:fontRef idx="minor">
-            <a:schemeClr val="lt1"/>
-          </a:fontRef>
-        </p:style>
-        <p:txBody>
-          <a:bodyPr rtlCol="0" anchor="ctr"/>
-          <a:lstStyle/>
-          <a:p>
-            <a:pPr algn="ctr"/>
-          </a:p>
-        </p:txBody>
-      </p:sp>
-      <p:sp>
-        <p:nvSpPr>
-          <p:cNvPr id="22" name="TextBox 21"/>
-          <p:cNvSpPr txBox="1"/>
-          <p:nvPr/>
-        </p:nvSpPr>
-        <p:spPr>
-          <a:xfrm>
-            <a:off x="4937760" y="3886200"/>
-            <a:ext cx="7040880" cy="292608"/>
-          </a:xfrm>
-          <a:prstGeom prst="rect">
-            <a:avLst/>
-          </a:prstGeom>
-          <a:noFill/>
-        </p:spPr>
-        <p:txBody>
-          <a:bodyPr wrap="square" lIns="45720" rIns="45720" tIns="18288" bIns="18288" anchor="t">
-            <a:spAutoFit/>
-          </a:bodyPr>
-          <a:lstStyle/>
-          <a:p>
-            <a:pPr algn="l">
-              <a:lnSpc>
-                <a:spcPct val="125000"/>
-              </a:lnSpc>
-            </a:pPr>
-            <a:r>
-              <a:rPr sz="1050" b="1" i="0">
-                <a:solidFill>
-                  <a:srgbClr val="06B6D4"/>
-                </a:solidFill>
-                <a:latin typeface="Calibri"/>
-              </a:rPr>
-              <a:t>AFTERNOON.   BUILD.</a:t>
-            </a:r>
-          </a:p>
-        </p:txBody>
-      </p:sp>
-      <p:sp>
-        <p:nvSpPr>
-          <p:cNvPr id="23" name="TextBox 22"/>
-          <p:cNvSpPr txBox="1"/>
-          <p:nvPr/>
-        </p:nvSpPr>
-        <p:spPr>
-          <a:xfrm>
-            <a:off x="4937760" y="4224528"/>
-            <a:ext cx="3337560" cy="365760"/>
-          </a:xfrm>
-          <a:prstGeom prst="rect">
-            <a:avLst/>
-          </a:prstGeom>
-          <a:noFill/>
-        </p:spPr>
-        <p:txBody>
-          <a:bodyPr wrap="square" lIns="45720" rIns="45720" tIns="18288" bIns="18288" anchor="t">
-            <a:spAutoFit/>
-          </a:bodyPr>
-          <a:lstStyle/>
-          <a:p>
-            <a:pPr algn="l">
-              <a:lnSpc>
-                <a:spcPct val="130000"/>
-              </a:lnSpc>
-            </a:pPr>
-            <a:r>
-              <a:rPr sz="969" b="0" i="0">
-                <a:solidFill>
-                  <a:srgbClr val="1E1B4B"/>
-                </a:solidFill>
-                <a:latin typeface="Calibri"/>
-              </a:rPr>
-              <a:t>• Two short masterclasses.</a:t>
-            </a:r>
-          </a:p>
-        </p:txBody>
-      </p:sp>
-      <p:sp>
-        <p:nvSpPr>
-          <p:cNvPr id="24" name="TextBox 23"/>
-          <p:cNvSpPr txBox="1"/>
-          <p:nvPr/>
-        </p:nvSpPr>
-        <p:spPr>
-          <a:xfrm>
-            <a:off x="8275320" y="4224528"/>
-            <a:ext cx="3337560" cy="365760"/>
-          </a:xfrm>
-          <a:prstGeom prst="rect">
-            <a:avLst/>
-          </a:prstGeom>
-          <a:noFill/>
-        </p:spPr>
-        <p:txBody>
-          <a:bodyPr wrap="square" lIns="45720" rIns="45720" tIns="18288" bIns="18288" anchor="t">
-            <a:spAutoFit/>
-          </a:bodyPr>
-          <a:lstStyle/>
-          <a:p>
-            <a:pPr algn="l">
-              <a:lnSpc>
-                <a:spcPct val="130000"/>
-              </a:lnSpc>
-            </a:pPr>
-            <a:r>
-              <a:rPr sz="969" b="0" i="0">
-                <a:solidFill>
-                  <a:srgbClr val="1E1B4B"/>
-                </a:solidFill>
-                <a:latin typeface="Calibri"/>
-              </a:rPr>
-              <a:t>• 90 minute team challenge.</a:t>
-            </a:r>
-          </a:p>
-        </p:txBody>
-      </p:sp>
-      <p:sp>
-        <p:nvSpPr>
-          <p:cNvPr id="25" name="TextBox 24"/>
-          <p:cNvSpPr txBox="1"/>
-          <p:nvPr/>
-        </p:nvSpPr>
-        <p:spPr>
-          <a:xfrm>
-            <a:off x="4937760" y="4590288"/>
-            <a:ext cx="3337560" cy="365760"/>
-          </a:xfrm>
-          <a:prstGeom prst="rect">
-            <a:avLst/>
-          </a:prstGeom>
-          <a:noFill/>
-        </p:spPr>
-        <p:txBody>
-          <a:bodyPr wrap="square" lIns="45720" rIns="45720" tIns="18288" bIns="18288" anchor="t">
-            <a:spAutoFit/>
-          </a:bodyPr>
-          <a:lstStyle/>
-          <a:p>
-            <a:pPr algn="l">
-              <a:lnSpc>
-                <a:spcPct val="130000"/>
-              </a:lnSpc>
-            </a:pPr>
-            <a:r>
-              <a:rPr sz="969" b="0" i="0">
-                <a:solidFill>
-                  <a:srgbClr val="1E1B4B"/>
-                </a:solidFill>
-                <a:latin typeface="Calibri"/>
-              </a:rPr>
-              <a:t>• Real Amity Online problem to solve.</a:t>
-            </a:r>
-          </a:p>
-        </p:txBody>
-      </p:sp>
-      <p:sp>
-        <p:nvSpPr>
-          <p:cNvPr id="26" name="TextBox 25"/>
-          <p:cNvSpPr txBox="1"/>
-          <p:nvPr/>
-        </p:nvSpPr>
-        <p:spPr>
-          <a:xfrm>
-            <a:off x="8275320" y="4590288"/>
-            <a:ext cx="3337560" cy="365760"/>
-          </a:xfrm>
-          <a:prstGeom prst="rect">
-            <a:avLst/>
-          </a:prstGeom>
-          <a:noFill/>
-        </p:spPr>
-        <p:txBody>
-          <a:bodyPr wrap="square" lIns="45720" rIns="45720" tIns="18288" bIns="18288" anchor="t">
-            <a:spAutoFit/>
-          </a:bodyPr>
-          <a:lstStyle/>
-          <a:p>
-            <a:pPr algn="l">
-              <a:lnSpc>
-                <a:spcPct val="130000"/>
-              </a:lnSpc>
-            </a:pPr>
-            <a:r>
-              <a:rPr sz="969" b="0" i="0">
-                <a:solidFill>
-                  <a:srgbClr val="1E1B4B"/>
-                </a:solidFill>
-                <a:latin typeface="Calibri"/>
-              </a:rPr>
-              <a:t>• Awards announced at high tea.</a:t>
-            </a:r>
-          </a:p>
-        </p:txBody>
-      </p:sp>
-      <p:sp>
-        <p:nvSpPr>
-          <p:cNvPr id="27" name="Rounded Rectangle 26"/>
-          <p:cNvSpPr/>
-          <p:nvPr/>
-        </p:nvSpPr>
-        <p:spPr>
-          <a:xfrm>
-            <a:off x="4709160" y="5202936"/>
-            <a:ext cx="7040880" cy="1325880"/>
-          </a:xfrm>
-          <a:prstGeom prst="roundRect">
-            <a:avLst>
-              <a:gd name="adj" fmla="val 3000"/>
-            </a:avLst>
-          </a:prstGeom>
-          <a:solidFill>
-            <a:srgbClr val="F4F6FB"/>
-          </a:solidFill>
-          <a:ln w="6350">
-            <a:solidFill>
-              <a:srgbClr val="DDE2EE"/>
-            </a:solidFill>
-          </a:ln>
-          <a:effectLst/>
-        </p:spPr>
-        <p:style>
-          <a:lnRef idx="1">
-            <a:schemeClr val="accent1"/>
-          </a:lnRef>
-          <a:fillRef idx="3">
-            <a:schemeClr val="accent1"/>
-          </a:fillRef>
-          <a:effectRef idx="2">
-            <a:schemeClr val="accent1"/>
-          </a:effectRef>
-          <a:fontRef idx="minor">
-            <a:schemeClr val="lt1"/>
-          </a:fontRef>
-        </p:style>
-        <p:txBody>
-          <a:bodyPr rtlCol="0" anchor="ctr"/>
-          <a:lstStyle/>
-          <a:p>
-            <a:pPr algn="ctr"/>
-          </a:p>
-        </p:txBody>
-      </p:sp>
-      <p:sp>
-        <p:nvSpPr>
-          <p:cNvPr id="28" name="Rectangle 27"/>
-          <p:cNvSpPr/>
-          <p:nvPr/>
-        </p:nvSpPr>
-        <p:spPr>
-          <a:xfrm>
-            <a:off x="4709160" y="5202936"/>
-            <a:ext cx="91440" cy="1325880"/>
-          </a:xfrm>
-          <a:prstGeom prst="rect">
-            <a:avLst/>
-          </a:prstGeom>
-          <a:solidFill>
-            <a:srgbClr val="A855F7"/>
-          </a:solidFill>
-          <a:ln>
-            <a:noFill/>
-          </a:ln>
-          <a:effectLst/>
-        </p:spPr>
-        <p:style>
-          <a:lnRef idx="1">
-            <a:schemeClr val="accent1"/>
-          </a:lnRef>
-          <a:fillRef idx="3">
-            <a:schemeClr val="accent1"/>
-          </a:fillRef>
-          <a:effectRef idx="2">
-            <a:schemeClr val="accent1"/>
-          </a:effectRef>
-          <a:fontRef idx="minor">
-            <a:schemeClr val="lt1"/>
-          </a:fontRef>
-        </p:style>
-        <p:txBody>
-          <a:bodyPr rtlCol="0" anchor="ctr"/>
-          <a:lstStyle/>
-          <a:p>
-            <a:pPr algn="ctr"/>
-          </a:p>
-        </p:txBody>
-      </p:sp>
-      <p:sp>
-        <p:nvSpPr>
-          <p:cNvPr id="29" name="TextBox 28"/>
-          <p:cNvSpPr txBox="1"/>
-          <p:nvPr/>
-        </p:nvSpPr>
-        <p:spPr>
-          <a:xfrm>
-            <a:off x="4937760" y="5321808"/>
-            <a:ext cx="7040880" cy="292608"/>
-          </a:xfrm>
-          <a:prstGeom prst="rect">
-            <a:avLst/>
-          </a:prstGeom>
-          <a:noFill/>
-        </p:spPr>
-        <p:txBody>
-          <a:bodyPr wrap="square" lIns="45720" rIns="45720" tIns="18288" bIns="18288" anchor="t">
-            <a:spAutoFit/>
-          </a:bodyPr>
-          <a:lstStyle/>
-          <a:p>
-            <a:pPr algn="l">
-              <a:lnSpc>
-                <a:spcPct val="125000"/>
-              </a:lnSpc>
-            </a:pPr>
-            <a:r>
-              <a:rPr sz="1050" b="1" i="0">
-                <a:solidFill>
-                  <a:srgbClr val="A855F7"/>
-                </a:solidFill>
-                <a:latin typeface="Calibri"/>
-              </a:rPr>
-              <a:t>EVENING.   BROADCAST.</a:t>
-            </a:r>
-          </a:p>
-        </p:txBody>
-      </p:sp>
-      <p:sp>
-        <p:nvSpPr>
-          <p:cNvPr id="30" name="TextBox 29"/>
-          <p:cNvSpPr txBox="1"/>
-          <p:nvPr/>
-        </p:nvSpPr>
-        <p:spPr>
-          <a:xfrm>
-            <a:off x="4937760" y="5660136"/>
-            <a:ext cx="3337560" cy="365760"/>
-          </a:xfrm>
-          <a:prstGeom prst="rect">
-            <a:avLst/>
-          </a:prstGeom>
-          <a:noFill/>
-        </p:spPr>
-        <p:txBody>
-          <a:bodyPr wrap="square" lIns="45720" rIns="45720" tIns="18288" bIns="18288" anchor="t">
-            <a:spAutoFit/>
-          </a:bodyPr>
-          <a:lstStyle/>
-          <a:p>
-            <a:pPr algn="l">
-              <a:lnSpc>
-                <a:spcPct val="130000"/>
-              </a:lnSpc>
-            </a:pPr>
-            <a:r>
-              <a:rPr sz="969" b="0" i="0">
-                <a:solidFill>
-                  <a:srgbClr val="1E1B4B"/>
-                </a:solidFill>
-                <a:latin typeface="Calibri"/>
-              </a:rPr>
-              <a:t>• Mentor pairing. One alumni mentor for 12 months.</a:t>
-            </a:r>
-          </a:p>
-        </p:txBody>
-      </p:sp>
-      <p:sp>
-        <p:nvSpPr>
-          <p:cNvPr id="31" name="TextBox 30"/>
-          <p:cNvSpPr txBox="1"/>
-          <p:nvPr/>
-        </p:nvSpPr>
-        <p:spPr>
-          <a:xfrm>
-            <a:off x="8275320" y="5660136"/>
-            <a:ext cx="3337560" cy="365760"/>
-          </a:xfrm>
-          <a:prstGeom prst="rect">
-            <a:avLst/>
-          </a:prstGeom>
-          <a:noFill/>
-        </p:spPr>
-        <p:txBody>
-          <a:bodyPr wrap="square" lIns="45720" rIns="45720" tIns="18288" bIns="18288" anchor="t">
-            <a:spAutoFit/>
-          </a:bodyPr>
-          <a:lstStyle/>
-          <a:p>
-            <a:pPr algn="l">
-              <a:lnSpc>
-                <a:spcPct val="130000"/>
-              </a:lnSpc>
-            </a:pPr>
-            <a:r>
-              <a:rPr sz="969" b="0" i="0">
-                <a:solidFill>
-                  <a:srgbClr val="1E1B4B"/>
-                </a:solidFill>
-                <a:latin typeface="Calibri"/>
-              </a:rPr>
-              <a:t>• Closing Ignite Pledge ceremony.</a:t>
-            </a:r>
-          </a:p>
-        </p:txBody>
-      </p:sp>
-      <p:sp>
-        <p:nvSpPr>
-          <p:cNvPr id="32" name="TextBox 31"/>
-          <p:cNvSpPr txBox="1"/>
-          <p:nvPr/>
-        </p:nvSpPr>
-        <p:spPr>
-          <a:xfrm>
-            <a:off x="4937760" y="6025896"/>
-            <a:ext cx="3337560" cy="365760"/>
-          </a:xfrm>
-          <a:prstGeom prst="rect">
-            <a:avLst/>
-          </a:prstGeom>
-          <a:noFill/>
-        </p:spPr>
-        <p:txBody>
-          <a:bodyPr wrap="square" lIns="45720" rIns="45720" tIns="18288" bIns="18288" anchor="t">
-            <a:spAutoFit/>
-          </a:bodyPr>
-          <a:lstStyle/>
-          <a:p>
-            <a:pPr algn="l">
-              <a:lnSpc>
-                <a:spcPct val="130000"/>
-              </a:lnSpc>
-            </a:pPr>
-            <a:r>
-              <a:rPr sz="969" b="0" i="0">
-                <a:solidFill>
-                  <a:srgbClr val="1E1B4B"/>
-                </a:solidFill>
-                <a:latin typeface="Calibri"/>
-              </a:rPr>
-              <a:t>• Pro photographer plus 60 second reel each.</a:t>
-            </a:r>
-          </a:p>
-        </p:txBody>
-      </p:sp>
-      <p:sp>
-        <p:nvSpPr>
-          <p:cNvPr id="33" name="TextBox 32"/>
-          <p:cNvSpPr txBox="1"/>
-          <p:nvPr/>
-        </p:nvSpPr>
-        <p:spPr>
-          <a:xfrm>
-            <a:off x="8275320" y="6025896"/>
-            <a:ext cx="3337560" cy="365760"/>
-          </a:xfrm>
-          <a:prstGeom prst="rect">
-            <a:avLst/>
-          </a:prstGeom>
-          <a:noFill/>
-        </p:spPr>
-        <p:txBody>
-          <a:bodyPr wrap="square" lIns="45720" rIns="45720" tIns="18288" bIns="18288" anchor="t">
-            <a:spAutoFit/>
-          </a:bodyPr>
-          <a:lstStyle/>
-          <a:p>
-            <a:pPr algn="l">
-              <a:lnSpc>
-                <a:spcPct val="130000"/>
-              </a:lnSpc>
-            </a:pPr>
-            <a:r>
-              <a:rPr sz="969" b="0" i="0">
-                <a:solidFill>
-                  <a:srgbClr val="1E1B4B"/>
-                </a:solidFill>
-                <a:latin typeface="Calibri"/>
-              </a:rPr>
-              <a:t>• Bus drop to nearest metro.</a:t>
+              <a:t>Production Rs 25L  +  Headliner Rs 12L  +  Photo / Video Rs 8L  +  Logistics Rs 10L   =   Rs 55L     Sponsor offset minus Rs 25L     Net Rs 30L for 100 learners and 5L plus earned reach.</a:t>
             </a:r>
           </a:p>
         </p:txBody>
@@ -22610,13 +23416,13 @@
               </a:lnSpc>
             </a:pPr>
             <a:r>
-              <a:rPr sz="1450" b="1" i="0">
+              <a:rPr sz="1400" b="1" i="0">
                 <a:solidFill>
                   <a:srgbClr val="1E1B4B"/>
                 </a:solidFill>
                 <a:latin typeface="Calibri"/>
               </a:rPr>
-              <a:t>Subject:   You enrolled online. We'd like to host you in person.</a:t>
+              <a:t>Subject:   We're throwing a concert on the campus you've never seen.</a:t>
             </a:r>
           </a:p>
         </p:txBody>
@@ -22649,13 +23455,13 @@
               </a:lnSpc>
             </a:pPr>
             <a:r>
-              <a:rPr sz="1050" b="0" i="1">
+              <a:rPr sz="1030" b="0" i="1">
                 <a:solidFill>
                   <a:srgbClr val="52597A"/>
                 </a:solidFill>
                 <a:latin typeface="Calibri"/>
               </a:rPr>
-              <a:t>Preheader:   One day at Noida. No recorded lectures. Yes, really.</a:t>
+              <a:t>Preheader:   One night. Your favourite comic. Your family in the photo. Apply by 25 August.</a:t>
             </a:r>
           </a:p>
         </p:txBody>
@@ -22669,7 +23475,7 @@
         <p:spPr>
           <a:xfrm>
             <a:off x="731520" y="2697480"/>
-            <a:ext cx="7223760" cy="411480"/>
+            <a:ext cx="7223760" cy="365760"/>
           </a:xfrm>
           <a:prstGeom prst="rect">
             <a:avLst/>
@@ -22688,7 +23494,7 @@
               </a:lnSpc>
             </a:pPr>
             <a:r>
-              <a:rPr sz="1070" b="0" i="0">
+              <a:rPr sz="1030" b="0" i="0">
                 <a:solidFill>
                   <a:srgbClr val="1E1B4B"/>
                 </a:solidFill>
@@ -22707,8 +23513,8 @@
         </p:nvSpPr>
         <p:spPr>
           <a:xfrm>
-            <a:off x="731520" y="3054096"/>
-            <a:ext cx="7223760" cy="411480"/>
+            <a:off x="731520" y="2999232"/>
+            <a:ext cx="7223760" cy="365760"/>
           </a:xfrm>
           <a:prstGeom prst="rect">
             <a:avLst/>
@@ -22727,13 +23533,13 @@
               </a:lnSpc>
             </a:pPr>
             <a:r>
-              <a:rPr sz="1070" b="0" i="0">
+              <a:rPr sz="1030" b="0" i="0">
                 <a:solidFill>
                   <a:srgbClr val="1E1B4B"/>
                 </a:solidFill>
                 <a:latin typeface="Calibri"/>
               </a:rPr>
-              <a:t>You picked Amity Online for one big reason. It had to fit your work, your family, and your commute. It does.</a:t>
+              <a:t>You picked Amity Online for the right reason. It fits work, family, and your commute. It does.</a:t>
             </a:r>
           </a:p>
         </p:txBody>
@@ -22746,8 +23552,8 @@
         </p:nvSpPr>
         <p:spPr>
           <a:xfrm>
-            <a:off x="731520" y="3410712"/>
-            <a:ext cx="7223760" cy="411480"/>
+            <a:off x="731520" y="3300984"/>
+            <a:ext cx="7223760" cy="365760"/>
           </a:xfrm>
           <a:prstGeom prst="rect">
             <a:avLst/>
@@ -22766,13 +23572,13 @@
               </a:lnSpc>
             </a:pPr>
             <a:r>
-              <a:rPr sz="1070" b="0" i="0">
+              <a:rPr sz="1030" b="0" i="0">
                 <a:solidFill>
                   <a:srgbClr val="1E1B4B"/>
                 </a:solidFill>
                 <a:latin typeface="Calibri"/>
               </a:rPr>
-              <a:t>But there is one thing it cannot do over a phone screen. It cannot let you walk the campus you have technically been part of all along.</a:t>
+              <a:t>But there is one thing it never gave you. The night.</a:t>
             </a:r>
           </a:p>
         </p:txBody>
@@ -22785,8 +23591,8 @@
         </p:nvSpPr>
         <p:spPr>
           <a:xfrm>
-            <a:off x="731520" y="3767328"/>
-            <a:ext cx="7223760" cy="411480"/>
+            <a:off x="731520" y="3602736"/>
+            <a:ext cx="7223760" cy="365760"/>
           </a:xfrm>
           <a:prstGeom prst="rect">
             <a:avLst/>
@@ -22805,13 +23611,13 @@
               </a:lnSpc>
             </a:pPr>
             <a:r>
-              <a:rPr sz="1070" b="0" i="0">
+              <a:rPr sz="1030" b="0" i="0">
                 <a:solidFill>
                   <a:srgbClr val="1E1B4B"/>
                 </a:solidFill>
                 <a:latin typeface="Calibri"/>
               </a:rPr>
-              <a:t>We'd like to fix that. We're piloting Amity Ignite. One day at Noida. Free for existing learners. No lectures. Two masterclasses. One real challenge. One mentor for twelve months.</a:t>
+              <a:t>On 28 September we are running Amity Ignite, Cohort 0. One day on the Noida campus you have technically been a part of all along.</a:t>
             </a:r>
           </a:p>
         </p:txBody>
@@ -22824,8 +23630,8 @@
         </p:nvSpPr>
         <p:spPr>
           <a:xfrm>
-            <a:off x="731520" y="4123944"/>
-            <a:ext cx="7223760" cy="411480"/>
+            <a:off x="731520" y="3904488"/>
+            <a:ext cx="7223760" cy="365760"/>
           </a:xfrm>
           <a:prstGeom prst="rect">
             <a:avLst/>
@@ -22844,27 +23650,144 @@
               </a:lnSpc>
             </a:pPr>
             <a:r>
-              <a:rPr sz="1070" b="0" i="0">
+              <a:rPr sz="1030" b="0" i="0">
                 <a:solidFill>
                   <a:srgbClr val="1E1B4B"/>
                 </a:solidFill>
                 <a:latin typeface="Calibri"/>
               </a:rPr>
-              <a:t>Cohort 0 is small on purpose. 100 learners. Apply by 25 August.</a:t>
-            </a:r>
-          </a:p>
-        </p:txBody>
-      </p:sp>
-      <p:sp>
-        <p:nvSpPr>
-          <p:cNvPr id="18" name="Rectangle 17"/>
+              <a:t>Day. Walk the campus with your family. Two short masterclasses.</a:t>
+            </a:r>
+          </a:p>
+        </p:txBody>
+      </p:sp>
+      <p:sp>
+        <p:nvSpPr>
+          <p:cNvPr id="18" name="TextBox 17"/>
+          <p:cNvSpPr txBox="1"/>
+          <p:nvPr/>
+        </p:nvSpPr>
+        <p:spPr>
+          <a:xfrm>
+            <a:off x="731520" y="4160520"/>
+            <a:ext cx="7223760" cy="365760"/>
+          </a:xfrm>
+          <a:prstGeom prst="rect">
+            <a:avLst/>
+          </a:prstGeom>
+          <a:noFill/>
+        </p:spPr>
+        <p:txBody>
+          <a:bodyPr wrap="square" lIns="45720" rIns="45720" tIns="18288" bIns="18288" anchor="t">
+            <a:spAutoFit/>
+          </a:bodyPr>
+          <a:lstStyle/>
+          <a:p>
+            <a:pPr algn="l">
+              <a:lnSpc>
+                <a:spcPct val="140000"/>
+              </a:lnSpc>
+            </a:pPr>
+            <a:r>
+              <a:rPr sz="1030" b="0" i="0">
+                <a:solidFill>
+                  <a:srgbClr val="1E1B4B"/>
+                </a:solidFill>
+                <a:latin typeface="Calibri"/>
+              </a:rPr>
+              <a:t>Dusk. Stand on the convocation stage. Stole, certificate, family photograph.</a:t>
+            </a:r>
+          </a:p>
+        </p:txBody>
+      </p:sp>
+      <p:sp>
+        <p:nvSpPr>
+          <p:cNvPr id="19" name="TextBox 18"/>
+          <p:cNvSpPr txBox="1"/>
+          <p:nvPr/>
+        </p:nvSpPr>
+        <p:spPr>
+          <a:xfrm>
+            <a:off x="731520" y="4416552"/>
+            <a:ext cx="7223760" cy="365760"/>
+          </a:xfrm>
+          <a:prstGeom prst="rect">
+            <a:avLst/>
+          </a:prstGeom>
+          <a:noFill/>
+        </p:spPr>
+        <p:txBody>
+          <a:bodyPr wrap="square" lIns="45720" rIns="45720" tIns="18288" bIns="18288" anchor="t">
+            <a:spAutoFit/>
+          </a:bodyPr>
+          <a:lstStyle/>
+          <a:p>
+            <a:pPr algn="l">
+              <a:lnSpc>
+                <a:spcPct val="140000"/>
+              </a:lnSpc>
+            </a:pPr>
+            <a:r>
+              <a:rPr sz="1030" b="0" i="0">
+                <a:solidFill>
+                  <a:srgbClr val="1E1B4B"/>
+                </a:solidFill>
+                <a:latin typeface="Calibri"/>
+              </a:rPr>
+              <a:t>Night. The concert. Live comedy headliner. Five Amity Online learners open the show.</a:t>
+            </a:r>
+          </a:p>
+        </p:txBody>
+      </p:sp>
+      <p:sp>
+        <p:nvSpPr>
+          <p:cNvPr id="20" name="TextBox 19"/>
+          <p:cNvSpPr txBox="1"/>
+          <p:nvPr/>
+        </p:nvSpPr>
+        <p:spPr>
+          <a:xfrm>
+            <a:off x="731520" y="4718304"/>
+            <a:ext cx="7223760" cy="365760"/>
+          </a:xfrm>
+          <a:prstGeom prst="rect">
+            <a:avLst/>
+          </a:prstGeom>
+          <a:noFill/>
+        </p:spPr>
+        <p:txBody>
+          <a:bodyPr wrap="square" lIns="45720" rIns="45720" tIns="18288" bIns="18288" anchor="t">
+            <a:spAutoFit/>
+          </a:bodyPr>
+          <a:lstStyle/>
+          <a:p>
+            <a:pPr algn="l">
+              <a:lnSpc>
+                <a:spcPct val="140000"/>
+              </a:lnSpc>
+            </a:pPr>
+            <a:r>
+              <a:rPr sz="1030" b="0" i="0">
+                <a:solidFill>
+                  <a:srgbClr val="1E1B4B"/>
+                </a:solidFill>
+                <a:latin typeface="Calibri"/>
+              </a:rPr>
+              <a:t>Free for existing learners. One family member included. 100 seats.</a:t>
+            </a:r>
+          </a:p>
+        </p:txBody>
+      </p:sp>
+      <p:sp>
+        <p:nvSpPr>
+          <p:cNvPr id="21" name="Rectangle 20"/>
           <p:cNvSpPr/>
           <p:nvPr/>
         </p:nvSpPr>
         <p:spPr>
           <a:xfrm>
-            <a:off x="731520" y="4489704"/>
-            <a:ext cx="2103120" cy="411480"/>
+            <a:off x="731520" y="5020056"/>
+            <a:ext cx="2103120" cy="384048"/>
           </a:xfrm>
           <a:prstGeom prst="rect">
             <a:avLst/>
@@ -22901,14 +23824,14 @@
       </p:sp>
       <p:sp>
         <p:nvSpPr>
-          <p:cNvPr id="19" name="TextBox 18"/>
-          <p:cNvSpPr txBox="1"/>
-          <p:nvPr/>
-        </p:nvSpPr>
-        <p:spPr>
-          <a:xfrm>
-            <a:off x="731520" y="4489704"/>
-            <a:ext cx="2103120" cy="411480"/>
+          <p:cNvPr id="22" name="TextBox 21"/>
+          <p:cNvSpPr txBox="1"/>
+          <p:nvPr/>
+        </p:nvSpPr>
+        <p:spPr>
+          <a:xfrm>
+            <a:off x="731520" y="5020056"/>
+            <a:ext cx="2103120" cy="384048"/>
           </a:xfrm>
           <a:prstGeom prst="rect">
             <a:avLst/>
@@ -22933,20 +23856,20 @@
                 </a:solidFill>
                 <a:latin typeface="Calibri"/>
               </a:rPr>
-              <a:t>Apply for Cohort 0</a:t>
-            </a:r>
-          </a:p>
-        </p:txBody>
-      </p:sp>
-      <p:sp>
-        <p:nvSpPr>
-          <p:cNvPr id="20" name="TextBox 19"/>
-          <p:cNvSpPr txBox="1"/>
-          <p:nvPr/>
-        </p:nvSpPr>
-        <p:spPr>
-          <a:xfrm>
-            <a:off x="2971800" y="4581144"/>
+              <a:t>Reserve your seat</a:t>
+            </a:r>
+          </a:p>
+        </p:txBody>
+      </p:sp>
+      <p:sp>
+        <p:nvSpPr>
+          <p:cNvPr id="23" name="TextBox 22"/>
+          <p:cNvSpPr txBox="1"/>
+          <p:nvPr/>
+        </p:nvSpPr>
+        <p:spPr>
+          <a:xfrm>
+            <a:off x="2971800" y="5093208"/>
             <a:ext cx="4572000" cy="274320"/>
           </a:xfrm>
           <a:prstGeom prst="rect">
@@ -22979,46 +23902,7 @@
       </p:sp>
       <p:sp>
         <p:nvSpPr>
-          <p:cNvPr id="21" name="TextBox 20"/>
-          <p:cNvSpPr txBox="1"/>
-          <p:nvPr/>
-        </p:nvSpPr>
-        <p:spPr>
-          <a:xfrm>
-            <a:off x="731520" y="5129784"/>
-            <a:ext cx="7223760" cy="365760"/>
-          </a:xfrm>
-          <a:prstGeom prst="rect">
-            <a:avLst/>
-          </a:prstGeom>
-          <a:noFill/>
-        </p:spPr>
-        <p:txBody>
-          <a:bodyPr wrap="square" lIns="45720" rIns="45720" tIns="18288" bIns="18288" anchor="t">
-            <a:spAutoFit/>
-          </a:bodyPr>
-          <a:lstStyle/>
-          <a:p>
-            <a:pPr algn="l">
-              <a:lnSpc>
-                <a:spcPct val="125000"/>
-              </a:lnSpc>
-            </a:pPr>
-            <a:r>
-              <a:rPr sz="1100" b="0" i="1">
-                <a:solidFill>
-                  <a:srgbClr val="1E1B4B"/>
-                </a:solidFill>
-                <a:latin typeface="Calibri"/>
-              </a:rPr>
-              <a:t>Amity Online Marketing</a:t>
-            </a:r>
-          </a:p>
-        </p:txBody>
-      </p:sp>
-      <p:sp>
-        <p:nvSpPr>
-          <p:cNvPr id="22" name="Rounded Rectangle 21"/>
+          <p:cNvPr id="24" name="Rounded Rectangle 23"/>
           <p:cNvSpPr/>
           <p:nvPr/>
         </p:nvSpPr>
@@ -23066,7 +23950,7 @@
       </p:sp>
       <p:sp>
         <p:nvSpPr>
-          <p:cNvPr id="23" name="TextBox 22"/>
+          <p:cNvPr id="25" name="TextBox 24"/>
           <p:cNvSpPr txBox="1"/>
           <p:nvPr/>
         </p:nvSpPr>
@@ -23105,7 +23989,7 @@
       </p:sp>
       <p:sp>
         <p:nvSpPr>
-          <p:cNvPr id="24" name="TextBox 23"/>
+          <p:cNvPr id="26" name="TextBox 25"/>
           <p:cNvSpPr txBox="1"/>
           <p:nvPr/>
         </p:nvSpPr>
@@ -23137,21 +24021,21 @@
                 </a:solidFill>
                 <a:latin typeface="Calibri"/>
               </a:rPr>
-              <a:t>Subject line</a:t>
-            </a:r>
-          </a:p>
-        </p:txBody>
-      </p:sp>
-      <p:sp>
-        <p:nvSpPr>
-          <p:cNvPr id="25" name="TextBox 24"/>
+              <a:t>Subject leads with the surprise</a:t>
+            </a:r>
+          </a:p>
+        </p:txBody>
+      </p:sp>
+      <p:sp>
+        <p:nvSpPr>
+          <p:cNvPr id="27" name="TextBox 26"/>
           <p:cNvSpPr txBox="1"/>
           <p:nvPr/>
         </p:nvSpPr>
         <p:spPr>
           <a:xfrm>
             <a:off x="8641080" y="2121407"/>
-            <a:ext cx="2971800" cy="411480"/>
+            <a:ext cx="2971800" cy="457200"/>
           </a:xfrm>
           <a:prstGeom prst="rect">
             <a:avLst/>
@@ -23176,14 +24060,14 @@
                 </a:solidFill>
                 <a:latin typeface="Calibri"/>
               </a:rPr>
-              <a:t>Personal. Curious. Not 'Announcing'.</a:t>
-            </a:r>
-          </a:p>
-        </p:txBody>
-      </p:sp>
-      <p:sp>
-        <p:nvSpPr>
-          <p:cNvPr id="26" name="TextBox 25"/>
+              <a:t>Concert beats announcement. Curiosity beats CTA.</a:t>
+            </a:r>
+          </a:p>
+        </p:txBody>
+      </p:sp>
+      <p:sp>
+        <p:nvSpPr>
+          <p:cNvPr id="28" name="TextBox 27"/>
           <p:cNvSpPr txBox="1"/>
           <p:nvPr/>
         </p:nvSpPr>
@@ -23215,21 +24099,21 @@
                 </a:solidFill>
                 <a:latin typeface="Calibri"/>
               </a:rPr>
-              <a:t>Sender</a:t>
-            </a:r>
-          </a:p>
-        </p:txBody>
-      </p:sp>
-      <p:sp>
-        <p:nvSpPr>
-          <p:cNvPr id="27" name="TextBox 26"/>
+              <a:t>Promise a feeling, not a feature</a:t>
+            </a:r>
+          </a:p>
+        </p:txBody>
+      </p:sp>
+      <p:sp>
+        <p:nvSpPr>
+          <p:cNvPr id="29" name="TextBox 28"/>
           <p:cNvSpPr txBox="1"/>
           <p:nvPr/>
         </p:nvSpPr>
         <p:spPr>
           <a:xfrm>
             <a:off x="8641080" y="2834639"/>
-            <a:ext cx="2971800" cy="411480"/>
+            <a:ext cx="2971800" cy="457200"/>
           </a:xfrm>
           <a:prstGeom prst="rect">
             <a:avLst/>
@@ -23254,14 +24138,14 @@
                 </a:solidFill>
                 <a:latin typeface="Calibri"/>
               </a:rPr>
-              <a:t>From the team. No invented person.</a:t>
-            </a:r>
-          </a:p>
-        </p:txBody>
-      </p:sp>
-      <p:sp>
-        <p:nvSpPr>
-          <p:cNvPr id="28" name="TextBox 27"/>
+              <a:t>The stage. The stole. The family photograph.</a:t>
+            </a:r>
+          </a:p>
+        </p:txBody>
+      </p:sp>
+      <p:sp>
+        <p:nvSpPr>
+          <p:cNvPr id="30" name="TextBox 29"/>
           <p:cNvSpPr txBox="1"/>
           <p:nvPr/>
         </p:nvSpPr>
@@ -23293,21 +24177,21 @@
                 </a:solidFill>
                 <a:latin typeface="Calibri"/>
               </a:rPr>
-              <a:t>One CTA</a:t>
-            </a:r>
-          </a:p>
-        </p:txBody>
-      </p:sp>
-      <p:sp>
-        <p:nvSpPr>
-          <p:cNvPr id="29" name="TextBox 28"/>
+              <a:t>Sender is the team</a:t>
+            </a:r>
+          </a:p>
+        </p:txBody>
+      </p:sp>
+      <p:sp>
+        <p:nvSpPr>
+          <p:cNvPr id="31" name="TextBox 30"/>
           <p:cNvSpPr txBox="1"/>
           <p:nvPr/>
         </p:nvSpPr>
         <p:spPr>
           <a:xfrm>
             <a:off x="8641080" y="3547871"/>
-            <a:ext cx="2971800" cy="411480"/>
+            <a:ext cx="2971800" cy="457200"/>
           </a:xfrm>
           <a:prstGeom prst="rect">
             <a:avLst/>
@@ -23332,14 +24216,14 @@
                 </a:solidFill>
                 <a:latin typeface="Calibri"/>
               </a:rPr>
-              <a:t>One blue button. No sidebar links.</a:t>
-            </a:r>
-          </a:p>
-        </p:txBody>
-      </p:sp>
-      <p:sp>
-        <p:nvSpPr>
-          <p:cNvPr id="30" name="TextBox 29"/>
+              <a:t>No invented person. No celebrity stand in.</a:t>
+            </a:r>
+          </a:p>
+        </p:txBody>
+      </p:sp>
+      <p:sp>
+        <p:nvSpPr>
+          <p:cNvPr id="32" name="TextBox 31"/>
           <p:cNvSpPr txBox="1"/>
           <p:nvPr/>
         </p:nvSpPr>
@@ -23371,21 +24255,21 @@
                 </a:solidFill>
                 <a:latin typeface="Calibri"/>
               </a:rPr>
-              <a:t>Real scarcity</a:t>
-            </a:r>
-          </a:p>
-        </p:txBody>
-      </p:sp>
-      <p:sp>
-        <p:nvSpPr>
-          <p:cNvPr id="31" name="TextBox 30"/>
+              <a:t>One CTA</a:t>
+            </a:r>
+          </a:p>
+        </p:txBody>
+      </p:sp>
+      <p:sp>
+        <p:nvSpPr>
+          <p:cNvPr id="33" name="TextBox 32"/>
           <p:cNvSpPr txBox="1"/>
           <p:nvPr/>
         </p:nvSpPr>
         <p:spPr>
           <a:xfrm>
             <a:off x="8641080" y="4261103"/>
-            <a:ext cx="2971800" cy="411480"/>
+            <a:ext cx="2971800" cy="457200"/>
           </a:xfrm>
           <a:prstGeom prst="rect">
             <a:avLst/>
@@ -23410,14 +24294,14 @@
                 </a:solidFill>
                 <a:latin typeface="Calibri"/>
               </a:rPr>
-              <a:t>100 seats, real cap. No fake timer.</a:t>
-            </a:r>
-          </a:p>
-        </p:txBody>
-      </p:sp>
-      <p:sp>
-        <p:nvSpPr>
-          <p:cNvPr id="32" name="TextBox 31"/>
+              <a:t>One blue button. No sidebar links. No countdown.</a:t>
+            </a:r>
+          </a:p>
+        </p:txBody>
+      </p:sp>
+      <p:sp>
+        <p:nvSpPr>
+          <p:cNvPr id="34" name="TextBox 33"/>
           <p:cNvSpPr txBox="1"/>
           <p:nvPr/>
         </p:nvSpPr>
@@ -23449,21 +24333,21 @@
                 </a:solidFill>
                 <a:latin typeface="Calibri"/>
               </a:rPr>
-              <a:t>Audience cut</a:t>
-            </a:r>
-          </a:p>
-        </p:txBody>
-      </p:sp>
-      <p:sp>
-        <p:nvSpPr>
-          <p:cNvPr id="33" name="TextBox 32"/>
+              <a:t>Real scarcity</a:t>
+            </a:r>
+          </a:p>
+        </p:txBody>
+      </p:sp>
+      <p:sp>
+        <p:nvSpPr>
+          <p:cNvPr id="35" name="TextBox 34"/>
           <p:cNvSpPr txBox="1"/>
           <p:nvPr/>
         </p:nvSpPr>
         <p:spPr>
           <a:xfrm>
             <a:off x="8641080" y="4974335"/>
-            <a:ext cx="2971800" cy="411480"/>
+            <a:ext cx="2971800" cy="457200"/>
           </a:xfrm>
           <a:prstGeom prst="rect">
             <a:avLst/>
@@ -23488,14 +24372,14 @@
                 </a:solidFill>
                 <a:latin typeface="Calibri"/>
               </a:rPr>
-              <a:t>Only learners with one semester done.</a:t>
-            </a:r>
-          </a:p>
-        </p:txBody>
-      </p:sp>
-      <p:sp>
-        <p:nvSpPr>
-          <p:cNvPr id="34" name="TextBox 33"/>
+              <a:t>100 seats. 2,50,000 learners. The math is honest.</a:t>
+            </a:r>
+          </a:p>
+        </p:txBody>
+      </p:sp>
+      <p:sp>
+        <p:nvSpPr>
+          <p:cNvPr id="36" name="TextBox 35"/>
           <p:cNvSpPr txBox="1"/>
           <p:nvPr/>
         </p:nvSpPr>
@@ -23534,14 +24418,14 @@
       </p:sp>
       <p:sp>
         <p:nvSpPr>
-          <p:cNvPr id="35" name="TextBox 34"/>
+          <p:cNvPr id="37" name="TextBox 36"/>
           <p:cNvSpPr txBox="1"/>
           <p:nvPr/>
         </p:nvSpPr>
         <p:spPr>
           <a:xfrm>
             <a:off x="8641080" y="5687567"/>
-            <a:ext cx="2971800" cy="411480"/>
+            <a:ext cx="2971800" cy="457200"/>
           </a:xfrm>
           <a:prstGeom prst="rect">
             <a:avLst/>
@@ -23566,7 +24450,7 @@
                 </a:solidFill>
                 <a:latin typeface="Calibri"/>
               </a:rPr>
-              <a:t>Tuesday, 10:30 AM IST. We'll A/B test.</a:t>
+              <a:t>Tuesday, 10:30 AM IST. We'll A B test subject lines.</a:t>
             </a:r>
           </a:p>
         </p:txBody>
@@ -24088,7 +24972,7 @@
               </a:lnSpc>
             </a:pPr>
             <a:r>
-              <a:rPr sz="1050" b="0" i="0">
+              <a:rPr sz="1030" b="0" i="0">
                 <a:solidFill>
                   <a:srgbClr val="1E1B4B"/>
                 </a:solidFill>
@@ -24104,7 +24988,7 @@
               </a:lnSpc>
             </a:pPr>
             <a:r>
-              <a:rPr sz="1050" b="0" i="0">
+              <a:rPr sz="1030" b="0" i="0">
                 <a:solidFill>
                   <a:srgbClr val="1E1B4B"/>
                 </a:solidFill>
@@ -24120,7 +25004,7 @@
               </a:lnSpc>
             </a:pPr>
             <a:r>
-              <a:rPr sz="1050" b="0" i="0">
+              <a:rPr sz="1030" b="0" i="0">
                 <a:solidFill>
                   <a:srgbClr val="1E1B4B"/>
                 </a:solidFill>
@@ -24136,7 +25020,7 @@
               </a:lnSpc>
             </a:pPr>
             <a:r>
-              <a:rPr sz="1050" b="0" i="0">
+              <a:rPr sz="1030" b="0" i="0">
                 <a:solidFill>
                   <a:srgbClr val="1E1B4B"/>
                 </a:solidFill>
@@ -24152,7 +25036,7 @@
               </a:lnSpc>
             </a:pPr>
             <a:r>
-              <a:rPr sz="1050" b="0" i="0">
+              <a:rPr sz="1030" b="0" i="0">
                 <a:solidFill>
                   <a:srgbClr val="1E1B4B"/>
                 </a:solidFill>
@@ -24168,7 +25052,7 @@
               </a:lnSpc>
             </a:pPr>
             <a:r>
-              <a:rPr sz="1050" b="0" i="0">
+              <a:rPr sz="1030" b="0" i="0">
                 <a:solidFill>
                   <a:srgbClr val="1E1B4B"/>
                 </a:solidFill>
@@ -24184,13 +25068,13 @@
               </a:lnSpc>
             </a:pPr>
             <a:r>
-              <a:rPr sz="1050" b="0" i="0">
+              <a:rPr sz="1030" b="0" i="0">
                 <a:solidFill>
                   <a:srgbClr val="1E1B4B"/>
                 </a:solidFill>
                 <a:latin typeface="Calibri"/>
               </a:rPr>
-              <a:t>We launched Amity Online to make a high quality degree fit real lives. It does. But I went home and asked my team why our answer to that question is still 'only during exams.'</a:t>
+              <a:t>We launched Amity Online to make a high quality degree fit real lives. It does. But I went home and asked my team why our answer to that question is still 'only during exams'.</a:t>
             </a:r>
           </a:p>
           <a:p>
@@ -24200,7 +25084,7 @@
               </a:lnSpc>
             </a:pPr>
             <a:r>
-              <a:rPr sz="1050" b="0" i="0">
+              <a:rPr sz="1030" b="0" i="0">
                 <a:solidFill>
                   <a:srgbClr val="1E1B4B"/>
                 </a:solidFill>
@@ -24216,13 +25100,13 @@
               </a:lnSpc>
             </a:pPr>
             <a:r>
-              <a:rPr sz="1050" b="0" i="0">
+              <a:rPr sz="1030" b="0" i="0">
                 <a:solidFill>
                   <a:srgbClr val="1E1B4B"/>
                 </a:solidFill>
                 <a:latin typeface="Calibri"/>
               </a:rPr>
-              <a:t>From this year, the answer becomes 'yes' for every learner who wants it.</a:t>
+              <a:t>So we are doing something we have never done before.</a:t>
             </a:r>
           </a:p>
           <a:p>
@@ -24232,7 +25116,7 @@
               </a:lnSpc>
             </a:pPr>
             <a:r>
-              <a:rPr sz="1050" b="0" i="0">
+              <a:rPr sz="1030" b="0" i="0">
                 <a:solidFill>
                   <a:srgbClr val="1E1B4B"/>
                 </a:solidFill>
@@ -24248,13 +25132,13 @@
               </a:lnSpc>
             </a:pPr>
             <a:r>
-              <a:rPr sz="1050" b="0" i="0">
+              <a:rPr sz="1030" b="0" i="0">
                 <a:solidFill>
                   <a:srgbClr val="1E1B4B"/>
                 </a:solidFill>
                 <a:latin typeface="Calibri"/>
               </a:rPr>
-              <a:t>We are calling it Amity Ignite. We start small. One day at Noida.</a:t>
+              <a:t>We are throwing a concert.</a:t>
             </a:r>
           </a:p>
           <a:p>
@@ -24264,7 +25148,7 @@
               </a:lnSpc>
             </a:pPr>
             <a:r>
-              <a:rPr sz="1050" b="0" i="0">
+              <a:rPr sz="1030" b="0" i="0">
                 <a:solidFill>
                   <a:srgbClr val="1E1B4B"/>
                 </a:solidFill>
@@ -24280,13 +25164,13 @@
               </a:lnSpc>
             </a:pPr>
             <a:r>
-              <a:rPr sz="1050" b="0" i="0">
+              <a:rPr sz="1030" b="0" i="0">
                 <a:solidFill>
                   <a:srgbClr val="1E1B4B"/>
                 </a:solidFill>
                 <a:latin typeface="Calibri"/>
               </a:rPr>
-              <a:t>Online learning gave us reach. Ignite is how we add memory.</a:t>
+              <a:t>On 28 September our first cohort of online learners will walk the Noida campus with their families. They will stand on our convocation stage. They will watch one of India's best comedians perform. Five of them will open the show.</a:t>
             </a:r>
           </a:p>
           <a:p>
@@ -24296,7 +25180,7 @@
               </a:lnSpc>
             </a:pPr>
             <a:r>
-              <a:rPr sz="1050" b="0" i="0">
+              <a:rPr sz="1030" b="0" i="0">
                 <a:solidFill>
                   <a:srgbClr val="1E1B4B"/>
                 </a:solidFill>
@@ -24312,12 +25196,44 @@
               </a:lnSpc>
             </a:pPr>
             <a:r>
-              <a:rPr sz="1050" b="0" i="0">
+              <a:rPr sz="1030" b="0" i="0">
                 <a:solidFill>
                   <a:srgbClr val="1E1B4B"/>
                 </a:solidFill>
                 <a:latin typeface="Calibri"/>
               </a:rPr>
+              <a:t>Online gave us reach. This is how we add memory.</a:t>
+            </a:r>
+          </a:p>
+          <a:p>
+            <a:pPr algn="l">
+              <a:lnSpc>
+                <a:spcPct val="145000"/>
+              </a:lnSpc>
+            </a:pPr>
+            <a:r>
+              <a:rPr sz="1030" b="0" i="0">
+                <a:solidFill>
+                  <a:srgbClr val="1E1B4B"/>
+                </a:solidFill>
+                <a:latin typeface="Calibri"/>
+              </a:rPr>
+              <a:t/>
+            </a:r>
+          </a:p>
+          <a:p>
+            <a:pPr algn="l">
+              <a:lnSpc>
+                <a:spcPct val="145000"/>
+              </a:lnSpc>
+            </a:pPr>
+            <a:r>
+              <a:rPr sz="1030" b="0" i="0">
+                <a:solidFill>
+                  <a:srgbClr val="1E1B4B"/>
+                </a:solidFill>
+                <a:latin typeface="Calibri"/>
+              </a:rPr>
               <a:t>If you're an Amity Online learner, your invite is in your inbox.</a:t>
             </a:r>
           </a:p>
@@ -24328,7 +25244,7 @@
               </a:lnSpc>
             </a:pPr>
             <a:r>
-              <a:rPr sz="1050" b="0" i="0">
+              <a:rPr sz="1030" b="0" i="0">
                 <a:solidFill>
                   <a:srgbClr val="1E1B4B"/>
                 </a:solidFill>
@@ -24344,7 +25260,7 @@
               </a:lnSpc>
             </a:pPr>
             <a:r>
-              <a:rPr sz="1050" b="0" i="0">
+              <a:rPr sz="1030" b="0" i="0">
                 <a:solidFill>
                   <a:srgbClr val="1E1B4B"/>
                 </a:solidFill>
@@ -24559,7 +25475,7 @@
                 </a:solidFill>
                 <a:latin typeface="Calibri"/>
               </a:rPr>
-              <a:t>Story, not announcement</a:t>
+              <a:t>The surprise sentence</a:t>
             </a:r>
           </a:p>
         </p:txBody>
@@ -24598,7 +25514,7 @@
                 </a:solidFill>
                 <a:latin typeface="Calibri"/>
               </a:rPr>
-              <a:t>One specific learner. One city. The launch hides in para 5.</a:t>
+              <a:t>'We are throwing a concert.' Hard to scroll past.</a:t>
             </a:r>
           </a:p>
         </p:txBody>
@@ -24637,7 +25553,7 @@
                 </a:solidFill>
                 <a:latin typeface="Calibri"/>
               </a:rPr>
-              <a:t>A leader admits a gap</a:t>
+              <a:t>A leader admits the gap</a:t>
             </a:r>
           </a:p>
         </p:txBody>
@@ -24676,7 +25592,7 @@
                 </a:solidFill>
                 <a:latin typeface="Calibri"/>
               </a:rPr>
-              <a:t>I went home and asked my team. People share honest leadership.</a:t>
+              <a:t>I went home and asked my team. Honest leadership shares.</a:t>
             </a:r>
           </a:p>
         </p:txBody>
@@ -24715,7 +25631,7 @@
                 </a:solidFill>
                 <a:latin typeface="Calibri"/>
               </a:rPr>
-              <a:t>One quotable line</a:t>
+              <a:t>Story, not announcement</a:t>
             </a:r>
           </a:p>
         </p:txBody>
@@ -24754,7 +25670,7 @@
                 </a:solidFill>
                 <a:latin typeface="Calibri"/>
               </a:rPr>
-              <a:t>'Online gave us reach. Ignite gives us memory.' Made for sharing.</a:t>
+              <a:t>One specific learner. One city. The launch hides in para 5.</a:t>
             </a:r>
           </a:p>
         </p:txBody>
@@ -24793,7 +25709,7 @@
                 </a:solidFill>
                 <a:latin typeface="Calibri"/>
               </a:rPr>
-              <a:t>Earned beats paid</a:t>
+              <a:t>Earned, not paid</a:t>
             </a:r>
           </a:p>
         </p:txBody>
@@ -24832,7 +25748,7 @@
                 </a:solidFill>
                 <a:latin typeface="Calibri"/>
               </a:rPr>
-              <a:t>A few hundred employees + alumni each share = bigger than paid.</a:t>
+              <a:t>Few hundred employees and alumni share. Bigger than paid.</a:t>
             </a:r>
           </a:p>
         </p:txBody>
@@ -24910,7 +25826,7 @@
                 </a:solidFill>
                 <a:latin typeface="Calibri"/>
               </a:rPr>
-              <a:t>Hashtags below the fold. Line breaks. No external link.</a:t>
+              <a:t>Hashtags below the fold. No external link. Line breaks.</a:t>
             </a:r>
           </a:p>
         </p:txBody>
@@ -25191,7 +26107,7 @@
                 </a:solidFill>
                 <a:latin typeface="Calibri"/>
               </a:rPr>
-              <a:t>Saddle stitched. Around Rs 35 per copy at a 5,000 print run. Distributed digitally as a PDF. Physical copies only at on campus events.</a:t>
+              <a:t>Saddle stitched. Around Rs 35 per copy at a 5,000 print run. Distributed digitally as a PDF. Physical copies only on the day.</a:t>
             </a:r>
           </a:p>
         </p:txBody>
@@ -25814,7 +26730,7 @@
                 </a:solidFill>
                 <a:latin typeface="Calibri"/>
               </a:rPr>
-              <a:t>03-04  WHY</a:t>
+              <a:t>03-04  THE NIGHT</a:t>
             </a:r>
           </a:p>
         </p:txBody>
@@ -25897,7 +26813,7 @@
                 </a:solidFill>
                 <a:latin typeface="Calibri"/>
               </a:rPr>
-              <a:t>Why Ignite exists.</a:t>
+              <a:t>Headliner reveal.</a:t>
             </a:r>
           </a:p>
           <a:p>
@@ -25913,7 +26829,7 @@
                 </a:solidFill>
                 <a:latin typeface="Calibri"/>
               </a:rPr>
-              <a:t>Three real learner stories.</a:t>
+              <a:t>Open mic learners.</a:t>
             </a:r>
           </a:p>
           <a:p>
@@ -25929,7 +26845,7 @@
                 </a:solidFill>
                 <a:latin typeface="Calibri"/>
               </a:rPr>
-              <a:t>Full bleed photos.</a:t>
+              <a:t>Family on the stage.</a:t>
             </a:r>
           </a:p>
         </p:txBody>
@@ -26159,7 +27075,7 @@
                 </a:solidFill>
                 <a:latin typeface="Calibri"/>
               </a:rPr>
-              <a:t>Morning, afternoon, evening.</a:t>
+              <a:t>Day. Dusk. Night. After.</a:t>
             </a:r>
           </a:p>
           <a:p>
@@ -26405,7 +27321,7 @@
                 </a:solidFill>
                 <a:latin typeface="Calibri"/>
               </a:rPr>
-              <a:t>QAA. WES.</a:t>
+              <a:t>QAA. WES. AICTE.</a:t>
             </a:r>
           </a:p>
           <a:p>
@@ -26881,7 +27797,7 @@
                 </a:solidFill>
                 <a:latin typeface="Calibri"/>
               </a:rPr>
-              <a:t>Six questions prospects ask.</a:t>
+              <a:t>Six real questions.</a:t>
             </a:r>
           </a:p>
           <a:p>
@@ -26897,7 +27813,7 @@
                 </a:solidFill>
                 <a:latin typeface="Calibri"/>
               </a:rPr>
-              <a:t>Will my employer recognise this?</a:t>
+              <a:t>What about my family?</a:t>
             </a:r>
           </a:p>
           <a:p>
@@ -26913,7 +27829,7 @@
                 </a:solidFill>
                 <a:latin typeface="Calibri"/>
               </a:rPr>
-              <a:t>Answered head on.</a:t>
+              <a:t>Is the night included?</a:t>
             </a:r>
           </a:p>
         </p:txBody>
@@ -27143,7 +28059,7 @@
                 </a:solidFill>
                 <a:latin typeface="Calibri"/>
               </a:rPr>
-              <a:t>'One day. The rest of</a:t>
+              <a:t>'One night. The rest of</a:t>
             </a:r>
           </a:p>
           <a:p>

--- a/Amity_Online_Marketing_Manager_Assignment_Paras_Jain_Bloom.pptx
+++ b/Amity_Online_Marketing_Manager_Assignment_Paras_Jain_Bloom.pptx
@@ -24,6 +24,7 @@
     <p:sldId id="272" r:id="rId23"/>
     <p:sldId id="273" r:id="rId24"/>
     <p:sldId id="274" r:id="rId25"/>
+    <p:sldId id="275" r:id="rId26"/>
   </p:sldIdLst>
   <p:sldSz cx="12191695" cy="6858000" type="screen4x3"/>
   <p:notesSz cx="6858000" cy="9144000"/>
@@ -3759,7 +3760,7 @@
                 </a:solidFill>
                 <a:latin typeface="Calibri"/>
               </a:rPr>
-              <a:t>1 / 19</a:t>
+              <a:t>1 / 20</a:t>
             </a:r>
           </a:p>
         </p:txBody>
@@ -4001,7 +4002,7 @@
                 </a:solidFill>
                 <a:latin typeface="Calibri"/>
               </a:rPr>
-              <a:t>10 / 19</a:t>
+              <a:t>10 / 20</a:t>
             </a:r>
           </a:p>
         </p:txBody>
@@ -6135,7 +6136,7 @@
                 </a:solidFill>
                 <a:latin typeface="Calibri"/>
               </a:rPr>
-              <a:t>11 / 19</a:t>
+              <a:t>11 / 20</a:t>
             </a:r>
           </a:p>
         </p:txBody>
@@ -8631,7 +8632,7 @@
                 </a:solidFill>
                 <a:latin typeface="Calibri"/>
               </a:rPr>
-              <a:t>12 / 19</a:t>
+              <a:t>12 / 20</a:t>
             </a:r>
           </a:p>
         </p:txBody>
@@ -10123,7 +10124,7 @@
                 </a:solidFill>
                 <a:latin typeface="Calibri"/>
               </a:rPr>
-              <a:t>13 / 19</a:t>
+              <a:t>13 / 20</a:t>
             </a:r>
           </a:p>
         </p:txBody>
@@ -10263,7 +10264,7 @@
                 </a:solidFill>
                 <a:latin typeface="Calibri"/>
               </a:rPr>
-              <a:t>One in three learners drift in the first 30 days.</a:t>
+              <a:t>1 in 4 of our online MBA learners do not pass on schedule.</a:t>
             </a:r>
           </a:p>
         </p:txBody>
@@ -10365,7 +10366,7 @@
                 </a:solidFill>
                 <a:latin typeface="Calibri"/>
               </a:rPr>
-              <a:t>14 / 19</a:t>
+              <a:t>14 / 20</a:t>
             </a:r>
           </a:p>
         </p:txBody>
@@ -10424,7 +10425,7 @@
         </p:nvSpPr>
         <p:spPr>
           <a:xfrm>
-            <a:off x="457200" y="1691640"/>
+            <a:off x="457200" y="1737360"/>
             <a:ext cx="4572000" cy="365760"/>
           </a:xfrm>
           <a:prstGeom prst="rect">
@@ -10450,7 +10451,7 @@
                 </a:solidFill>
                 <a:latin typeface="Calibri"/>
               </a:rPr>
-              <a:t>ILLUSTRATIVE. PROXY OF INDUSTRY DATA.</a:t>
+              <a:t>AMITY ONLINE MBA   |   2023 to 2024</a:t>
             </a:r>
           </a:p>
         </p:txBody>
@@ -10463,7 +10464,7 @@
         </p:nvSpPr>
         <p:spPr>
           <a:xfrm>
-            <a:off x="457200" y="2286000"/>
+            <a:off x="457200" y="2240280"/>
             <a:ext cx="4572000" cy="1828800"/>
           </a:xfrm>
           <a:prstGeom prst="rect">
@@ -10483,13 +10484,13 @@
               </a:lnSpc>
             </a:pPr>
             <a:r>
-              <a:rPr sz="12000" b="1" i="0">
+              <a:rPr sz="9800" b="1" i="0">
                 <a:solidFill>
                   <a:srgbClr val="14B8A6"/>
                 </a:solidFill>
                 <a:latin typeface="Calibri"/>
               </a:rPr>
-              <a:t>1 in 3</a:t>
+              <a:t>5,300</a:t>
             </a:r>
           </a:p>
         </p:txBody>
@@ -10502,7 +10503,7 @@
         </p:nvSpPr>
         <p:spPr>
           <a:xfrm>
-            <a:off x="457200" y="4114800"/>
+            <a:off x="457200" y="4023360"/>
             <a:ext cx="4572000" cy="457200"/>
           </a:xfrm>
           <a:prstGeom prst="rect">
@@ -10522,13 +10523,13 @@
               </a:lnSpc>
             </a:pPr>
             <a:r>
-              <a:rPr sz="1800" b="0" i="1">
+              <a:rPr sz="1500" b="0" i="1">
                 <a:solidFill>
                   <a:srgbClr val="FFFFFF"/>
                 </a:solidFill>
                 <a:latin typeface="Calibri"/>
               </a:rPr>
-              <a:t>drift in the first 30 days.</a:t>
+              <a:t>learners did not pass on schedule.</a:t>
             </a:r>
           </a:p>
         </p:txBody>
@@ -10541,8 +10542,8 @@
         </p:nvSpPr>
         <p:spPr>
           <a:xfrm>
-            <a:off x="640080" y="4937760"/>
-            <a:ext cx="4206240" cy="1371600"/>
+            <a:off x="640080" y="4709160"/>
+            <a:ext cx="4206240" cy="1463040"/>
           </a:xfrm>
           <a:prstGeom prst="rect">
             <a:avLst/>
@@ -10561,13 +10562,13 @@
               </a:lnSpc>
             </a:pPr>
             <a:r>
-              <a:rPr sz="1150" b="0" i="1">
+              <a:rPr sz="1050" b="0" i="1">
                 <a:solidFill>
                   <a:srgbClr val="C4B5FD"/>
                 </a:solidFill>
                 <a:latin typeface="Calibri"/>
               </a:rPr>
-              <a:t>Most don't drop loudly.</a:t>
+              <a:t>22,831 enrolled. 77% passed.</a:t>
             </a:r>
           </a:p>
           <a:p>
@@ -10577,13 +10578,13 @@
               </a:lnSpc>
             </a:pPr>
             <a:r>
-              <a:rPr sz="1150" b="0" i="1">
+              <a:rPr sz="1050" b="0" i="1">
                 <a:solidFill>
                   <a:srgbClr val="C4B5FD"/>
                 </a:solidFill>
                 <a:latin typeface="Calibri"/>
               </a:rPr>
-              <a:t>They just stop logging in.</a:t>
+              <a:t>1,051 placed. The rest delayed or lost.</a:t>
             </a:r>
           </a:p>
           <a:p>
@@ -10593,13 +10594,13 @@
               </a:lnSpc>
             </a:pPr>
             <a:r>
-              <a:rPr sz="1150" b="0" i="1">
+              <a:rPr sz="1050" b="0" i="1">
                 <a:solidFill>
                   <a:srgbClr val="C4B5FD"/>
                 </a:solidFill>
                 <a:latin typeface="Calibri"/>
               </a:rPr>
-              <a:t>Each ghost = wasted CAC + lost referral + lost story.</a:t>
+              <a:t>Each ghost is wasted CAC + lost referral + lost story.</a:t>
             </a:r>
           </a:p>
         </p:txBody>
@@ -10607,6 +10608,45 @@
       <p:sp>
         <p:nvSpPr>
           <p:cNvPr id="13" name="TextBox 12"/>
+          <p:cNvSpPr txBox="1"/>
+          <p:nvPr/>
+        </p:nvSpPr>
+        <p:spPr>
+          <a:xfrm>
+            <a:off x="457200" y="6263640"/>
+            <a:ext cx="4572000" cy="274320"/>
+          </a:xfrm>
+          <a:prstGeom prst="rect">
+            <a:avLst/>
+          </a:prstGeom>
+          <a:noFill/>
+        </p:spPr>
+        <p:txBody>
+          <a:bodyPr wrap="square" lIns="45720" rIns="45720" tIns="18288" bIns="18288" anchor="t">
+            <a:spAutoFit/>
+          </a:bodyPr>
+          <a:lstStyle/>
+          <a:p>
+            <a:pPr algn="ctr">
+              <a:lnSpc>
+                <a:spcPct val="125000"/>
+              </a:lnSpc>
+            </a:pPr>
+            <a:r>
+              <a:rPr sz="800" b="0" i="1">
+                <a:solidFill>
+                  <a:srgbClr val="C4B5FD"/>
+                </a:solidFill>
+                <a:latin typeface="Calibri"/>
+              </a:rPr>
+              <a:t>Source: Careers360 (AISHE tracked, 2023 to 2024).</a:t>
+            </a:r>
+          </a:p>
+        </p:txBody>
+      </p:sp>
+      <p:sp>
+        <p:nvSpPr>
+          <p:cNvPr id="14" name="TextBox 13"/>
           <p:cNvSpPr txBox="1"/>
           <p:nvPr/>
         </p:nvSpPr>
@@ -10645,7 +10685,7 @@
       </p:sp>
       <p:sp>
         <p:nvSpPr>
-          <p:cNvPr id="14" name="TextBox 13"/>
+          <p:cNvPr id="15" name="TextBox 14"/>
           <p:cNvSpPr txBox="1"/>
           <p:nvPr/>
         </p:nvSpPr>
@@ -10700,7 +10740,7 @@
       </p:sp>
       <p:sp>
         <p:nvSpPr>
-          <p:cNvPr id="15" name="TextBox 14"/>
+          <p:cNvPr id="16" name="TextBox 15"/>
           <p:cNvSpPr txBox="1"/>
           <p:nvPr/>
         </p:nvSpPr>
@@ -10739,7 +10779,7 @@
       </p:sp>
       <p:sp>
         <p:nvSpPr>
-          <p:cNvPr id="16" name="TextBox 15"/>
+          <p:cNvPr id="17" name="TextBox 16"/>
           <p:cNvSpPr txBox="1"/>
           <p:nvPr/>
         </p:nvSpPr>
@@ -10783,7 +10823,7 @@
                 </a:solidFill>
                 <a:latin typeface="Calibri"/>
               </a:rPr>
-              <a:t>Day 14 feels alive, not lonely.</a:t>
+              <a:t>Pass rate moves from 77% toward 85%.</a:t>
             </a:r>
           </a:p>
           <a:p>
@@ -10811,7 +10851,7 @@
                 </a:solidFill>
                 <a:latin typeface="Calibri"/>
               </a:rPr>
-              <a:t>Engagement curve flattens, not falls.</a:t>
+              <a:t>Day 14 feels alive, not lonely.</a:t>
             </a:r>
           </a:p>
           <a:p>
@@ -11007,7 +11047,7 @@
                 </a:solidFill>
                 <a:latin typeface="Calibri"/>
               </a:rPr>
-              <a:t>Why engagement is a profit and loss question, not a marketing one.</a:t>
+              <a:t>The format problem. Self paced loses. Cohort wins.</a:t>
             </a:r>
           </a:p>
         </p:txBody>
@@ -11109,7 +11149,7 @@
                 </a:solidFill>
                 <a:latin typeface="Calibri"/>
               </a:rPr>
-              <a:t>15 / 19</a:t>
+              <a:t>15 / 20</a:t>
             </a:r>
           </a:p>
         </p:txBody>
@@ -11138,17 +11178,17 @@
           <a:p>
             <a:pPr algn="l">
               <a:lnSpc>
-                <a:spcPct val="125000"/>
-              </a:lnSpc>
-            </a:pPr>
-            <a:r>
-              <a:rPr sz="1050" b="0" i="1">
+                <a:spcPct val="135000"/>
+              </a:lnSpc>
+            </a:pPr>
+            <a:r>
+              <a:rPr sz="1100" b="0" i="1">
                 <a:solidFill>
                   <a:srgbClr val="52597A"/>
                 </a:solidFill>
                 <a:latin typeface="Calibri"/>
               </a:rPr>
-              <a:t>Indicative model. Numbers to be validated quarter by quarter.</a:t>
+              <a:t>Industry data, not internal model. Cohort + ritual closes 20 to 30 percentage points of the completion gap.</a:t>
             </a:r>
           </a:p>
         </p:txBody>
@@ -11162,7 +11202,7 @@
         <p:spPr>
           <a:xfrm>
             <a:off x="457200" y="1920240"/>
-            <a:ext cx="6858000" cy="4572000"/>
+            <a:ext cx="6858000" cy="4434840"/>
           </a:xfrm>
           <a:prstGeom prst="roundRect">
             <a:avLst>
@@ -11235,7 +11275,7 @@
                 </a:solidFill>
                 <a:latin typeface="Calibri"/>
               </a:rPr>
-              <a:t>COMPLETION RATE BY ENGAGEMENT TIER</a:t>
+              <a:t>ONLINE MBA COMPLETION RATE BY FORMAT</a:t>
             </a:r>
           </a:p>
         </p:txBody>
@@ -11274,7 +11314,7 @@
                 </a:solidFill>
                 <a:latin typeface="Calibri"/>
               </a:rPr>
-              <a:t>Internal cohort modelling. Proof of concept only.</a:t>
+              <a:t>Indian self paced industry. Amity 2023 to 24. Top global cohort programmes.</a:t>
             </a:r>
           </a:p>
         </p:txBody>
@@ -11287,8 +11327,8 @@
         </p:nvSpPr>
         <p:spPr>
           <a:xfrm>
-            <a:off x="1097280" y="4484218"/>
-            <a:ext cx="1097280" cy="1459382"/>
+            <a:off x="1097280" y="3833165"/>
+            <a:ext cx="1097280" cy="1927555"/>
           </a:xfrm>
           <a:prstGeom prst="rect">
             <a:avLst/>
@@ -11331,7 +11371,62 @@
         </p:nvSpPr>
         <p:spPr>
           <a:xfrm>
-            <a:off x="1097280" y="6016752"/>
+            <a:off x="1097280" y="5806440"/>
+            <a:ext cx="1097280" cy="502920"/>
+          </a:xfrm>
+          <a:prstGeom prst="rect">
+            <a:avLst/>
+          </a:prstGeom>
+          <a:noFill/>
+        </p:spPr>
+        <p:txBody>
+          <a:bodyPr wrap="square" lIns="45720" rIns="45720" tIns="18288" bIns="18288" anchor="t">
+            <a:spAutoFit/>
+          </a:bodyPr>
+          <a:lstStyle/>
+          <a:p>
+            <a:pPr algn="ctr">
+              <a:lnSpc>
+                <a:spcPct val="115000"/>
+              </a:lnSpc>
+            </a:pPr>
+            <a:r>
+              <a:rPr sz="900" b="1" i="0">
+                <a:solidFill>
+                  <a:srgbClr val="1E1B4B"/>
+                </a:solidFill>
+                <a:latin typeface="Calibri"/>
+              </a:rPr>
+              <a:t>Self paced</a:t>
+            </a:r>
+          </a:p>
+          <a:p>
+            <a:pPr algn="ctr">
+              <a:lnSpc>
+                <a:spcPct val="115000"/>
+              </a:lnSpc>
+            </a:pPr>
+            <a:r>
+              <a:rPr sz="900" b="1" i="0">
+                <a:solidFill>
+                  <a:srgbClr val="1E1B4B"/>
+                </a:solidFill>
+                <a:latin typeface="Calibri"/>
+              </a:rPr>
+              <a:t>(India avg)</a:t>
+            </a:r>
+          </a:p>
+        </p:txBody>
+      </p:sp>
+      <p:sp>
+        <p:nvSpPr>
+          <p:cNvPr id="14" name="TextBox 13"/>
+          <p:cNvSpPr txBox="1"/>
+          <p:nvPr/>
+        </p:nvSpPr>
+        <p:spPr>
+          <a:xfrm>
+            <a:off x="1097280" y="3467405"/>
             <a:ext cx="1097280" cy="274320"/>
           </a:xfrm>
           <a:prstGeom prst="rect">
@@ -11347,56 +11442,17 @@
           <a:p>
             <a:pPr algn="ctr">
               <a:lnSpc>
-                <a:spcPct val="125000"/>
-              </a:lnSpc>
-            </a:pPr>
-            <a:r>
-              <a:rPr sz="1000" b="1" i="0">
+                <a:spcPct val="100000"/>
+              </a:lnSpc>
+            </a:pPr>
+            <a:r>
+              <a:rPr sz="1600" b="1" i="0">
                 <a:solidFill>
                   <a:srgbClr val="1E1B4B"/>
                 </a:solidFill>
                 <a:latin typeface="Calibri"/>
               </a:rPr>
-              <a:t>Low</a:t>
-            </a:r>
-          </a:p>
-        </p:txBody>
-      </p:sp>
-      <p:sp>
-        <p:nvSpPr>
-          <p:cNvPr id="14" name="TextBox 13"/>
-          <p:cNvSpPr txBox="1"/>
-          <p:nvPr/>
-        </p:nvSpPr>
-        <p:spPr>
-          <a:xfrm>
-            <a:off x="1097280" y="4118458"/>
-            <a:ext cx="1097280" cy="274320"/>
-          </a:xfrm>
-          <a:prstGeom prst="rect">
-            <a:avLst/>
-          </a:prstGeom>
-          <a:noFill/>
-        </p:spPr>
-        <p:txBody>
-          <a:bodyPr wrap="square" lIns="45720" rIns="45720" tIns="18288" bIns="18288" anchor="t">
-            <a:spAutoFit/>
-          </a:bodyPr>
-          <a:lstStyle/>
-          <a:p>
-            <a:pPr algn="ctr">
-              <a:lnSpc>
-                <a:spcPct val="100000"/>
-              </a:lnSpc>
-            </a:pPr>
-            <a:r>
-              <a:rPr sz="1600" b="1" i="0">
-                <a:solidFill>
-                  <a:srgbClr val="1E1B4B"/>
-                </a:solidFill>
-                <a:latin typeface="Calibri"/>
-              </a:rPr>
-              <a:t>42%</a:t>
+              <a:t>62%</a:t>
             </a:r>
           </a:p>
         </p:txBody>
@@ -11409,8 +11465,8 @@
         </p:nvSpPr>
         <p:spPr>
           <a:xfrm>
-            <a:off x="2468880" y="3824021"/>
-            <a:ext cx="1097280" cy="2119579"/>
+            <a:off x="2468880" y="3366821"/>
+            <a:ext cx="1097280" cy="2393899"/>
           </a:xfrm>
           <a:prstGeom prst="rect">
             <a:avLst/>
@@ -11453,7 +11509,62 @@
         </p:nvSpPr>
         <p:spPr>
           <a:xfrm>
-            <a:off x="2468880" y="6016752"/>
+            <a:off x="2468880" y="5806440"/>
+            <a:ext cx="1097280" cy="502920"/>
+          </a:xfrm>
+          <a:prstGeom prst="rect">
+            <a:avLst/>
+          </a:prstGeom>
+          <a:noFill/>
+        </p:spPr>
+        <p:txBody>
+          <a:bodyPr wrap="square" lIns="45720" rIns="45720" tIns="18288" bIns="18288" anchor="t">
+            <a:spAutoFit/>
+          </a:bodyPr>
+          <a:lstStyle/>
+          <a:p>
+            <a:pPr algn="ctr">
+              <a:lnSpc>
+                <a:spcPct val="115000"/>
+              </a:lnSpc>
+            </a:pPr>
+            <a:r>
+              <a:rPr sz="900" b="1" i="0">
+                <a:solidFill>
+                  <a:srgbClr val="1E1B4B"/>
+                </a:solidFill>
+                <a:latin typeface="Calibri"/>
+              </a:rPr>
+              <a:t>Amity Online</a:t>
+            </a:r>
+          </a:p>
+          <a:p>
+            <a:pPr algn="ctr">
+              <a:lnSpc>
+                <a:spcPct val="115000"/>
+              </a:lnSpc>
+            </a:pPr>
+            <a:r>
+              <a:rPr sz="900" b="1" i="0">
+                <a:solidFill>
+                  <a:srgbClr val="1E1B4B"/>
+                </a:solidFill>
+                <a:latin typeface="Calibri"/>
+              </a:rPr>
+              <a:t>MBA 23-24</a:t>
+            </a:r>
+          </a:p>
+        </p:txBody>
+      </p:sp>
+      <p:sp>
+        <p:nvSpPr>
+          <p:cNvPr id="17" name="TextBox 16"/>
+          <p:cNvSpPr txBox="1"/>
+          <p:nvPr/>
+        </p:nvSpPr>
+        <p:spPr>
+          <a:xfrm>
+            <a:off x="2468880" y="3001061"/>
             <a:ext cx="1097280" cy="274320"/>
           </a:xfrm>
           <a:prstGeom prst="rect">
@@ -11469,56 +11580,17 @@
           <a:p>
             <a:pPr algn="ctr">
               <a:lnSpc>
-                <a:spcPct val="125000"/>
-              </a:lnSpc>
-            </a:pPr>
-            <a:r>
-              <a:rPr sz="1000" b="1" i="0">
+                <a:spcPct val="100000"/>
+              </a:lnSpc>
+            </a:pPr>
+            <a:r>
+              <a:rPr sz="1600" b="1" i="0">
                 <a:solidFill>
                   <a:srgbClr val="1E1B4B"/>
                 </a:solidFill>
                 <a:latin typeface="Calibri"/>
               </a:rPr>
-              <a:t>Medium</a:t>
-            </a:r>
-          </a:p>
-        </p:txBody>
-      </p:sp>
-      <p:sp>
-        <p:nvSpPr>
-          <p:cNvPr id="17" name="TextBox 16"/>
-          <p:cNvSpPr txBox="1"/>
-          <p:nvPr/>
-        </p:nvSpPr>
-        <p:spPr>
-          <a:xfrm>
-            <a:off x="2468880" y="3458261"/>
-            <a:ext cx="1097280" cy="274320"/>
-          </a:xfrm>
-          <a:prstGeom prst="rect">
-            <a:avLst/>
-          </a:prstGeom>
-          <a:noFill/>
-        </p:spPr>
-        <p:txBody>
-          <a:bodyPr wrap="square" lIns="45720" rIns="45720" tIns="18288" bIns="18288" anchor="t">
-            <a:spAutoFit/>
-          </a:bodyPr>
-          <a:lstStyle/>
-          <a:p>
-            <a:pPr algn="ctr">
-              <a:lnSpc>
-                <a:spcPct val="100000"/>
-              </a:lnSpc>
-            </a:pPr>
-            <a:r>
-              <a:rPr sz="1600" b="1" i="0">
-                <a:solidFill>
-                  <a:srgbClr val="1E1B4B"/>
-                </a:solidFill>
-                <a:latin typeface="Calibri"/>
-              </a:rPr>
-              <a:t>61%</a:t>
+              <a:t>77%</a:t>
             </a:r>
           </a:p>
         </p:txBody>
@@ -11531,8 +11603,8 @@
         </p:nvSpPr>
         <p:spPr>
           <a:xfrm>
-            <a:off x="3840480" y="3233319"/>
-            <a:ext cx="1097280" cy="2710281"/>
+            <a:off x="3840480" y="3242463"/>
+            <a:ext cx="1097280" cy="2518257"/>
           </a:xfrm>
           <a:prstGeom prst="rect">
             <a:avLst/>
@@ -11575,7 +11647,62 @@
         </p:nvSpPr>
         <p:spPr>
           <a:xfrm>
-            <a:off x="3840480" y="6016752"/>
+            <a:off x="3840480" y="5806440"/>
+            <a:ext cx="1097280" cy="502920"/>
+          </a:xfrm>
+          <a:prstGeom prst="rect">
+            <a:avLst/>
+          </a:prstGeom>
+          <a:noFill/>
+        </p:spPr>
+        <p:txBody>
+          <a:bodyPr wrap="square" lIns="45720" rIns="45720" tIns="18288" bIns="18288" anchor="t">
+            <a:spAutoFit/>
+          </a:bodyPr>
+          <a:lstStyle/>
+          <a:p>
+            <a:pPr algn="ctr">
+              <a:lnSpc>
+                <a:spcPct val="115000"/>
+              </a:lnSpc>
+            </a:pPr>
+            <a:r>
+              <a:rPr sz="900" b="1" i="0">
+                <a:solidFill>
+                  <a:srgbClr val="1E1B4B"/>
+                </a:solidFill>
+                <a:latin typeface="Calibri"/>
+              </a:rPr>
+              <a:t>Cohort top 15</a:t>
+            </a:r>
+          </a:p>
+          <a:p>
+            <a:pPr algn="ctr">
+              <a:lnSpc>
+                <a:spcPct val="115000"/>
+              </a:lnSpc>
+            </a:pPr>
+            <a:r>
+              <a:rPr sz="900" b="1" i="0">
+                <a:solidFill>
+                  <a:srgbClr val="1E1B4B"/>
+                </a:solidFill>
+                <a:latin typeface="Calibri"/>
+              </a:rPr>
+              <a:t>(AACSB)</a:t>
+            </a:r>
+          </a:p>
+        </p:txBody>
+      </p:sp>
+      <p:sp>
+        <p:nvSpPr>
+          <p:cNvPr id="20" name="TextBox 19"/>
+          <p:cNvSpPr txBox="1"/>
+          <p:nvPr/>
+        </p:nvSpPr>
+        <p:spPr>
+          <a:xfrm>
+            <a:off x="3840480" y="2876703"/>
             <a:ext cx="1097280" cy="274320"/>
           </a:xfrm>
           <a:prstGeom prst="rect">
@@ -11591,56 +11718,17 @@
           <a:p>
             <a:pPr algn="ctr">
               <a:lnSpc>
-                <a:spcPct val="125000"/>
-              </a:lnSpc>
-            </a:pPr>
-            <a:r>
-              <a:rPr sz="1000" b="1" i="0">
+                <a:spcPct val="100000"/>
+              </a:lnSpc>
+            </a:pPr>
+            <a:r>
+              <a:rPr sz="1600" b="1" i="0">
                 <a:solidFill>
                   <a:srgbClr val="1E1B4B"/>
                 </a:solidFill>
                 <a:latin typeface="Calibri"/>
               </a:rPr>
-              <a:t>High</a:t>
-            </a:r>
-          </a:p>
-        </p:txBody>
-      </p:sp>
-      <p:sp>
-        <p:nvSpPr>
-          <p:cNvPr id="20" name="TextBox 19"/>
-          <p:cNvSpPr txBox="1"/>
-          <p:nvPr/>
-        </p:nvSpPr>
-        <p:spPr>
-          <a:xfrm>
-            <a:off x="3840480" y="2867559"/>
-            <a:ext cx="1097280" cy="274320"/>
-          </a:xfrm>
-          <a:prstGeom prst="rect">
-            <a:avLst/>
-          </a:prstGeom>
-          <a:noFill/>
-        </p:spPr>
-        <p:txBody>
-          <a:bodyPr wrap="square" lIns="45720" rIns="45720" tIns="18288" bIns="18288" anchor="t">
-            <a:spAutoFit/>
-          </a:bodyPr>
-          <a:lstStyle/>
-          <a:p>
-            <a:pPr algn="ctr">
-              <a:lnSpc>
-                <a:spcPct val="100000"/>
-              </a:lnSpc>
-            </a:pPr>
-            <a:r>
-              <a:rPr sz="1600" b="1" i="0">
-                <a:solidFill>
-                  <a:srgbClr val="1E1B4B"/>
-                </a:solidFill>
-                <a:latin typeface="Calibri"/>
-              </a:rPr>
-              <a:t>78%</a:t>
+              <a:t>81%</a:t>
             </a:r>
           </a:p>
         </p:txBody>
@@ -11653,8 +11741,8 @@
         </p:nvSpPr>
         <p:spPr>
           <a:xfrm>
-            <a:off x="5212080" y="2851100"/>
-            <a:ext cx="1097280" cy="3092500"/>
+            <a:off x="5212080" y="2931567"/>
+            <a:ext cx="1097280" cy="2829153"/>
           </a:xfrm>
           <a:prstGeom prst="rect">
             <a:avLst/>
@@ -11697,7 +11785,62 @@
         </p:nvSpPr>
         <p:spPr>
           <a:xfrm>
-            <a:off x="5212080" y="6016752"/>
+            <a:off x="5212080" y="5806440"/>
+            <a:ext cx="1097280" cy="502920"/>
+          </a:xfrm>
+          <a:prstGeom prst="rect">
+            <a:avLst/>
+          </a:prstGeom>
+          <a:noFill/>
+        </p:spPr>
+        <p:txBody>
+          <a:bodyPr wrap="square" lIns="45720" rIns="45720" tIns="18288" bIns="18288" anchor="t">
+            <a:spAutoFit/>
+          </a:bodyPr>
+          <a:lstStyle/>
+          <a:p>
+            <a:pPr algn="ctr">
+              <a:lnSpc>
+                <a:spcPct val="115000"/>
+              </a:lnSpc>
+            </a:pPr>
+            <a:r>
+              <a:rPr sz="900" b="1" i="0">
+                <a:solidFill>
+                  <a:srgbClr val="1E1B4B"/>
+                </a:solidFill>
+                <a:latin typeface="Calibri"/>
+              </a:rPr>
+              <a:t>Best in class</a:t>
+            </a:r>
+          </a:p>
+          <a:p>
+            <a:pPr algn="ctr">
+              <a:lnSpc>
+                <a:spcPct val="115000"/>
+              </a:lnSpc>
+            </a:pPr>
+            <a:r>
+              <a:rPr sz="900" b="1" i="0">
+                <a:solidFill>
+                  <a:srgbClr val="1E1B4B"/>
+                </a:solidFill>
+                <a:latin typeface="Calibri"/>
+              </a:rPr>
+              <a:t>(UNC, Indiana)</a:t>
+            </a:r>
+          </a:p>
+        </p:txBody>
+      </p:sp>
+      <p:sp>
+        <p:nvSpPr>
+          <p:cNvPr id="23" name="TextBox 22"/>
+          <p:cNvSpPr txBox="1"/>
+          <p:nvPr/>
+        </p:nvSpPr>
+        <p:spPr>
+          <a:xfrm>
+            <a:off x="5212080" y="2565807"/>
             <a:ext cx="1097280" cy="274320"/>
           </a:xfrm>
           <a:prstGeom prst="rect">
@@ -11713,70 +11856,70 @@
           <a:p>
             <a:pPr algn="ctr">
               <a:lnSpc>
+                <a:spcPct val="100000"/>
+              </a:lnSpc>
+            </a:pPr>
+            <a:r>
+              <a:rPr sz="1600" b="1" i="0">
+                <a:solidFill>
+                  <a:srgbClr val="1E1B4B"/>
+                </a:solidFill>
+                <a:latin typeface="Calibri"/>
+              </a:rPr>
+              <a:t>91%</a:t>
+            </a:r>
+          </a:p>
+        </p:txBody>
+      </p:sp>
+      <p:sp>
+        <p:nvSpPr>
+          <p:cNvPr id="24" name="TextBox 23"/>
+          <p:cNvSpPr txBox="1"/>
+          <p:nvPr/>
+        </p:nvSpPr>
+        <p:spPr>
+          <a:xfrm>
+            <a:off x="685800" y="6035040"/>
+            <a:ext cx="6492240" cy="274320"/>
+          </a:xfrm>
+          <a:prstGeom prst="rect">
+            <a:avLst/>
+          </a:prstGeom>
+          <a:noFill/>
+        </p:spPr>
+        <p:txBody>
+          <a:bodyPr wrap="square" lIns="45720" rIns="45720" tIns="18288" bIns="18288" anchor="t">
+            <a:spAutoFit/>
+          </a:bodyPr>
+          <a:lstStyle/>
+          <a:p>
+            <a:pPr algn="l">
+              <a:lnSpc>
                 <a:spcPct val="125000"/>
               </a:lnSpc>
             </a:pPr>
             <a:r>
-              <a:rPr sz="1000" b="1" i="0">
-                <a:solidFill>
-                  <a:srgbClr val="1E1B4B"/>
-                </a:solidFill>
-                <a:latin typeface="Calibri"/>
-              </a:rPr>
-              <a:t>Top tier</a:t>
-            </a:r>
-          </a:p>
-        </p:txBody>
-      </p:sp>
-      <p:sp>
-        <p:nvSpPr>
-          <p:cNvPr id="23" name="TextBox 22"/>
-          <p:cNvSpPr txBox="1"/>
-          <p:nvPr/>
-        </p:nvSpPr>
-        <p:spPr>
-          <a:xfrm>
-            <a:off x="5212080" y="2485340"/>
-            <a:ext cx="1097280" cy="274320"/>
-          </a:xfrm>
-          <a:prstGeom prst="rect">
-            <a:avLst/>
-          </a:prstGeom>
-          <a:noFill/>
-        </p:spPr>
-        <p:txBody>
-          <a:bodyPr wrap="square" lIns="45720" rIns="45720" tIns="18288" bIns="18288" anchor="t">
-            <a:spAutoFit/>
-          </a:bodyPr>
-          <a:lstStyle/>
-          <a:p>
-            <a:pPr algn="ctr">
-              <a:lnSpc>
-                <a:spcPct val="100000"/>
-              </a:lnSpc>
-            </a:pPr>
-            <a:r>
-              <a:rPr sz="1600" b="1" i="0">
-                <a:solidFill>
-                  <a:srgbClr val="1E1B4B"/>
-                </a:solidFill>
-                <a:latin typeface="Calibri"/>
-              </a:rPr>
-              <a:t>89%</a:t>
-            </a:r>
-          </a:p>
-        </p:txBody>
-      </p:sp>
-      <p:sp>
-        <p:nvSpPr>
-          <p:cNvPr id="24" name="Rounded Rectangle 23"/>
+              <a:rPr sz="800" b="0" i="1">
+                <a:solidFill>
+                  <a:srgbClr val="52597A"/>
+                </a:solidFill>
+                <a:latin typeface="Calibri"/>
+              </a:rPr>
+              <a:t>Sources: Careers360 (Amity 23-24). mba-insights.com / NCES IPEDS / QS Distance Online MBA Rankings 2026.</a:t>
+            </a:r>
+          </a:p>
+        </p:txBody>
+      </p:sp>
+      <p:sp>
+        <p:nvSpPr>
+          <p:cNvPr id="25" name="Rounded Rectangle 24"/>
           <p:cNvSpPr/>
           <p:nvPr/>
         </p:nvSpPr>
         <p:spPr>
           <a:xfrm>
             <a:off x="7589520" y="1920240"/>
-            <a:ext cx="4160520" cy="4572000"/>
+            <a:ext cx="4160520" cy="4434840"/>
           </a:xfrm>
           <a:prstGeom prst="roundRect">
             <a:avLst>
@@ -11815,7 +11958,7 @@
       </p:sp>
       <p:sp>
         <p:nvSpPr>
-          <p:cNvPr id="25" name="TextBox 24"/>
+          <p:cNvPr id="26" name="TextBox 25"/>
           <p:cNvSpPr txBox="1"/>
           <p:nvPr/>
         </p:nvSpPr>
@@ -11847,14 +11990,14 @@
                 </a:solidFill>
                 <a:latin typeface="Calibri"/>
               </a:rPr>
-              <a:t>WHAT IT MEANS</a:t>
-            </a:r>
-          </a:p>
-        </p:txBody>
-      </p:sp>
-      <p:sp>
-        <p:nvSpPr>
-          <p:cNvPr id="26" name="TextBox 25"/>
+              <a:t>WHAT THE RESEARCH SAYS</a:t>
+            </a:r>
+          </a:p>
+        </p:txBody>
+      </p:sp>
+      <p:sp>
+        <p:nvSpPr>
+          <p:cNvPr id="27" name="TextBox 26"/>
           <p:cNvSpPr txBox="1"/>
           <p:nvPr/>
         </p:nvSpPr>
@@ -11880,27 +12023,27 @@
               </a:lnSpc>
             </a:pPr>
             <a:r>
-              <a:rPr sz="2800" b="1" i="0">
+              <a:rPr sz="2600" b="1" i="0">
                 <a:solidFill>
                   <a:srgbClr val="14B8A6"/>
                 </a:solidFill>
                 <a:latin typeface="Calibri"/>
               </a:rPr>
-              <a:t>47%</a:t>
-            </a:r>
-          </a:p>
-        </p:txBody>
-      </p:sp>
-      <p:sp>
-        <p:nvSpPr>
-          <p:cNvPr id="27" name="TextBox 26"/>
-          <p:cNvSpPr txBox="1"/>
-          <p:nvPr/>
-        </p:nvSpPr>
-        <p:spPr>
-          <a:xfrm>
-            <a:off x="7863840" y="3108960"/>
-            <a:ext cx="3794760" cy="731520"/>
+              <a:t>71%</a:t>
+            </a:r>
+          </a:p>
+        </p:txBody>
+      </p:sp>
+      <p:sp>
+        <p:nvSpPr>
+          <p:cNvPr id="28" name="TextBox 27"/>
+          <p:cNvSpPr txBox="1"/>
+          <p:nvPr/>
+        </p:nvSpPr>
+        <p:spPr>
+          <a:xfrm>
+            <a:off x="7863840" y="3063240"/>
+            <a:ext cx="3794760" cy="777240"/>
           </a:xfrm>
           <a:prstGeom prst="rect">
             <a:avLst/>
@@ -11919,13 +12062,13 @@
               </a:lnSpc>
             </a:pPr>
             <a:r>
-              <a:rPr sz="1100" b="0" i="1">
+              <a:rPr sz="1050" b="0" i="1">
                 <a:solidFill>
                   <a:srgbClr val="FFFFFF"/>
                 </a:solidFill>
                 <a:latin typeface="Calibri"/>
               </a:rPr>
-              <a:t>Completion lift, Low to High engagement.</a:t>
+              <a:t>of online MBA dropouts cite work life imbalance.</a:t>
             </a:r>
           </a:p>
           <a:p>
@@ -11935,26 +12078,26 @@
               </a:lnSpc>
             </a:pPr>
             <a:r>
-              <a:rPr sz="1100" b="0" i="1">
+              <a:rPr sz="1050" b="0" i="1">
                 <a:solidFill>
                   <a:srgbClr val="FFFFFF"/>
                 </a:solidFill>
                 <a:latin typeface="Calibri"/>
               </a:rPr>
-              <a:t>Biggest single jump in the funnel.</a:t>
-            </a:r>
-          </a:p>
-        </p:txBody>
-      </p:sp>
-      <p:sp>
-        <p:nvSpPr>
-          <p:cNvPr id="28" name="TextBox 27"/>
-          <p:cNvSpPr txBox="1"/>
-          <p:nvPr/>
-        </p:nvSpPr>
-        <p:spPr>
-          <a:xfrm>
-            <a:off x="7863840" y="3840480"/>
+              <a:t>Survey of 47 AACSB programmes.</a:t>
+            </a:r>
+          </a:p>
+        </p:txBody>
+      </p:sp>
+      <p:sp>
+        <p:nvSpPr>
+          <p:cNvPr id="29" name="TextBox 28"/>
+          <p:cNvSpPr txBox="1"/>
+          <p:nvPr/>
+        </p:nvSpPr>
+        <p:spPr>
+          <a:xfrm>
+            <a:off x="7863840" y="3749040"/>
             <a:ext cx="3794760" cy="502920"/>
           </a:xfrm>
           <a:prstGeom prst="rect">
@@ -11974,27 +12117,27 @@
               </a:lnSpc>
             </a:pPr>
             <a:r>
-              <a:rPr sz="2800" b="1" i="0">
+              <a:rPr sz="2600" b="1" i="0">
                 <a:solidFill>
                   <a:srgbClr val="14B8A6"/>
                 </a:solidFill>
                 <a:latin typeface="Calibri"/>
               </a:rPr>
-              <a:t>+18%</a:t>
-            </a:r>
-          </a:p>
-        </p:txBody>
-      </p:sp>
-      <p:sp>
-        <p:nvSpPr>
-          <p:cNvPr id="29" name="TextBox 28"/>
-          <p:cNvSpPr txBox="1"/>
-          <p:nvPr/>
-        </p:nvSpPr>
-        <p:spPr>
-          <a:xfrm>
-            <a:off x="7863840" y="4389120"/>
-            <a:ext cx="3794760" cy="731520"/>
+              <a:t>44%</a:t>
+            </a:r>
+          </a:p>
+        </p:txBody>
+      </p:sp>
+      <p:sp>
+        <p:nvSpPr>
+          <p:cNvPr id="30" name="TextBox 29"/>
+          <p:cNvSpPr txBox="1"/>
+          <p:nvPr/>
+        </p:nvSpPr>
+        <p:spPr>
+          <a:xfrm>
+            <a:off x="7863840" y="4251960"/>
+            <a:ext cx="3794760" cy="777240"/>
           </a:xfrm>
           <a:prstGeom prst="rect">
             <a:avLst/>
@@ -12013,13 +12156,13 @@
               </a:lnSpc>
             </a:pPr>
             <a:r>
-              <a:rPr sz="1100" b="0" i="1">
+              <a:rPr sz="1050" b="0" i="1">
                 <a:solidFill>
                   <a:srgbClr val="FFFFFF"/>
                 </a:solidFill>
                 <a:latin typeface="Calibri"/>
               </a:rPr>
-              <a:t>Net Promoter Score lift in Top tier.</a:t>
+              <a:t>cite financial constraints. 38% cite life events.</a:t>
             </a:r>
           </a:p>
           <a:p>
@@ -12029,26 +12172,26 @@
               </a:lnSpc>
             </a:pPr>
             <a:r>
-              <a:rPr sz="1100" b="0" i="1">
+              <a:rPr sz="1050" b="0" i="1">
                 <a:solidFill>
                   <a:srgbClr val="FFFFFF"/>
                 </a:solidFill>
                 <a:latin typeface="Calibri"/>
               </a:rPr>
-              <a:t>NPS leads enrolment, it does not lag it.</a:t>
-            </a:r>
-          </a:p>
-        </p:txBody>
-      </p:sp>
-      <p:sp>
-        <p:nvSpPr>
-          <p:cNvPr id="30" name="TextBox 29"/>
-          <p:cNvSpPr txBox="1"/>
-          <p:nvPr/>
-        </p:nvSpPr>
-        <p:spPr>
-          <a:xfrm>
-            <a:off x="7863840" y="5120640"/>
+              <a:t>Same survey. Top three drivers.</a:t>
+            </a:r>
+          </a:p>
+        </p:txBody>
+      </p:sp>
+      <p:sp>
+        <p:nvSpPr>
+          <p:cNvPr id="31" name="TextBox 30"/>
+          <p:cNvSpPr txBox="1"/>
+          <p:nvPr/>
+        </p:nvSpPr>
+        <p:spPr>
+          <a:xfrm>
+            <a:off x="7863840" y="4937760"/>
             <a:ext cx="3794760" cy="502920"/>
           </a:xfrm>
           <a:prstGeom prst="rect">
@@ -12068,27 +12211,27 @@
               </a:lnSpc>
             </a:pPr>
             <a:r>
-              <a:rPr sz="2800" b="1" i="0">
+              <a:rPr sz="2600" b="1" i="0">
                 <a:solidFill>
                   <a:srgbClr val="14B8A6"/>
                 </a:solidFill>
                 <a:latin typeface="Calibri"/>
               </a:rPr>
-              <a:t>5%</a:t>
-            </a:r>
-          </a:p>
-        </p:txBody>
-      </p:sp>
-      <p:sp>
-        <p:nvSpPr>
-          <p:cNvPr id="31" name="TextBox 30"/>
-          <p:cNvSpPr txBox="1"/>
-          <p:nvPr/>
-        </p:nvSpPr>
-        <p:spPr>
-          <a:xfrm>
-            <a:off x="7863840" y="5669280"/>
-            <a:ext cx="3794760" cy="731520"/>
+              <a:t>+14 pts</a:t>
+            </a:r>
+          </a:p>
+        </p:txBody>
+      </p:sp>
+      <p:sp>
+        <p:nvSpPr>
+          <p:cNvPr id="32" name="TextBox 31"/>
+          <p:cNvSpPr txBox="1"/>
+          <p:nvPr/>
+        </p:nvSpPr>
+        <p:spPr>
+          <a:xfrm>
+            <a:off x="7863840" y="5440680"/>
+            <a:ext cx="3794760" cy="777240"/>
           </a:xfrm>
           <a:prstGeom prst="rect">
             <a:avLst/>
@@ -12107,13 +12250,13 @@
               </a:lnSpc>
             </a:pPr>
             <a:r>
-              <a:rPr sz="1100" b="0" i="1">
+              <a:rPr sz="1050" b="0" i="1">
                 <a:solidFill>
                   <a:srgbClr val="FFFFFF"/>
                 </a:solidFill>
                 <a:latin typeface="Calibri"/>
               </a:rPr>
-              <a:t>Referral mix in Top tier.</a:t>
+              <a:t>completion gap, self paced vs cohort top 15.</a:t>
             </a:r>
           </a:p>
           <a:p>
@@ -12123,13 +12266,52 @@
               </a:lnSpc>
             </a:pPr>
             <a:r>
-              <a:rPr sz="1100" b="0" i="1">
+              <a:rPr sz="1050" b="0" i="1">
                 <a:solidFill>
                   <a:srgbClr val="FFFFFF"/>
                 </a:solidFill>
                 <a:latin typeface="Calibri"/>
               </a:rPr>
-              <a:t>A 5% lift is a meaningful organic channel.</a:t>
+              <a:t>Cohort + ritual is the cheapest fix.</a:t>
+            </a:r>
+          </a:p>
+        </p:txBody>
+      </p:sp>
+      <p:sp>
+        <p:nvSpPr>
+          <p:cNvPr id="33" name="TextBox 32"/>
+          <p:cNvSpPr txBox="1"/>
+          <p:nvPr/>
+        </p:nvSpPr>
+        <p:spPr>
+          <a:xfrm>
+            <a:off x="7863840" y="5989320"/>
+            <a:ext cx="3794760" cy="274320"/>
+          </a:xfrm>
+          <a:prstGeom prst="rect">
+            <a:avLst/>
+          </a:prstGeom>
+          <a:noFill/>
+        </p:spPr>
+        <p:txBody>
+          <a:bodyPr wrap="square" lIns="45720" rIns="45720" tIns="18288" bIns="18288" anchor="t">
+            <a:spAutoFit/>
+          </a:bodyPr>
+          <a:lstStyle/>
+          <a:p>
+            <a:pPr algn="l">
+              <a:lnSpc>
+                <a:spcPct val="125000"/>
+              </a:lnSpc>
+            </a:pPr>
+            <a:r>
+              <a:rPr sz="800" b="0" i="1">
+                <a:solidFill>
+                  <a:srgbClr val="C4B5FD"/>
+                </a:solidFill>
+                <a:latin typeface="Calibri"/>
+              </a:rPr>
+              <a:t>Source: mba-insights.com, NCES IPEDS.</a:t>
             </a:r>
           </a:p>
         </p:txBody>
@@ -12371,7 +12553,7 @@
                 </a:solidFill>
                 <a:latin typeface="Calibri"/>
               </a:rPr>
-              <a:t>16 / 19</a:t>
+              <a:t>16 / 20</a:t>
             </a:r>
           </a:p>
         </p:txBody>
@@ -13567,7 +13749,7 @@
                 </a:solidFill>
                 <a:latin typeface="Calibri"/>
               </a:rPr>
-              <a:t>17 / 19</a:t>
+              <a:t>17 / 20</a:t>
             </a:r>
           </a:p>
         </p:txBody>
@@ -14997,7 +15179,7 @@
                 </a:solidFill>
                 <a:latin typeface="Calibri"/>
               </a:rPr>
-              <a:t>18 / 19</a:t>
+              <a:t>18 / 20</a:t>
             </a:r>
           </a:p>
         </p:txBody>
@@ -16459,9 +16641,131 @@
         <p:nvPr/>
       </p:nvGrpSpPr>
       <p:grpSpPr/>
+      <p:sp>
+        <p:nvSpPr>
+          <p:cNvPr id="2" name="Rectangle 1"/>
+          <p:cNvSpPr/>
+          <p:nvPr/>
+        </p:nvSpPr>
+        <p:spPr>
+          <a:xfrm>
+            <a:off x="0" y="502920"/>
+            <a:ext cx="146304" cy="502920"/>
+          </a:xfrm>
+          <a:prstGeom prst="rect">
+            <a:avLst/>
+          </a:prstGeom>
+          <a:solidFill>
+            <a:srgbClr val="14B8A6"/>
+          </a:solidFill>
+          <a:ln>
+            <a:noFill/>
+          </a:ln>
+          <a:effectLst/>
+        </p:spPr>
+        <p:style>
+          <a:lnRef idx="1">
+            <a:schemeClr val="accent1"/>
+          </a:lnRef>
+          <a:fillRef idx="3">
+            <a:schemeClr val="accent1"/>
+          </a:fillRef>
+          <a:effectRef idx="2">
+            <a:schemeClr val="accent1"/>
+          </a:effectRef>
+          <a:fontRef idx="minor">
+            <a:schemeClr val="lt1"/>
+          </a:fontRef>
+        </p:style>
+        <p:txBody>
+          <a:bodyPr rtlCol="0" anchor="ctr"/>
+          <a:lstStyle/>
+          <a:p>
+            <a:pPr algn="ctr"/>
+          </a:p>
+        </p:txBody>
+      </p:sp>
+      <p:sp>
+        <p:nvSpPr>
+          <p:cNvPr id="3" name="TextBox 2"/>
+          <p:cNvSpPr txBox="1"/>
+          <p:nvPr/>
+        </p:nvSpPr>
+        <p:spPr>
+          <a:xfrm>
+            <a:off x="457200" y="411480"/>
+            <a:ext cx="7315200" cy="274320"/>
+          </a:xfrm>
+          <a:prstGeom prst="rect">
+            <a:avLst/>
+          </a:prstGeom>
+          <a:noFill/>
+        </p:spPr>
+        <p:txBody>
+          <a:bodyPr wrap="square" lIns="45720" rIns="45720" tIns="18288" bIns="18288" anchor="t">
+            <a:spAutoFit/>
+          </a:bodyPr>
+          <a:lstStyle/>
+          <a:p>
+            <a:pPr algn="l">
+              <a:lnSpc>
+                <a:spcPct val="100000"/>
+              </a:lnSpc>
+            </a:pPr>
+            <a:r>
+              <a:rPr sz="950" b="1" i="0">
+                <a:solidFill>
+                  <a:srgbClr val="52597A"/>
+                </a:solidFill>
+                <a:latin typeface="Calibri"/>
+              </a:rPr>
+              <a:t>SOURCES   |   EVERY CLAIM IS AUDITABLE</a:t>
+            </a:r>
+          </a:p>
+        </p:txBody>
+      </p:sp>
+      <p:sp>
+        <p:nvSpPr>
+          <p:cNvPr id="4" name="TextBox 3"/>
+          <p:cNvSpPr txBox="1"/>
+          <p:nvPr/>
+        </p:nvSpPr>
+        <p:spPr>
+          <a:xfrm>
+            <a:off x="457200" y="640080"/>
+            <a:ext cx="10058400" cy="548640"/>
+          </a:xfrm>
+          <a:prstGeom prst="rect">
+            <a:avLst/>
+          </a:prstGeom>
+          <a:noFill/>
+        </p:spPr>
+        <p:txBody>
+          <a:bodyPr wrap="square" lIns="45720" rIns="45720" tIns="18288" bIns="18288" anchor="t">
+            <a:spAutoFit/>
+          </a:bodyPr>
+          <a:lstStyle/>
+          <a:p>
+            <a:pPr algn="l">
+              <a:lnSpc>
+                <a:spcPct val="100000"/>
+              </a:lnSpc>
+            </a:pPr>
+            <a:r>
+              <a:rPr sz="2400" b="1" i="0">
+                <a:solidFill>
+                  <a:srgbClr val="1E1B4B"/>
+                </a:solidFill>
+                <a:latin typeface="Calibri"/>
+              </a:rPr>
+              <a:t>Research and references.</a:t>
+            </a:r>
+          </a:p>
+        </p:txBody>
+      </p:sp>
       <p:pic>
         <p:nvPicPr>
-          <p:cNvPr id="2" name="Picture 1" descr="handshake.jpg"/>
+          <p:cNvPr id="5" name="Picture 4" descr="amity_online_logo.png"/>
           <p:cNvPicPr>
             <a:picLocks noChangeAspect="1"/>
           </p:cNvPicPr>
@@ -16475,8 +16779,8 @@
         </p:blipFill>
         <p:spPr>
           <a:xfrm>
-            <a:off x="0" y="0"/>
-            <a:ext cx="12191695" cy="6858000"/>
+            <a:off x="10450689" y="292608"/>
+            <a:ext cx="1329526" cy="457200"/>
           </a:xfrm>
           <a:prstGeom prst="rect">
             <a:avLst/>
@@ -16485,26 +16789,146 @@
       </p:pic>
       <p:sp>
         <p:nvSpPr>
-          <p:cNvPr id="3" name="Rectangle 2"/>
+          <p:cNvPr id="6" name="TextBox 5"/>
+          <p:cNvSpPr txBox="1"/>
+          <p:nvPr/>
+        </p:nvSpPr>
+        <p:spPr>
+          <a:xfrm>
+            <a:off x="457200" y="6492240"/>
+            <a:ext cx="9144000" cy="274320"/>
+          </a:xfrm>
+          <a:prstGeom prst="rect">
+            <a:avLst/>
+          </a:prstGeom>
+          <a:noFill/>
+        </p:spPr>
+        <p:txBody>
+          <a:bodyPr wrap="square" lIns="45720" rIns="45720" tIns="18288" bIns="18288" anchor="t">
+            <a:spAutoFit/>
+          </a:bodyPr>
+          <a:lstStyle/>
+          <a:p>
+            <a:pPr algn="l">
+              <a:lnSpc>
+                <a:spcPct val="125000"/>
+              </a:lnSpc>
+            </a:pPr>
+            <a:r>
+              <a:rPr sz="850" b="0" i="1">
+                <a:solidFill>
+                  <a:srgbClr val="52597A"/>
+                </a:solidFill>
+                <a:latin typeface="Calibri"/>
+              </a:rPr>
+              <a:t>Marketing Manager Assignment   Paras Jain   Amity University Online</a:t>
+            </a:r>
+          </a:p>
+        </p:txBody>
+      </p:sp>
+      <p:sp>
+        <p:nvSpPr>
+          <p:cNvPr id="7" name="TextBox 6"/>
+          <p:cNvSpPr txBox="1"/>
+          <p:nvPr/>
+        </p:nvSpPr>
+        <p:spPr>
+          <a:xfrm>
+            <a:off x="11094415" y="6492240"/>
+            <a:ext cx="640080" cy="274320"/>
+          </a:xfrm>
+          <a:prstGeom prst="rect">
+            <a:avLst/>
+          </a:prstGeom>
+          <a:noFill/>
+        </p:spPr>
+        <p:txBody>
+          <a:bodyPr wrap="square" lIns="45720" rIns="45720" tIns="18288" bIns="18288" anchor="t">
+            <a:spAutoFit/>
+          </a:bodyPr>
+          <a:lstStyle/>
+          <a:p>
+            <a:pPr algn="r">
+              <a:lnSpc>
+                <a:spcPct val="125000"/>
+              </a:lnSpc>
+            </a:pPr>
+            <a:r>
+              <a:rPr sz="850" b="0" i="0">
+                <a:solidFill>
+                  <a:srgbClr val="52597A"/>
+                </a:solidFill>
+                <a:latin typeface="Calibri"/>
+              </a:rPr>
+              <a:t>19 / 20</a:t>
+            </a:r>
+          </a:p>
+        </p:txBody>
+      </p:sp>
+      <p:sp>
+        <p:nvSpPr>
+          <p:cNvPr id="8" name="TextBox 7"/>
+          <p:cNvSpPr txBox="1"/>
+          <p:nvPr/>
+        </p:nvSpPr>
+        <p:spPr>
+          <a:xfrm>
+            <a:off x="457200" y="1417320"/>
+            <a:ext cx="11247120" cy="365760"/>
+          </a:xfrm>
+          <a:prstGeom prst="rect">
+            <a:avLst/>
+          </a:prstGeom>
+          <a:noFill/>
+        </p:spPr>
+        <p:txBody>
+          <a:bodyPr wrap="square" lIns="45720" rIns="45720" tIns="18288" bIns="18288" anchor="t">
+            <a:spAutoFit/>
+          </a:bodyPr>
+          <a:lstStyle/>
+          <a:p>
+            <a:pPr algn="l">
+              <a:lnSpc>
+                <a:spcPct val="135000"/>
+              </a:lnSpc>
+            </a:pPr>
+            <a:r>
+              <a:rPr sz="1100" b="0" i="1">
+                <a:solidFill>
+                  <a:srgbClr val="52597A"/>
+                </a:solidFill>
+                <a:latin typeface="Calibri"/>
+              </a:rPr>
+              <a:t>Every fact in this deck is either verifiable on a renowned source or labelled an indicative model. Nothing is invented.</a:t>
+            </a:r>
+          </a:p>
+        </p:txBody>
+      </p:sp>
+      <p:sp>
+        <p:nvSpPr>
+          <p:cNvPr id="9" name="Rounded Rectangle 8"/>
           <p:cNvSpPr/>
           <p:nvPr/>
         </p:nvSpPr>
         <p:spPr>
           <a:xfrm>
-            <a:off x="0" y="0"/>
-            <a:ext cx="12191695" cy="6858000"/>
-          </a:xfrm>
-          <a:prstGeom prst="rect">
-            <a:avLst/>
+            <a:off x="457200" y="1920240"/>
+            <a:ext cx="3703320" cy="1097280"/>
+          </a:xfrm>
+          <a:prstGeom prst="roundRect">
+            <a:avLst>
+              <a:gd name="adj" fmla="val 3000"/>
+            </a:avLst>
           </a:prstGeom>
           <a:solidFill>
-            <a:srgbClr val="100E2E">
-              <a:alpha val="78000"/>
-            </a:srgbClr>
+            <a:srgbClr val="F4F6FB"/>
           </a:solidFill>
-          <a:ln>
-            <a:noFill/>
+          <a:ln w="6350">
+            <a:solidFill>
+              <a:srgbClr val="DDE2EE"/>
+            </a:solidFill>
           </a:ln>
+          <a:effectLst/>
         </p:spPr>
         <p:style>
           <a:lnRef idx="1">
@@ -16530,14 +16954,14 @@
       </p:sp>
       <p:sp>
         <p:nvSpPr>
-          <p:cNvPr id="4" name="Rectangle 3"/>
+          <p:cNvPr id="10" name="Rectangle 9"/>
           <p:cNvSpPr/>
           <p:nvPr/>
         </p:nvSpPr>
         <p:spPr>
           <a:xfrm>
-            <a:off x="0" y="0"/>
-            <a:ext cx="320040" cy="6858000"/>
+            <a:off x="457200" y="1920240"/>
+            <a:ext cx="73152" cy="1097280"/>
           </a:xfrm>
           <a:prstGeom prst="rect">
             <a:avLst/>
@@ -16574,26 +16998,146 @@
       </p:sp>
       <p:sp>
         <p:nvSpPr>
-          <p:cNvPr id="5" name="Rounded Rectangle 4"/>
+          <p:cNvPr id="11" name="TextBox 10"/>
+          <p:cNvSpPr txBox="1"/>
+          <p:nvPr/>
+        </p:nvSpPr>
+        <p:spPr>
+          <a:xfrm>
+            <a:off x="640080" y="2039112"/>
+            <a:ext cx="3429000" cy="274320"/>
+          </a:xfrm>
+          <a:prstGeom prst="rect">
+            <a:avLst/>
+          </a:prstGeom>
+          <a:noFill/>
+        </p:spPr>
+        <p:txBody>
+          <a:bodyPr wrap="square" lIns="45720" rIns="45720" tIns="18288" bIns="18288" anchor="t">
+            <a:spAutoFit/>
+          </a:bodyPr>
+          <a:lstStyle/>
+          <a:p>
+            <a:pPr algn="l">
+              <a:lnSpc>
+                <a:spcPct val="125000"/>
+              </a:lnSpc>
+            </a:pPr>
+            <a:r>
+              <a:rPr sz="950" b="1" i="0">
+                <a:solidFill>
+                  <a:srgbClr val="14B8A6"/>
+                </a:solidFill>
+                <a:latin typeface="Calibri"/>
+              </a:rPr>
+              <a:t>AMITY ONLINE OFFICIAL</a:t>
+            </a:r>
+          </a:p>
+        </p:txBody>
+      </p:sp>
+      <p:sp>
+        <p:nvSpPr>
+          <p:cNvPr id="12" name="TextBox 11"/>
+          <p:cNvSpPr txBox="1"/>
+          <p:nvPr/>
+        </p:nvSpPr>
+        <p:spPr>
+          <a:xfrm>
+            <a:off x="640080" y="2286000"/>
+            <a:ext cx="3429000" cy="274320"/>
+          </a:xfrm>
+          <a:prstGeom prst="rect">
+            <a:avLst/>
+          </a:prstGeom>
+          <a:noFill/>
+        </p:spPr>
+        <p:txBody>
+          <a:bodyPr wrap="square" lIns="45720" rIns="45720" tIns="18288" bIns="18288" anchor="t">
+            <a:spAutoFit/>
+          </a:bodyPr>
+          <a:lstStyle/>
+          <a:p>
+            <a:pPr algn="l">
+              <a:lnSpc>
+                <a:spcPct val="125000"/>
+              </a:lnSpc>
+            </a:pPr>
+            <a:r>
+              <a:rPr sz="900" b="0" i="1">
+                <a:solidFill>
+                  <a:srgbClr val="1E1B4B"/>
+                </a:solidFill>
+                <a:latin typeface="Calibri"/>
+              </a:rPr>
+              <a:t>amityonline.com</a:t>
+            </a:r>
+          </a:p>
+        </p:txBody>
+      </p:sp>
+      <p:sp>
+        <p:nvSpPr>
+          <p:cNvPr id="13" name="TextBox 12"/>
+          <p:cNvSpPr txBox="1"/>
+          <p:nvPr/>
+        </p:nvSpPr>
+        <p:spPr>
+          <a:xfrm>
+            <a:off x="640080" y="2514600"/>
+            <a:ext cx="3429000" cy="502920"/>
+          </a:xfrm>
+          <a:prstGeom prst="rect">
+            <a:avLst/>
+          </a:prstGeom>
+          <a:noFill/>
+        </p:spPr>
+        <p:txBody>
+          <a:bodyPr wrap="square" lIns="45720" rIns="45720" tIns="18288" bIns="18288" anchor="t">
+            <a:spAutoFit/>
+          </a:bodyPr>
+          <a:lstStyle/>
+          <a:p>
+            <a:pPr algn="l">
+              <a:lnSpc>
+                <a:spcPct val="130000"/>
+              </a:lnSpc>
+            </a:pPr>
+            <a:r>
+              <a:rPr sz="900" b="0" i="0">
+                <a:solidFill>
+                  <a:srgbClr val="1E1B4B"/>
+                </a:solidFill>
+                <a:latin typeface="Calibri"/>
+              </a:rPr>
+              <a:t>2,50,000+ learners. 450+ hiring partners. Accreditations.</a:t>
+            </a:r>
+          </a:p>
+        </p:txBody>
+      </p:sp>
+      <p:sp>
+        <p:nvSpPr>
+          <p:cNvPr id="14" name="Rounded Rectangle 13"/>
           <p:cNvSpPr/>
           <p:nvPr/>
         </p:nvSpPr>
         <p:spPr>
           <a:xfrm>
-            <a:off x="530352" y="484632"/>
-            <a:ext cx="1681935" cy="630936"/>
+            <a:off x="4279392" y="1920240"/>
+            <a:ext cx="3703320" cy="1097280"/>
           </a:xfrm>
           <a:prstGeom prst="roundRect">
             <a:avLst>
-              <a:gd name="adj" fmla="val 18000"/>
+              <a:gd name="adj" fmla="val 3000"/>
             </a:avLst>
           </a:prstGeom>
           <a:solidFill>
-            <a:srgbClr val="FFFFFF"/>
+            <a:srgbClr val="F4F6FB"/>
           </a:solidFill>
-          <a:ln>
-            <a:noFill/>
+          <a:ln w="6350">
+            <a:solidFill>
+              <a:srgbClr val="DDE2EE"/>
+            </a:solidFill>
           </a:ln>
+          <a:effectLst/>
         </p:spPr>
         <p:style>
           <a:lnRef idx="1">
@@ -16617,205 +17161,16 @@
           </a:p>
         </p:txBody>
       </p:sp>
-      <p:pic>
-        <p:nvPicPr>
-          <p:cNvPr id="6" name="Picture 5" descr="amity_online_logo.png"/>
-          <p:cNvPicPr>
-            <a:picLocks noChangeAspect="1"/>
-          </p:cNvPicPr>
-          <p:nvPr/>
-        </p:nvPicPr>
-        <p:blipFill>
-          <a:blip r:embed="rId3"/>
-          <a:stretch>
-            <a:fillRect/>
-          </a:stretch>
-        </p:blipFill>
-        <p:spPr>
-          <a:xfrm>
-            <a:off x="640080" y="548640"/>
-            <a:ext cx="1462479" cy="502920"/>
-          </a:xfrm>
-          <a:prstGeom prst="rect">
-            <a:avLst/>
-          </a:prstGeom>
-        </p:spPr>
-      </p:pic>
-      <p:sp>
-        <p:nvSpPr>
-          <p:cNvPr id="7" name="TextBox 6"/>
-          <p:cNvSpPr txBox="1"/>
-          <p:nvPr/>
-        </p:nvSpPr>
-        <p:spPr>
-          <a:xfrm>
-            <a:off x="640080" y="1828800"/>
-            <a:ext cx="10972800" cy="411480"/>
-          </a:xfrm>
-          <a:prstGeom prst="rect">
-            <a:avLst/>
-          </a:prstGeom>
-          <a:noFill/>
-        </p:spPr>
-        <p:txBody>
-          <a:bodyPr wrap="square" lIns="45720" rIns="45720" tIns="18288" bIns="18288" anchor="t">
-            <a:spAutoFit/>
-          </a:bodyPr>
-          <a:lstStyle/>
-          <a:p>
-            <a:pPr algn="l">
-              <a:lnSpc>
-                <a:spcPct val="100000"/>
-              </a:lnSpc>
-            </a:pPr>
-            <a:r>
-              <a:rPr sz="1200" b="1" i="0">
-                <a:solidFill>
-                  <a:srgbClr val="14B8A6"/>
-                </a:solidFill>
-                <a:latin typeface="Calibri"/>
-              </a:rPr>
-              <a:t>ONE LEARNER. ONE STORY. ONE PROMISE.</a:t>
-            </a:r>
-          </a:p>
-        </p:txBody>
-      </p:sp>
-      <p:sp>
-        <p:nvSpPr>
-          <p:cNvPr id="8" name="TextBox 7"/>
-          <p:cNvSpPr txBox="1"/>
-          <p:nvPr/>
-        </p:nvSpPr>
-        <p:spPr>
-          <a:xfrm>
-            <a:off x="640080" y="2286000"/>
-            <a:ext cx="10972800" cy="2194560"/>
-          </a:xfrm>
-          <a:prstGeom prst="rect">
-            <a:avLst/>
-          </a:prstGeom>
-          <a:noFill/>
-        </p:spPr>
-        <p:txBody>
-          <a:bodyPr wrap="square" lIns="45720" rIns="45720" tIns="18288" bIns="18288" anchor="t">
-            <a:spAutoFit/>
-          </a:bodyPr>
-          <a:lstStyle/>
-          <a:p>
-            <a:pPr algn="l">
-              <a:lnSpc>
-                <a:spcPct val="110000"/>
-              </a:lnSpc>
-            </a:pPr>
-            <a:r>
-              <a:rPr sz="4000" b="1" i="0">
-                <a:solidFill>
-                  <a:srgbClr val="FFFFFF"/>
-                </a:solidFill>
-                <a:latin typeface="Calibri"/>
-              </a:rPr>
-              <a:t>Rohit doesn't need</a:t>
-            </a:r>
-          </a:p>
-          <a:p>
-            <a:pPr algn="l">
-              <a:lnSpc>
-                <a:spcPct val="110000"/>
-              </a:lnSpc>
-            </a:pPr>
-            <a:r>
-              <a:rPr sz="4000" b="1" i="0">
-                <a:solidFill>
-                  <a:srgbClr val="FFFFFF"/>
-                </a:solidFill>
-                <a:latin typeface="Calibri"/>
-              </a:rPr>
-              <a:t>another webinar.</a:t>
-            </a:r>
-          </a:p>
-          <a:p>
-            <a:pPr algn="l">
-              <a:lnSpc>
-                <a:spcPct val="110000"/>
-              </a:lnSpc>
-            </a:pPr>
-            <a:r>
-              <a:rPr sz="4000" b="1" i="0">
-                <a:solidFill>
-                  <a:srgbClr val="FFFFFF"/>
-                </a:solidFill>
-                <a:latin typeface="Calibri"/>
-              </a:rPr>
-              <a:t>He needs a moment</a:t>
-            </a:r>
-          </a:p>
-          <a:p>
-            <a:pPr algn="l">
-              <a:lnSpc>
-                <a:spcPct val="110000"/>
-              </a:lnSpc>
-            </a:pPr>
-            <a:r>
-              <a:rPr sz="4000" b="1" i="0">
-                <a:solidFill>
-                  <a:srgbClr val="FFFFFF"/>
-                </a:solidFill>
-                <a:latin typeface="Calibri"/>
-              </a:rPr>
-              <a:t>he can show his family.</a:t>
-            </a:r>
-          </a:p>
-        </p:txBody>
-      </p:sp>
-      <p:sp>
-        <p:nvSpPr>
-          <p:cNvPr id="9" name="TextBox 8"/>
-          <p:cNvSpPr txBox="1"/>
-          <p:nvPr/>
-        </p:nvSpPr>
-        <p:spPr>
-          <a:xfrm>
-            <a:off x="640080" y="5029200"/>
-            <a:ext cx="10972800" cy="411480"/>
-          </a:xfrm>
-          <a:prstGeom prst="rect">
-            <a:avLst/>
-          </a:prstGeom>
-          <a:noFill/>
-        </p:spPr>
-        <p:txBody>
-          <a:bodyPr wrap="square" lIns="45720" rIns="45720" tIns="18288" bIns="18288" anchor="t">
-            <a:spAutoFit/>
-          </a:bodyPr>
-          <a:lstStyle/>
-          <a:p>
-            <a:pPr algn="l">
-              <a:lnSpc>
-                <a:spcPct val="135000"/>
-              </a:lnSpc>
-            </a:pPr>
-            <a:r>
-              <a:rPr sz="1500" b="0" i="1">
-                <a:solidFill>
-                  <a:srgbClr val="C4B5FD"/>
-                </a:solidFill>
-                <a:latin typeface="Calibri"/>
-              </a:rPr>
-              <a:t>If we get that right, retention takes care of itself. Advocacy follows. So does enrolment.</a:t>
-            </a:r>
-          </a:p>
-        </p:txBody>
-      </p:sp>
-      <p:sp>
-        <p:nvSpPr>
-          <p:cNvPr id="10" name="Rectangle 9"/>
+      <p:sp>
+        <p:nvSpPr>
+          <p:cNvPr id="15" name="Rectangle 14"/>
           <p:cNvSpPr/>
           <p:nvPr/>
         </p:nvSpPr>
         <p:spPr>
           <a:xfrm>
-            <a:off x="640080" y="5852160"/>
-            <a:ext cx="54864" cy="548640"/>
+            <a:off x="4279392" y="1920240"/>
+            <a:ext cx="73152" cy="1097280"/>
           </a:xfrm>
           <a:prstGeom prst="rect">
             <a:avLst/>
@@ -16852,14 +17207,14 @@
       </p:sp>
       <p:sp>
         <p:nvSpPr>
-          <p:cNvPr id="11" name="TextBox 10"/>
-          <p:cNvSpPr txBox="1"/>
-          <p:nvPr/>
-        </p:nvSpPr>
-        <p:spPr>
-          <a:xfrm>
-            <a:off x="777240" y="5852160"/>
-            <a:ext cx="7315200" cy="292608"/>
+          <p:cNvPr id="16" name="TextBox 15"/>
+          <p:cNvSpPr txBox="1"/>
+          <p:nvPr/>
+        </p:nvSpPr>
+        <p:spPr>
+          <a:xfrm>
+            <a:off x="4462272" y="2039112"/>
+            <a:ext cx="3429000" cy="274320"/>
           </a:xfrm>
           <a:prstGeom prst="rect">
             <a:avLst/>
@@ -16884,21 +17239,21 @@
                 </a:solidFill>
                 <a:latin typeface="Calibri"/>
               </a:rPr>
-              <a:t>WITH GRATITUDE</a:t>
-            </a:r>
-          </a:p>
-        </p:txBody>
-      </p:sp>
-      <p:sp>
-        <p:nvSpPr>
-          <p:cNvPr id="12" name="TextBox 11"/>
-          <p:cNvSpPr txBox="1"/>
-          <p:nvPr/>
-        </p:nvSpPr>
-        <p:spPr>
-          <a:xfrm>
-            <a:off x="777240" y="6080760"/>
-            <a:ext cx="7315200" cy="365760"/>
+              <a:t>NAAC</a:t>
+            </a:r>
+          </a:p>
+        </p:txBody>
+      </p:sp>
+      <p:sp>
+        <p:nvSpPr>
+          <p:cNvPr id="17" name="TextBox 16"/>
+          <p:cNvSpPr txBox="1"/>
+          <p:nvPr/>
+        </p:nvSpPr>
+        <p:spPr>
+          <a:xfrm>
+            <a:off x="4462272" y="2286000"/>
+            <a:ext cx="3429000" cy="274320"/>
           </a:xfrm>
           <a:prstGeom prst="rect">
             <a:avLst/>
@@ -16917,27 +17272,158 @@
               </a:lnSpc>
             </a:pPr>
             <a:r>
-              <a:rPr sz="1400" b="1" i="0">
-                <a:solidFill>
-                  <a:srgbClr val="FFFFFF"/>
-                </a:solidFill>
-                <a:latin typeface="Calibri"/>
-              </a:rPr>
-              <a:t>Paras Jain   |   Marketing Manager Assignment</a:t>
-            </a:r>
-          </a:p>
-        </p:txBody>
-      </p:sp>
-      <p:sp>
-        <p:nvSpPr>
-          <p:cNvPr id="13" name="TextBox 12"/>
-          <p:cNvSpPr txBox="1"/>
-          <p:nvPr/>
-        </p:nvSpPr>
-        <p:spPr>
-          <a:xfrm>
-            <a:off x="457200" y="6492240"/>
-            <a:ext cx="9144000" cy="274320"/>
+              <a:rPr sz="900" b="0" i="1">
+                <a:solidFill>
+                  <a:srgbClr val="1E1B4B"/>
+                </a:solidFill>
+                <a:latin typeface="Calibri"/>
+              </a:rPr>
+              <a:t>naac.gov.in</a:t>
+            </a:r>
+          </a:p>
+        </p:txBody>
+      </p:sp>
+      <p:sp>
+        <p:nvSpPr>
+          <p:cNvPr id="18" name="TextBox 17"/>
+          <p:cNvSpPr txBox="1"/>
+          <p:nvPr/>
+        </p:nvSpPr>
+        <p:spPr>
+          <a:xfrm>
+            <a:off x="4462272" y="2514600"/>
+            <a:ext cx="3429000" cy="502920"/>
+          </a:xfrm>
+          <a:prstGeom prst="rect">
+            <a:avLst/>
+          </a:prstGeom>
+          <a:noFill/>
+        </p:spPr>
+        <p:txBody>
+          <a:bodyPr wrap="square" lIns="45720" rIns="45720" tIns="18288" bIns="18288" anchor="t">
+            <a:spAutoFit/>
+          </a:bodyPr>
+          <a:lstStyle/>
+          <a:p>
+            <a:pPr algn="l">
+              <a:lnSpc>
+                <a:spcPct val="130000"/>
+              </a:lnSpc>
+            </a:pPr>
+            <a:r>
+              <a:rPr sz="900" b="0" i="0">
+                <a:solidFill>
+                  <a:srgbClr val="1E1B4B"/>
+                </a:solidFill>
+                <a:latin typeface="Calibri"/>
+              </a:rPr>
+              <a:t>Amity University Online graded A+.</a:t>
+            </a:r>
+          </a:p>
+        </p:txBody>
+      </p:sp>
+      <p:sp>
+        <p:nvSpPr>
+          <p:cNvPr id="19" name="Rounded Rectangle 18"/>
+          <p:cNvSpPr/>
+          <p:nvPr/>
+        </p:nvSpPr>
+        <p:spPr>
+          <a:xfrm>
+            <a:off x="8101584" y="1920240"/>
+            <a:ext cx="3703320" cy="1097280"/>
+          </a:xfrm>
+          <a:prstGeom prst="roundRect">
+            <a:avLst>
+              <a:gd name="adj" fmla="val 3000"/>
+            </a:avLst>
+          </a:prstGeom>
+          <a:solidFill>
+            <a:srgbClr val="F4F6FB"/>
+          </a:solidFill>
+          <a:ln w="6350">
+            <a:solidFill>
+              <a:srgbClr val="DDE2EE"/>
+            </a:solidFill>
+          </a:ln>
+          <a:effectLst/>
+        </p:spPr>
+        <p:style>
+          <a:lnRef idx="1">
+            <a:schemeClr val="accent1"/>
+          </a:lnRef>
+          <a:fillRef idx="3">
+            <a:schemeClr val="accent1"/>
+          </a:fillRef>
+          <a:effectRef idx="2">
+            <a:schemeClr val="accent1"/>
+          </a:effectRef>
+          <a:fontRef idx="minor">
+            <a:schemeClr val="lt1"/>
+          </a:fontRef>
+        </p:style>
+        <p:txBody>
+          <a:bodyPr rtlCol="0" anchor="ctr"/>
+          <a:lstStyle/>
+          <a:p>
+            <a:pPr algn="ctr"/>
+          </a:p>
+        </p:txBody>
+      </p:sp>
+      <p:sp>
+        <p:nvSpPr>
+          <p:cNvPr id="20" name="Rectangle 19"/>
+          <p:cNvSpPr/>
+          <p:nvPr/>
+        </p:nvSpPr>
+        <p:spPr>
+          <a:xfrm>
+            <a:off x="8101584" y="1920240"/>
+            <a:ext cx="73152" cy="1097280"/>
+          </a:xfrm>
+          <a:prstGeom prst="rect">
+            <a:avLst/>
+          </a:prstGeom>
+          <a:solidFill>
+            <a:srgbClr val="14B8A6"/>
+          </a:solidFill>
+          <a:ln>
+            <a:noFill/>
+          </a:ln>
+          <a:effectLst/>
+        </p:spPr>
+        <p:style>
+          <a:lnRef idx="1">
+            <a:schemeClr val="accent1"/>
+          </a:lnRef>
+          <a:fillRef idx="3">
+            <a:schemeClr val="accent1"/>
+          </a:fillRef>
+          <a:effectRef idx="2">
+            <a:schemeClr val="accent1"/>
+          </a:effectRef>
+          <a:fontRef idx="minor">
+            <a:schemeClr val="lt1"/>
+          </a:fontRef>
+        </p:style>
+        <p:txBody>
+          <a:bodyPr rtlCol="0" anchor="ctr"/>
+          <a:lstStyle/>
+          <a:p>
+            <a:pPr algn="ctr"/>
+          </a:p>
+        </p:txBody>
+      </p:sp>
+      <p:sp>
+        <p:nvSpPr>
+          <p:cNvPr id="21" name="TextBox 20"/>
+          <p:cNvSpPr txBox="1"/>
+          <p:nvPr/>
+        </p:nvSpPr>
+        <p:spPr>
+          <a:xfrm>
+            <a:off x="8284464" y="2039112"/>
+            <a:ext cx="3429000" cy="274320"/>
           </a:xfrm>
           <a:prstGeom prst="rect">
             <a:avLst/>
@@ -16956,52 +17442,2096 @@
               </a:lnSpc>
             </a:pPr>
             <a:r>
-              <a:rPr sz="850" b="0" i="1">
+              <a:rPr sz="950" b="1" i="0">
+                <a:solidFill>
+                  <a:srgbClr val="14B8A6"/>
+                </a:solidFill>
+                <a:latin typeface="Calibri"/>
+              </a:rPr>
+              <a:t>NIRF MANAGEMENT 2024</a:t>
+            </a:r>
+          </a:p>
+        </p:txBody>
+      </p:sp>
+      <p:sp>
+        <p:nvSpPr>
+          <p:cNvPr id="22" name="TextBox 21"/>
+          <p:cNvSpPr txBox="1"/>
+          <p:nvPr/>
+        </p:nvSpPr>
+        <p:spPr>
+          <a:xfrm>
+            <a:off x="8284464" y="2286000"/>
+            <a:ext cx="3429000" cy="274320"/>
+          </a:xfrm>
+          <a:prstGeom prst="rect">
+            <a:avLst/>
+          </a:prstGeom>
+          <a:noFill/>
+        </p:spPr>
+        <p:txBody>
+          <a:bodyPr wrap="square" lIns="45720" rIns="45720" tIns="18288" bIns="18288" anchor="t">
+            <a:spAutoFit/>
+          </a:bodyPr>
+          <a:lstStyle/>
+          <a:p>
+            <a:pPr algn="l">
+              <a:lnSpc>
+                <a:spcPct val="125000"/>
+              </a:lnSpc>
+            </a:pPr>
+            <a:r>
+              <a:rPr sz="900" b="0" i="1">
+                <a:solidFill>
+                  <a:srgbClr val="1E1B4B"/>
+                </a:solidFill>
+                <a:latin typeface="Calibri"/>
+              </a:rPr>
+              <a:t>nirfindia.org</a:t>
+            </a:r>
+          </a:p>
+        </p:txBody>
+      </p:sp>
+      <p:sp>
+        <p:nvSpPr>
+          <p:cNvPr id="23" name="TextBox 22"/>
+          <p:cNvSpPr txBox="1"/>
+          <p:nvPr/>
+        </p:nvSpPr>
+        <p:spPr>
+          <a:xfrm>
+            <a:off x="8284464" y="2514600"/>
+            <a:ext cx="3429000" cy="502920"/>
+          </a:xfrm>
+          <a:prstGeom prst="rect">
+            <a:avLst/>
+          </a:prstGeom>
+          <a:noFill/>
+        </p:spPr>
+        <p:txBody>
+          <a:bodyPr wrap="square" lIns="45720" rIns="45720" tIns="18288" bIns="18288" anchor="t">
+            <a:spAutoFit/>
+          </a:bodyPr>
+          <a:lstStyle/>
+          <a:p>
+            <a:pPr algn="l">
+              <a:lnSpc>
+                <a:spcPct val="130000"/>
+              </a:lnSpc>
+            </a:pPr>
+            <a:r>
+              <a:rPr sz="900" b="0" i="0">
+                <a:solidFill>
+                  <a:srgbClr val="1E1B4B"/>
+                </a:solidFill>
+                <a:latin typeface="Calibri"/>
+              </a:rPr>
+              <a:t>Amity Online MBA ranked in management top 50.</a:t>
+            </a:r>
+          </a:p>
+        </p:txBody>
+      </p:sp>
+      <p:sp>
+        <p:nvSpPr>
+          <p:cNvPr id="24" name="Rounded Rectangle 23"/>
+          <p:cNvSpPr/>
+          <p:nvPr/>
+        </p:nvSpPr>
+        <p:spPr>
+          <a:xfrm>
+            <a:off x="457200" y="3136392"/>
+            <a:ext cx="3703320" cy="1097280"/>
+          </a:xfrm>
+          <a:prstGeom prst="roundRect">
+            <a:avLst>
+              <a:gd name="adj" fmla="val 3000"/>
+            </a:avLst>
+          </a:prstGeom>
+          <a:solidFill>
+            <a:srgbClr val="F4F6FB"/>
+          </a:solidFill>
+          <a:ln w="6350">
+            <a:solidFill>
+              <a:srgbClr val="DDE2EE"/>
+            </a:solidFill>
+          </a:ln>
+          <a:effectLst/>
+        </p:spPr>
+        <p:style>
+          <a:lnRef idx="1">
+            <a:schemeClr val="accent1"/>
+          </a:lnRef>
+          <a:fillRef idx="3">
+            <a:schemeClr val="accent1"/>
+          </a:fillRef>
+          <a:effectRef idx="2">
+            <a:schemeClr val="accent1"/>
+          </a:effectRef>
+          <a:fontRef idx="minor">
+            <a:schemeClr val="lt1"/>
+          </a:fontRef>
+        </p:style>
+        <p:txBody>
+          <a:bodyPr rtlCol="0" anchor="ctr"/>
+          <a:lstStyle/>
+          <a:p>
+            <a:pPr algn="ctr"/>
+          </a:p>
+        </p:txBody>
+      </p:sp>
+      <p:sp>
+        <p:nvSpPr>
+          <p:cNvPr id="25" name="Rectangle 24"/>
+          <p:cNvSpPr/>
+          <p:nvPr/>
+        </p:nvSpPr>
+        <p:spPr>
+          <a:xfrm>
+            <a:off x="457200" y="3136392"/>
+            <a:ext cx="73152" cy="1097280"/>
+          </a:xfrm>
+          <a:prstGeom prst="rect">
+            <a:avLst/>
+          </a:prstGeom>
+          <a:solidFill>
+            <a:srgbClr val="06B6D4"/>
+          </a:solidFill>
+          <a:ln>
+            <a:noFill/>
+          </a:ln>
+          <a:effectLst/>
+        </p:spPr>
+        <p:style>
+          <a:lnRef idx="1">
+            <a:schemeClr val="accent1"/>
+          </a:lnRef>
+          <a:fillRef idx="3">
+            <a:schemeClr val="accent1"/>
+          </a:fillRef>
+          <a:effectRef idx="2">
+            <a:schemeClr val="accent1"/>
+          </a:effectRef>
+          <a:fontRef idx="minor">
+            <a:schemeClr val="lt1"/>
+          </a:fontRef>
+        </p:style>
+        <p:txBody>
+          <a:bodyPr rtlCol="0" anchor="ctr"/>
+          <a:lstStyle/>
+          <a:p>
+            <a:pPr algn="ctr"/>
+          </a:p>
+        </p:txBody>
+      </p:sp>
+      <p:sp>
+        <p:nvSpPr>
+          <p:cNvPr id="26" name="TextBox 25"/>
+          <p:cNvSpPr txBox="1"/>
+          <p:nvPr/>
+        </p:nvSpPr>
+        <p:spPr>
+          <a:xfrm>
+            <a:off x="640080" y="3255264"/>
+            <a:ext cx="3429000" cy="274320"/>
+          </a:xfrm>
+          <a:prstGeom prst="rect">
+            <a:avLst/>
+          </a:prstGeom>
+          <a:noFill/>
+        </p:spPr>
+        <p:txBody>
+          <a:bodyPr wrap="square" lIns="45720" rIns="45720" tIns="18288" bIns="18288" anchor="t">
+            <a:spAutoFit/>
+          </a:bodyPr>
+          <a:lstStyle/>
+          <a:p>
+            <a:pPr algn="l">
+              <a:lnSpc>
+                <a:spcPct val="125000"/>
+              </a:lnSpc>
+            </a:pPr>
+            <a:r>
+              <a:rPr sz="950" b="1" i="0">
+                <a:solidFill>
+                  <a:srgbClr val="06B6D4"/>
+                </a:solidFill>
+                <a:latin typeface="Calibri"/>
+              </a:rPr>
+              <a:t>QS WORLD RANKINGS</a:t>
+            </a:r>
+          </a:p>
+        </p:txBody>
+      </p:sp>
+      <p:sp>
+        <p:nvSpPr>
+          <p:cNvPr id="27" name="TextBox 26"/>
+          <p:cNvSpPr txBox="1"/>
+          <p:nvPr/>
+        </p:nvSpPr>
+        <p:spPr>
+          <a:xfrm>
+            <a:off x="640080" y="3502152"/>
+            <a:ext cx="3429000" cy="274320"/>
+          </a:xfrm>
+          <a:prstGeom prst="rect">
+            <a:avLst/>
+          </a:prstGeom>
+          <a:noFill/>
+        </p:spPr>
+        <p:txBody>
+          <a:bodyPr wrap="square" lIns="45720" rIns="45720" tIns="18288" bIns="18288" anchor="t">
+            <a:spAutoFit/>
+          </a:bodyPr>
+          <a:lstStyle/>
+          <a:p>
+            <a:pPr algn="l">
+              <a:lnSpc>
+                <a:spcPct val="125000"/>
+              </a:lnSpc>
+            </a:pPr>
+            <a:r>
+              <a:rPr sz="900" b="0" i="1">
+                <a:solidFill>
+                  <a:srgbClr val="1E1B4B"/>
+                </a:solidFill>
+                <a:latin typeface="Calibri"/>
+              </a:rPr>
+              <a:t>topuniversities.com</a:t>
+            </a:r>
+          </a:p>
+        </p:txBody>
+      </p:sp>
+      <p:sp>
+        <p:nvSpPr>
+          <p:cNvPr id="28" name="TextBox 27"/>
+          <p:cNvSpPr txBox="1"/>
+          <p:nvPr/>
+        </p:nvSpPr>
+        <p:spPr>
+          <a:xfrm>
+            <a:off x="640080" y="3730752"/>
+            <a:ext cx="3429000" cy="502920"/>
+          </a:xfrm>
+          <a:prstGeom prst="rect">
+            <a:avLst/>
+          </a:prstGeom>
+          <a:noFill/>
+        </p:spPr>
+        <p:txBody>
+          <a:bodyPr wrap="square" lIns="45720" rIns="45720" tIns="18288" bIns="18288" anchor="t">
+            <a:spAutoFit/>
+          </a:bodyPr>
+          <a:lstStyle/>
+          <a:p>
+            <a:pPr algn="l">
+              <a:lnSpc>
+                <a:spcPct val="130000"/>
+              </a:lnSpc>
+            </a:pPr>
+            <a:r>
+              <a:rPr sz="900" b="0" i="0">
+                <a:solidFill>
+                  <a:srgbClr val="1E1B4B"/>
+                </a:solidFill>
+                <a:latin typeface="Calibri"/>
+              </a:rPr>
+              <a:t>Asia Pacific Top 10 Online MBA. Only Indian online MBA QS ranked.</a:t>
+            </a:r>
+          </a:p>
+        </p:txBody>
+      </p:sp>
+      <p:sp>
+        <p:nvSpPr>
+          <p:cNvPr id="29" name="Rounded Rectangle 28"/>
+          <p:cNvSpPr/>
+          <p:nvPr/>
+        </p:nvSpPr>
+        <p:spPr>
+          <a:xfrm>
+            <a:off x="4279392" y="3136392"/>
+            <a:ext cx="3703320" cy="1097280"/>
+          </a:xfrm>
+          <a:prstGeom prst="roundRect">
+            <a:avLst>
+              <a:gd name="adj" fmla="val 3000"/>
+            </a:avLst>
+          </a:prstGeom>
+          <a:solidFill>
+            <a:srgbClr val="F4F6FB"/>
+          </a:solidFill>
+          <a:ln w="6350">
+            <a:solidFill>
+              <a:srgbClr val="DDE2EE"/>
+            </a:solidFill>
+          </a:ln>
+          <a:effectLst/>
+        </p:spPr>
+        <p:style>
+          <a:lnRef idx="1">
+            <a:schemeClr val="accent1"/>
+          </a:lnRef>
+          <a:fillRef idx="3">
+            <a:schemeClr val="accent1"/>
+          </a:fillRef>
+          <a:effectRef idx="2">
+            <a:schemeClr val="accent1"/>
+          </a:effectRef>
+          <a:fontRef idx="minor">
+            <a:schemeClr val="lt1"/>
+          </a:fontRef>
+        </p:style>
+        <p:txBody>
+          <a:bodyPr rtlCol="0" anchor="ctr"/>
+          <a:lstStyle/>
+          <a:p>
+            <a:pPr algn="ctr"/>
+          </a:p>
+        </p:txBody>
+      </p:sp>
+      <p:sp>
+        <p:nvSpPr>
+          <p:cNvPr id="30" name="Rectangle 29"/>
+          <p:cNvSpPr/>
+          <p:nvPr/>
+        </p:nvSpPr>
+        <p:spPr>
+          <a:xfrm>
+            <a:off x="4279392" y="3136392"/>
+            <a:ext cx="73152" cy="1097280"/>
+          </a:xfrm>
+          <a:prstGeom prst="rect">
+            <a:avLst/>
+          </a:prstGeom>
+          <a:solidFill>
+            <a:srgbClr val="06B6D4"/>
+          </a:solidFill>
+          <a:ln>
+            <a:noFill/>
+          </a:ln>
+          <a:effectLst/>
+        </p:spPr>
+        <p:style>
+          <a:lnRef idx="1">
+            <a:schemeClr val="accent1"/>
+          </a:lnRef>
+          <a:fillRef idx="3">
+            <a:schemeClr val="accent1"/>
+          </a:fillRef>
+          <a:effectRef idx="2">
+            <a:schemeClr val="accent1"/>
+          </a:effectRef>
+          <a:fontRef idx="minor">
+            <a:schemeClr val="lt1"/>
+          </a:fontRef>
+        </p:style>
+        <p:txBody>
+          <a:bodyPr rtlCol="0" anchor="ctr"/>
+          <a:lstStyle/>
+          <a:p>
+            <a:pPr algn="ctr"/>
+          </a:p>
+        </p:txBody>
+      </p:sp>
+      <p:sp>
+        <p:nvSpPr>
+          <p:cNvPr id="31" name="TextBox 30"/>
+          <p:cNvSpPr txBox="1"/>
+          <p:nvPr/>
+        </p:nvSpPr>
+        <p:spPr>
+          <a:xfrm>
+            <a:off x="4462272" y="3255264"/>
+            <a:ext cx="3429000" cy="274320"/>
+          </a:xfrm>
+          <a:prstGeom prst="rect">
+            <a:avLst/>
+          </a:prstGeom>
+          <a:noFill/>
+        </p:spPr>
+        <p:txBody>
+          <a:bodyPr wrap="square" lIns="45720" rIns="45720" tIns="18288" bIns="18288" anchor="t">
+            <a:spAutoFit/>
+          </a:bodyPr>
+          <a:lstStyle/>
+          <a:p>
+            <a:pPr algn="l">
+              <a:lnSpc>
+                <a:spcPct val="125000"/>
+              </a:lnSpc>
+            </a:pPr>
+            <a:r>
+              <a:rPr sz="950" b="1" i="0">
+                <a:solidFill>
+                  <a:srgbClr val="06B6D4"/>
+                </a:solidFill>
+                <a:latin typeface="Calibri"/>
+              </a:rPr>
+              <a:t>WASC, QAA, WES</a:t>
+            </a:r>
+          </a:p>
+        </p:txBody>
+      </p:sp>
+      <p:sp>
+        <p:nvSpPr>
+          <p:cNvPr id="32" name="TextBox 31"/>
+          <p:cNvSpPr txBox="1"/>
+          <p:nvPr/>
+        </p:nvSpPr>
+        <p:spPr>
+          <a:xfrm>
+            <a:off x="4462272" y="3502152"/>
+            <a:ext cx="3429000" cy="274320"/>
+          </a:xfrm>
+          <a:prstGeom prst="rect">
+            <a:avLst/>
+          </a:prstGeom>
+          <a:noFill/>
+        </p:spPr>
+        <p:txBody>
+          <a:bodyPr wrap="square" lIns="45720" rIns="45720" tIns="18288" bIns="18288" anchor="t">
+            <a:spAutoFit/>
+          </a:bodyPr>
+          <a:lstStyle/>
+          <a:p>
+            <a:pPr algn="l">
+              <a:lnSpc>
+                <a:spcPct val="125000"/>
+              </a:lnSpc>
+            </a:pPr>
+            <a:r>
+              <a:rPr sz="900" b="0" i="1">
+                <a:solidFill>
+                  <a:srgbClr val="1E1B4B"/>
+                </a:solidFill>
+                <a:latin typeface="Calibri"/>
+              </a:rPr>
+              <a:t>wscuc.org   qaa.ac.uk   wes.org</a:t>
+            </a:r>
+          </a:p>
+        </p:txBody>
+      </p:sp>
+      <p:sp>
+        <p:nvSpPr>
+          <p:cNvPr id="33" name="TextBox 32"/>
+          <p:cNvSpPr txBox="1"/>
+          <p:nvPr/>
+        </p:nvSpPr>
+        <p:spPr>
+          <a:xfrm>
+            <a:off x="4462272" y="3730752"/>
+            <a:ext cx="3429000" cy="502920"/>
+          </a:xfrm>
+          <a:prstGeom prst="rect">
+            <a:avLst/>
+          </a:prstGeom>
+          <a:noFill/>
+        </p:spPr>
+        <p:txBody>
+          <a:bodyPr wrap="square" lIns="45720" rIns="45720" tIns="18288" bIns="18288" anchor="t">
+            <a:spAutoFit/>
+          </a:bodyPr>
+          <a:lstStyle/>
+          <a:p>
+            <a:pPr algn="l">
+              <a:lnSpc>
+                <a:spcPct val="130000"/>
+              </a:lnSpc>
+            </a:pPr>
+            <a:r>
+              <a:rPr sz="900" b="0" i="0">
+                <a:solidFill>
+                  <a:srgbClr val="1E1B4B"/>
+                </a:solidFill>
+                <a:latin typeface="Calibri"/>
+              </a:rPr>
+              <a:t>Global accreditations referenced on Amity Online MBA page.</a:t>
+            </a:r>
+          </a:p>
+        </p:txBody>
+      </p:sp>
+      <p:sp>
+        <p:nvSpPr>
+          <p:cNvPr id="34" name="Rounded Rectangle 33"/>
+          <p:cNvSpPr/>
+          <p:nvPr/>
+        </p:nvSpPr>
+        <p:spPr>
+          <a:xfrm>
+            <a:off x="8101584" y="3136392"/>
+            <a:ext cx="3703320" cy="1097280"/>
+          </a:xfrm>
+          <a:prstGeom prst="roundRect">
+            <a:avLst>
+              <a:gd name="adj" fmla="val 3000"/>
+            </a:avLst>
+          </a:prstGeom>
+          <a:solidFill>
+            <a:srgbClr val="F4F6FB"/>
+          </a:solidFill>
+          <a:ln w="6350">
+            <a:solidFill>
+              <a:srgbClr val="DDE2EE"/>
+            </a:solidFill>
+          </a:ln>
+          <a:effectLst/>
+        </p:spPr>
+        <p:style>
+          <a:lnRef idx="1">
+            <a:schemeClr val="accent1"/>
+          </a:lnRef>
+          <a:fillRef idx="3">
+            <a:schemeClr val="accent1"/>
+          </a:fillRef>
+          <a:effectRef idx="2">
+            <a:schemeClr val="accent1"/>
+          </a:effectRef>
+          <a:fontRef idx="minor">
+            <a:schemeClr val="lt1"/>
+          </a:fontRef>
+        </p:style>
+        <p:txBody>
+          <a:bodyPr rtlCol="0" anchor="ctr"/>
+          <a:lstStyle/>
+          <a:p>
+            <a:pPr algn="ctr"/>
+          </a:p>
+        </p:txBody>
+      </p:sp>
+      <p:sp>
+        <p:nvSpPr>
+          <p:cNvPr id="35" name="Rectangle 34"/>
+          <p:cNvSpPr/>
+          <p:nvPr/>
+        </p:nvSpPr>
+        <p:spPr>
+          <a:xfrm>
+            <a:off x="8101584" y="3136392"/>
+            <a:ext cx="73152" cy="1097280"/>
+          </a:xfrm>
+          <a:prstGeom prst="rect">
+            <a:avLst/>
+          </a:prstGeom>
+          <a:solidFill>
+            <a:srgbClr val="06B6D4"/>
+          </a:solidFill>
+          <a:ln>
+            <a:noFill/>
+          </a:ln>
+          <a:effectLst/>
+        </p:spPr>
+        <p:style>
+          <a:lnRef idx="1">
+            <a:schemeClr val="accent1"/>
+          </a:lnRef>
+          <a:fillRef idx="3">
+            <a:schemeClr val="accent1"/>
+          </a:fillRef>
+          <a:effectRef idx="2">
+            <a:schemeClr val="accent1"/>
+          </a:effectRef>
+          <a:fontRef idx="minor">
+            <a:schemeClr val="lt1"/>
+          </a:fontRef>
+        </p:style>
+        <p:txBody>
+          <a:bodyPr rtlCol="0" anchor="ctr"/>
+          <a:lstStyle/>
+          <a:p>
+            <a:pPr algn="ctr"/>
+          </a:p>
+        </p:txBody>
+      </p:sp>
+      <p:sp>
+        <p:nvSpPr>
+          <p:cNvPr id="36" name="TextBox 35"/>
+          <p:cNvSpPr txBox="1"/>
+          <p:nvPr/>
+        </p:nvSpPr>
+        <p:spPr>
+          <a:xfrm>
+            <a:off x="8284464" y="3255264"/>
+            <a:ext cx="3429000" cy="274320"/>
+          </a:xfrm>
+          <a:prstGeom prst="rect">
+            <a:avLst/>
+          </a:prstGeom>
+          <a:noFill/>
+        </p:spPr>
+        <p:txBody>
+          <a:bodyPr wrap="square" lIns="45720" rIns="45720" tIns="18288" bIns="18288" anchor="t">
+            <a:spAutoFit/>
+          </a:bodyPr>
+          <a:lstStyle/>
+          <a:p>
+            <a:pPr algn="l">
+              <a:lnSpc>
+                <a:spcPct val="125000"/>
+              </a:lnSpc>
+            </a:pPr>
+            <a:r>
+              <a:rPr sz="950" b="1" i="0">
+                <a:solidFill>
+                  <a:srgbClr val="06B6D4"/>
+                </a:solidFill>
+                <a:latin typeface="Calibri"/>
+              </a:rPr>
+              <a:t>CAREERS360</a:t>
+            </a:r>
+          </a:p>
+        </p:txBody>
+      </p:sp>
+      <p:sp>
+        <p:nvSpPr>
+          <p:cNvPr id="37" name="TextBox 36"/>
+          <p:cNvSpPr txBox="1"/>
+          <p:nvPr/>
+        </p:nvSpPr>
+        <p:spPr>
+          <a:xfrm>
+            <a:off x="8284464" y="3502152"/>
+            <a:ext cx="3429000" cy="274320"/>
+          </a:xfrm>
+          <a:prstGeom prst="rect">
+            <a:avLst/>
+          </a:prstGeom>
+          <a:noFill/>
+        </p:spPr>
+        <p:txBody>
+          <a:bodyPr wrap="square" lIns="45720" rIns="45720" tIns="18288" bIns="18288" anchor="t">
+            <a:spAutoFit/>
+          </a:bodyPr>
+          <a:lstStyle/>
+          <a:p>
+            <a:pPr algn="l">
+              <a:lnSpc>
+                <a:spcPct val="125000"/>
+              </a:lnSpc>
+            </a:pPr>
+            <a:r>
+              <a:rPr sz="900" b="0" i="1">
+                <a:solidFill>
+                  <a:srgbClr val="1E1B4B"/>
+                </a:solidFill>
+                <a:latin typeface="Calibri"/>
+              </a:rPr>
+              <a:t>careers360.com</a:t>
+            </a:r>
+          </a:p>
+        </p:txBody>
+      </p:sp>
+      <p:sp>
+        <p:nvSpPr>
+          <p:cNvPr id="38" name="TextBox 37"/>
+          <p:cNvSpPr txBox="1"/>
+          <p:nvPr/>
+        </p:nvSpPr>
+        <p:spPr>
+          <a:xfrm>
+            <a:off x="8284464" y="3730752"/>
+            <a:ext cx="3429000" cy="502920"/>
+          </a:xfrm>
+          <a:prstGeom prst="rect">
+            <a:avLst/>
+          </a:prstGeom>
+          <a:noFill/>
+        </p:spPr>
+        <p:txBody>
+          <a:bodyPr wrap="square" lIns="45720" rIns="45720" tIns="18288" bIns="18288" anchor="t">
+            <a:spAutoFit/>
+          </a:bodyPr>
+          <a:lstStyle/>
+          <a:p>
+            <a:pPr algn="l">
+              <a:lnSpc>
+                <a:spcPct val="130000"/>
+              </a:lnSpc>
+            </a:pPr>
+            <a:r>
+              <a:rPr sz="900" b="0" i="0">
+                <a:solidFill>
+                  <a:srgbClr val="1E1B4B"/>
+                </a:solidFill>
+                <a:latin typeface="Calibri"/>
+              </a:rPr>
+              <a:t>Amity Online MBA 2023-24. 22,831 enrolled. 77% pass. 1,051 placed.</a:t>
+            </a:r>
+          </a:p>
+        </p:txBody>
+      </p:sp>
+      <p:sp>
+        <p:nvSpPr>
+          <p:cNvPr id="39" name="Rounded Rectangle 38"/>
+          <p:cNvSpPr/>
+          <p:nvPr/>
+        </p:nvSpPr>
+        <p:spPr>
+          <a:xfrm>
+            <a:off x="457200" y="4352544"/>
+            <a:ext cx="3703320" cy="1097280"/>
+          </a:xfrm>
+          <a:prstGeom prst="roundRect">
+            <a:avLst>
+              <a:gd name="adj" fmla="val 3000"/>
+            </a:avLst>
+          </a:prstGeom>
+          <a:solidFill>
+            <a:srgbClr val="F4F6FB"/>
+          </a:solidFill>
+          <a:ln w="6350">
+            <a:solidFill>
+              <a:srgbClr val="DDE2EE"/>
+            </a:solidFill>
+          </a:ln>
+          <a:effectLst/>
+        </p:spPr>
+        <p:style>
+          <a:lnRef idx="1">
+            <a:schemeClr val="accent1"/>
+          </a:lnRef>
+          <a:fillRef idx="3">
+            <a:schemeClr val="accent1"/>
+          </a:fillRef>
+          <a:effectRef idx="2">
+            <a:schemeClr val="accent1"/>
+          </a:effectRef>
+          <a:fontRef idx="minor">
+            <a:schemeClr val="lt1"/>
+          </a:fontRef>
+        </p:style>
+        <p:txBody>
+          <a:bodyPr rtlCol="0" anchor="ctr"/>
+          <a:lstStyle/>
+          <a:p>
+            <a:pPr algn="ctr"/>
+          </a:p>
+        </p:txBody>
+      </p:sp>
+      <p:sp>
+        <p:nvSpPr>
+          <p:cNvPr id="40" name="Rectangle 39"/>
+          <p:cNvSpPr/>
+          <p:nvPr/>
+        </p:nvSpPr>
+        <p:spPr>
+          <a:xfrm>
+            <a:off x="457200" y="4352544"/>
+            <a:ext cx="73152" cy="1097280"/>
+          </a:xfrm>
+          <a:prstGeom prst="rect">
+            <a:avLst/>
+          </a:prstGeom>
+          <a:solidFill>
+            <a:srgbClr val="A855F7"/>
+          </a:solidFill>
+          <a:ln>
+            <a:noFill/>
+          </a:ln>
+          <a:effectLst/>
+        </p:spPr>
+        <p:style>
+          <a:lnRef idx="1">
+            <a:schemeClr val="accent1"/>
+          </a:lnRef>
+          <a:fillRef idx="3">
+            <a:schemeClr val="accent1"/>
+          </a:fillRef>
+          <a:effectRef idx="2">
+            <a:schemeClr val="accent1"/>
+          </a:effectRef>
+          <a:fontRef idx="minor">
+            <a:schemeClr val="lt1"/>
+          </a:fontRef>
+        </p:style>
+        <p:txBody>
+          <a:bodyPr rtlCol="0" anchor="ctr"/>
+          <a:lstStyle/>
+          <a:p>
+            <a:pPr algn="ctr"/>
+          </a:p>
+        </p:txBody>
+      </p:sp>
+      <p:sp>
+        <p:nvSpPr>
+          <p:cNvPr id="41" name="TextBox 40"/>
+          <p:cNvSpPr txBox="1"/>
+          <p:nvPr/>
+        </p:nvSpPr>
+        <p:spPr>
+          <a:xfrm>
+            <a:off x="640080" y="4471416"/>
+            <a:ext cx="3429000" cy="274320"/>
+          </a:xfrm>
+          <a:prstGeom prst="rect">
+            <a:avLst/>
+          </a:prstGeom>
+          <a:noFill/>
+        </p:spPr>
+        <p:txBody>
+          <a:bodyPr wrap="square" lIns="45720" rIns="45720" tIns="18288" bIns="18288" anchor="t">
+            <a:spAutoFit/>
+          </a:bodyPr>
+          <a:lstStyle/>
+          <a:p>
+            <a:pPr algn="l">
+              <a:lnSpc>
+                <a:spcPct val="125000"/>
+              </a:lnSpc>
+            </a:pPr>
+            <a:r>
+              <a:rPr sz="950" b="1" i="0">
+                <a:solidFill>
+                  <a:srgbClr val="A855F7"/>
+                </a:solidFill>
+                <a:latin typeface="Calibri"/>
+              </a:rPr>
+              <a:t>MBA INSIGHTS / NCES IPEDS</a:t>
+            </a:r>
+          </a:p>
+        </p:txBody>
+      </p:sp>
+      <p:sp>
+        <p:nvSpPr>
+          <p:cNvPr id="42" name="TextBox 41"/>
+          <p:cNvSpPr txBox="1"/>
+          <p:nvPr/>
+        </p:nvSpPr>
+        <p:spPr>
+          <a:xfrm>
+            <a:off x="640080" y="4718304"/>
+            <a:ext cx="3429000" cy="274320"/>
+          </a:xfrm>
+          <a:prstGeom prst="rect">
+            <a:avLst/>
+          </a:prstGeom>
+          <a:noFill/>
+        </p:spPr>
+        <p:txBody>
+          <a:bodyPr wrap="square" lIns="45720" rIns="45720" tIns="18288" bIns="18288" anchor="t">
+            <a:spAutoFit/>
+          </a:bodyPr>
+          <a:lstStyle/>
+          <a:p>
+            <a:pPr algn="l">
+              <a:lnSpc>
+                <a:spcPct val="125000"/>
+              </a:lnSpc>
+            </a:pPr>
+            <a:r>
+              <a:rPr sz="900" b="0" i="1">
+                <a:solidFill>
+                  <a:srgbClr val="1E1B4B"/>
+                </a:solidFill>
+                <a:latin typeface="Calibri"/>
+              </a:rPr>
+              <a:t>mba-insights.com</a:t>
+            </a:r>
+          </a:p>
+        </p:txBody>
+      </p:sp>
+      <p:sp>
+        <p:nvSpPr>
+          <p:cNvPr id="43" name="TextBox 42"/>
+          <p:cNvSpPr txBox="1"/>
+          <p:nvPr/>
+        </p:nvSpPr>
+        <p:spPr>
+          <a:xfrm>
+            <a:off x="640080" y="4946904"/>
+            <a:ext cx="3429000" cy="502920"/>
+          </a:xfrm>
+          <a:prstGeom prst="rect">
+            <a:avLst/>
+          </a:prstGeom>
+          <a:noFill/>
+        </p:spPr>
+        <p:txBody>
+          <a:bodyPr wrap="square" lIns="45720" rIns="45720" tIns="18288" bIns="18288" anchor="t">
+            <a:spAutoFit/>
+          </a:bodyPr>
+          <a:lstStyle/>
+          <a:p>
+            <a:pPr algn="l">
+              <a:lnSpc>
+                <a:spcPct val="130000"/>
+              </a:lnSpc>
+            </a:pPr>
+            <a:r>
+              <a:rPr sz="900" b="0" i="0">
+                <a:solidFill>
+                  <a:srgbClr val="1E1B4B"/>
+                </a:solidFill>
+                <a:latin typeface="Calibri"/>
+              </a:rPr>
+              <a:t>Online MBA completion rates. 47 AACSB programmes. Dropout drivers.</a:t>
+            </a:r>
+          </a:p>
+        </p:txBody>
+      </p:sp>
+      <p:sp>
+        <p:nvSpPr>
+          <p:cNvPr id="44" name="Rounded Rectangle 43"/>
+          <p:cNvSpPr/>
+          <p:nvPr/>
+        </p:nvSpPr>
+        <p:spPr>
+          <a:xfrm>
+            <a:off x="4279392" y="4352544"/>
+            <a:ext cx="3703320" cy="1097280"/>
+          </a:xfrm>
+          <a:prstGeom prst="roundRect">
+            <a:avLst>
+              <a:gd name="adj" fmla="val 3000"/>
+            </a:avLst>
+          </a:prstGeom>
+          <a:solidFill>
+            <a:srgbClr val="F4F6FB"/>
+          </a:solidFill>
+          <a:ln w="6350">
+            <a:solidFill>
+              <a:srgbClr val="DDE2EE"/>
+            </a:solidFill>
+          </a:ln>
+          <a:effectLst/>
+        </p:spPr>
+        <p:style>
+          <a:lnRef idx="1">
+            <a:schemeClr val="accent1"/>
+          </a:lnRef>
+          <a:fillRef idx="3">
+            <a:schemeClr val="accent1"/>
+          </a:fillRef>
+          <a:effectRef idx="2">
+            <a:schemeClr val="accent1"/>
+          </a:effectRef>
+          <a:fontRef idx="minor">
+            <a:schemeClr val="lt1"/>
+          </a:fontRef>
+        </p:style>
+        <p:txBody>
+          <a:bodyPr rtlCol="0" anchor="ctr"/>
+          <a:lstStyle/>
+          <a:p>
+            <a:pPr algn="ctr"/>
+          </a:p>
+        </p:txBody>
+      </p:sp>
+      <p:sp>
+        <p:nvSpPr>
+          <p:cNvPr id="45" name="Rectangle 44"/>
+          <p:cNvSpPr/>
+          <p:nvPr/>
+        </p:nvSpPr>
+        <p:spPr>
+          <a:xfrm>
+            <a:off x="4279392" y="4352544"/>
+            <a:ext cx="73152" cy="1097280"/>
+          </a:xfrm>
+          <a:prstGeom prst="rect">
+            <a:avLst/>
+          </a:prstGeom>
+          <a:solidFill>
+            <a:srgbClr val="A855F7"/>
+          </a:solidFill>
+          <a:ln>
+            <a:noFill/>
+          </a:ln>
+          <a:effectLst/>
+        </p:spPr>
+        <p:style>
+          <a:lnRef idx="1">
+            <a:schemeClr val="accent1"/>
+          </a:lnRef>
+          <a:fillRef idx="3">
+            <a:schemeClr val="accent1"/>
+          </a:fillRef>
+          <a:effectRef idx="2">
+            <a:schemeClr val="accent1"/>
+          </a:effectRef>
+          <a:fontRef idx="minor">
+            <a:schemeClr val="lt1"/>
+          </a:fontRef>
+        </p:style>
+        <p:txBody>
+          <a:bodyPr rtlCol="0" anchor="ctr"/>
+          <a:lstStyle/>
+          <a:p>
+            <a:pPr algn="ctr"/>
+          </a:p>
+        </p:txBody>
+      </p:sp>
+      <p:sp>
+        <p:nvSpPr>
+          <p:cNvPr id="46" name="TextBox 45"/>
+          <p:cNvSpPr txBox="1"/>
+          <p:nvPr/>
+        </p:nvSpPr>
+        <p:spPr>
+          <a:xfrm>
+            <a:off x="4462272" y="4471416"/>
+            <a:ext cx="3429000" cy="274320"/>
+          </a:xfrm>
+          <a:prstGeom prst="rect">
+            <a:avLst/>
+          </a:prstGeom>
+          <a:noFill/>
+        </p:spPr>
+        <p:txBody>
+          <a:bodyPr wrap="square" lIns="45720" rIns="45720" tIns="18288" bIns="18288" anchor="t">
+            <a:spAutoFit/>
+          </a:bodyPr>
+          <a:lstStyle/>
+          <a:p>
+            <a:pPr algn="l">
+              <a:lnSpc>
+                <a:spcPct val="125000"/>
+              </a:lnSpc>
+            </a:pPr>
+            <a:r>
+              <a:rPr sz="950" b="1" i="0">
+                <a:solidFill>
+                  <a:srgbClr val="A855F7"/>
+                </a:solidFill>
+                <a:latin typeface="Calibri"/>
+              </a:rPr>
+              <a:t>TYTON PARTNERS</a:t>
+            </a:r>
+          </a:p>
+        </p:txBody>
+      </p:sp>
+      <p:sp>
+        <p:nvSpPr>
+          <p:cNvPr id="47" name="TextBox 46"/>
+          <p:cNvSpPr txBox="1"/>
+          <p:nvPr/>
+        </p:nvSpPr>
+        <p:spPr>
+          <a:xfrm>
+            <a:off x="4462272" y="4718304"/>
+            <a:ext cx="3429000" cy="274320"/>
+          </a:xfrm>
+          <a:prstGeom prst="rect">
+            <a:avLst/>
+          </a:prstGeom>
+          <a:noFill/>
+        </p:spPr>
+        <p:txBody>
+          <a:bodyPr wrap="square" lIns="45720" rIns="45720" tIns="18288" bIns="18288" anchor="t">
+            <a:spAutoFit/>
+          </a:bodyPr>
+          <a:lstStyle/>
+          <a:p>
+            <a:pPr algn="l">
+              <a:lnSpc>
+                <a:spcPct val="125000"/>
+              </a:lnSpc>
+            </a:pPr>
+            <a:r>
+              <a:rPr sz="900" b="0" i="1">
+                <a:solidFill>
+                  <a:srgbClr val="1E1B4B"/>
+                </a:solidFill>
+                <a:latin typeface="Calibri"/>
+              </a:rPr>
+              <a:t>Time for Class 2024</a:t>
+            </a:r>
+          </a:p>
+        </p:txBody>
+      </p:sp>
+      <p:sp>
+        <p:nvSpPr>
+          <p:cNvPr id="48" name="TextBox 47"/>
+          <p:cNvSpPr txBox="1"/>
+          <p:nvPr/>
+        </p:nvSpPr>
+        <p:spPr>
+          <a:xfrm>
+            <a:off x="4462272" y="4946904"/>
+            <a:ext cx="3429000" cy="502920"/>
+          </a:xfrm>
+          <a:prstGeom prst="rect">
+            <a:avLst/>
+          </a:prstGeom>
+          <a:noFill/>
+        </p:spPr>
+        <p:txBody>
+          <a:bodyPr wrap="square" lIns="45720" rIns="45720" tIns="18288" bIns="18288" anchor="t">
+            <a:spAutoFit/>
+          </a:bodyPr>
+          <a:lstStyle/>
+          <a:p>
+            <a:pPr algn="l">
+              <a:lnSpc>
+                <a:spcPct val="130000"/>
+              </a:lnSpc>
+            </a:pPr>
+            <a:r>
+              <a:rPr sz="900" b="0" i="0">
+                <a:solidFill>
+                  <a:srgbClr val="1E1B4B"/>
+                </a:solidFill>
+                <a:latin typeface="Calibri"/>
+              </a:rPr>
+              <a:t>Digital learning and student success. 3,000+ admin survey.</a:t>
+            </a:r>
+          </a:p>
+        </p:txBody>
+      </p:sp>
+      <p:sp>
+        <p:nvSpPr>
+          <p:cNvPr id="49" name="Rounded Rectangle 48"/>
+          <p:cNvSpPr/>
+          <p:nvPr/>
+        </p:nvSpPr>
+        <p:spPr>
+          <a:xfrm>
+            <a:off x="8101584" y="4352544"/>
+            <a:ext cx="3703320" cy="1097280"/>
+          </a:xfrm>
+          <a:prstGeom prst="roundRect">
+            <a:avLst>
+              <a:gd name="adj" fmla="val 3000"/>
+            </a:avLst>
+          </a:prstGeom>
+          <a:solidFill>
+            <a:srgbClr val="F4F6FB"/>
+          </a:solidFill>
+          <a:ln w="6350">
+            <a:solidFill>
+              <a:srgbClr val="DDE2EE"/>
+            </a:solidFill>
+          </a:ln>
+          <a:effectLst/>
+        </p:spPr>
+        <p:style>
+          <a:lnRef idx="1">
+            <a:schemeClr val="accent1"/>
+          </a:lnRef>
+          <a:fillRef idx="3">
+            <a:schemeClr val="accent1"/>
+          </a:fillRef>
+          <a:effectRef idx="2">
+            <a:schemeClr val="accent1"/>
+          </a:effectRef>
+          <a:fontRef idx="minor">
+            <a:schemeClr val="lt1"/>
+          </a:fontRef>
+        </p:style>
+        <p:txBody>
+          <a:bodyPr rtlCol="0" anchor="ctr"/>
+          <a:lstStyle/>
+          <a:p>
+            <a:pPr algn="ctr"/>
+          </a:p>
+        </p:txBody>
+      </p:sp>
+      <p:sp>
+        <p:nvSpPr>
+          <p:cNvPr id="50" name="Rectangle 49"/>
+          <p:cNvSpPr/>
+          <p:nvPr/>
+        </p:nvSpPr>
+        <p:spPr>
+          <a:xfrm>
+            <a:off x="8101584" y="4352544"/>
+            <a:ext cx="73152" cy="1097280"/>
+          </a:xfrm>
+          <a:prstGeom prst="rect">
+            <a:avLst/>
+          </a:prstGeom>
+          <a:solidFill>
+            <a:srgbClr val="A855F7"/>
+          </a:solidFill>
+          <a:ln>
+            <a:noFill/>
+          </a:ln>
+          <a:effectLst/>
+        </p:spPr>
+        <p:style>
+          <a:lnRef idx="1">
+            <a:schemeClr val="accent1"/>
+          </a:lnRef>
+          <a:fillRef idx="3">
+            <a:schemeClr val="accent1"/>
+          </a:fillRef>
+          <a:effectRef idx="2">
+            <a:schemeClr val="accent1"/>
+          </a:effectRef>
+          <a:fontRef idx="minor">
+            <a:schemeClr val="lt1"/>
+          </a:fontRef>
+        </p:style>
+        <p:txBody>
+          <a:bodyPr rtlCol="0" anchor="ctr"/>
+          <a:lstStyle/>
+          <a:p>
+            <a:pPr algn="ctr"/>
+          </a:p>
+        </p:txBody>
+      </p:sp>
+      <p:sp>
+        <p:nvSpPr>
+          <p:cNvPr id="51" name="TextBox 50"/>
+          <p:cNvSpPr txBox="1"/>
+          <p:nvPr/>
+        </p:nvSpPr>
+        <p:spPr>
+          <a:xfrm>
+            <a:off x="8284464" y="4471416"/>
+            <a:ext cx="3429000" cy="274320"/>
+          </a:xfrm>
+          <a:prstGeom prst="rect">
+            <a:avLst/>
+          </a:prstGeom>
+          <a:noFill/>
+        </p:spPr>
+        <p:txBody>
+          <a:bodyPr wrap="square" lIns="45720" rIns="45720" tIns="18288" bIns="18288" anchor="t">
+            <a:spAutoFit/>
+          </a:bodyPr>
+          <a:lstStyle/>
+          <a:p>
+            <a:pPr algn="l">
+              <a:lnSpc>
+                <a:spcPct val="125000"/>
+              </a:lnSpc>
+            </a:pPr>
+            <a:r>
+              <a:rPr sz="950" b="1" i="0">
+                <a:solidFill>
+                  <a:srgbClr val="A855F7"/>
+                </a:solidFill>
+                <a:latin typeface="Calibri"/>
+              </a:rPr>
+              <a:t>HBR / REICHHELD 2003</a:t>
+            </a:r>
+          </a:p>
+        </p:txBody>
+      </p:sp>
+      <p:sp>
+        <p:nvSpPr>
+          <p:cNvPr id="52" name="TextBox 51"/>
+          <p:cNvSpPr txBox="1"/>
+          <p:nvPr/>
+        </p:nvSpPr>
+        <p:spPr>
+          <a:xfrm>
+            <a:off x="8284464" y="4718304"/>
+            <a:ext cx="3429000" cy="274320"/>
+          </a:xfrm>
+          <a:prstGeom prst="rect">
+            <a:avLst/>
+          </a:prstGeom>
+          <a:noFill/>
+        </p:spPr>
+        <p:txBody>
+          <a:bodyPr wrap="square" lIns="45720" rIns="45720" tIns="18288" bIns="18288" anchor="t">
+            <a:spAutoFit/>
+          </a:bodyPr>
+          <a:lstStyle/>
+          <a:p>
+            <a:pPr algn="l">
+              <a:lnSpc>
+                <a:spcPct val="125000"/>
+              </a:lnSpc>
+            </a:pPr>
+            <a:r>
+              <a:rPr sz="900" b="0" i="1">
+                <a:solidFill>
+                  <a:srgbClr val="1E1B4B"/>
+                </a:solidFill>
+                <a:latin typeface="Calibri"/>
+              </a:rPr>
+              <a:t>The One Number You Need to Grow.</a:t>
+            </a:r>
+          </a:p>
+        </p:txBody>
+      </p:sp>
+      <p:sp>
+        <p:nvSpPr>
+          <p:cNvPr id="53" name="TextBox 52"/>
+          <p:cNvSpPr txBox="1"/>
+          <p:nvPr/>
+        </p:nvSpPr>
+        <p:spPr>
+          <a:xfrm>
+            <a:off x="8284464" y="4946904"/>
+            <a:ext cx="3429000" cy="502920"/>
+          </a:xfrm>
+          <a:prstGeom prst="rect">
+            <a:avLst/>
+          </a:prstGeom>
+          <a:noFill/>
+        </p:spPr>
+        <p:txBody>
+          <a:bodyPr wrap="square" lIns="45720" rIns="45720" tIns="18288" bIns="18288" anchor="t">
+            <a:spAutoFit/>
+          </a:bodyPr>
+          <a:lstStyle/>
+          <a:p>
+            <a:pPr algn="l">
+              <a:lnSpc>
+                <a:spcPct val="130000"/>
+              </a:lnSpc>
+            </a:pPr>
+            <a:r>
+              <a:rPr sz="900" b="0" i="0">
+                <a:solidFill>
+                  <a:srgbClr val="1E1B4B"/>
+                </a:solidFill>
+                <a:latin typeface="Calibri"/>
+              </a:rPr>
+              <a:t>Net Promoter Score as a leading growth metric.</a:t>
+            </a:r>
+          </a:p>
+        </p:txBody>
+      </p:sp>
+      <p:sp>
+        <p:nvSpPr>
+          <p:cNvPr id="54" name="Rounded Rectangle 53"/>
+          <p:cNvSpPr/>
+          <p:nvPr/>
+        </p:nvSpPr>
+        <p:spPr>
+          <a:xfrm>
+            <a:off x="457200" y="5568696"/>
+            <a:ext cx="3703320" cy="1097280"/>
+          </a:xfrm>
+          <a:prstGeom prst="roundRect">
+            <a:avLst>
+              <a:gd name="adj" fmla="val 3000"/>
+            </a:avLst>
+          </a:prstGeom>
+          <a:solidFill>
+            <a:srgbClr val="F4F6FB"/>
+          </a:solidFill>
+          <a:ln w="6350">
+            <a:solidFill>
+              <a:srgbClr val="DDE2EE"/>
+            </a:solidFill>
+          </a:ln>
+          <a:effectLst/>
+        </p:spPr>
+        <p:style>
+          <a:lnRef idx="1">
+            <a:schemeClr val="accent1"/>
+          </a:lnRef>
+          <a:fillRef idx="3">
+            <a:schemeClr val="accent1"/>
+          </a:fillRef>
+          <a:effectRef idx="2">
+            <a:schemeClr val="accent1"/>
+          </a:effectRef>
+          <a:fontRef idx="minor">
+            <a:schemeClr val="lt1"/>
+          </a:fontRef>
+        </p:style>
+        <p:txBody>
+          <a:bodyPr rtlCol="0" anchor="ctr"/>
+          <a:lstStyle/>
+          <a:p>
+            <a:pPr algn="ctr"/>
+          </a:p>
+        </p:txBody>
+      </p:sp>
+      <p:sp>
+        <p:nvSpPr>
+          <p:cNvPr id="55" name="Rectangle 54"/>
+          <p:cNvSpPr/>
+          <p:nvPr/>
+        </p:nvSpPr>
+        <p:spPr>
+          <a:xfrm>
+            <a:off x="457200" y="5568696"/>
+            <a:ext cx="73152" cy="1097280"/>
+          </a:xfrm>
+          <a:prstGeom prst="rect">
+            <a:avLst/>
+          </a:prstGeom>
+          <a:solidFill>
+            <a:srgbClr val="1E1B4B"/>
+          </a:solidFill>
+          <a:ln>
+            <a:noFill/>
+          </a:ln>
+          <a:effectLst/>
+        </p:spPr>
+        <p:style>
+          <a:lnRef idx="1">
+            <a:schemeClr val="accent1"/>
+          </a:lnRef>
+          <a:fillRef idx="3">
+            <a:schemeClr val="accent1"/>
+          </a:fillRef>
+          <a:effectRef idx="2">
+            <a:schemeClr val="accent1"/>
+          </a:effectRef>
+          <a:fontRef idx="minor">
+            <a:schemeClr val="lt1"/>
+          </a:fontRef>
+        </p:style>
+        <p:txBody>
+          <a:bodyPr rtlCol="0" anchor="ctr"/>
+          <a:lstStyle/>
+          <a:p>
+            <a:pPr algn="ctr"/>
+          </a:p>
+        </p:txBody>
+      </p:sp>
+      <p:sp>
+        <p:nvSpPr>
+          <p:cNvPr id="56" name="TextBox 55"/>
+          <p:cNvSpPr txBox="1"/>
+          <p:nvPr/>
+        </p:nvSpPr>
+        <p:spPr>
+          <a:xfrm>
+            <a:off x="640080" y="5687568"/>
+            <a:ext cx="3429000" cy="274320"/>
+          </a:xfrm>
+          <a:prstGeom prst="rect">
+            <a:avLst/>
+          </a:prstGeom>
+          <a:noFill/>
+        </p:spPr>
+        <p:txBody>
+          <a:bodyPr wrap="square" lIns="45720" rIns="45720" tIns="18288" bIns="18288" anchor="t">
+            <a:spAutoFit/>
+          </a:bodyPr>
+          <a:lstStyle/>
+          <a:p>
+            <a:pPr algn="l">
+              <a:lnSpc>
+                <a:spcPct val="125000"/>
+              </a:lnSpc>
+            </a:pPr>
+            <a:r>
+              <a:rPr sz="950" b="1" i="0">
+                <a:solidFill>
+                  <a:srgbClr val="1E1B4B"/>
+                </a:solidFill>
+                <a:latin typeface="Calibri"/>
+              </a:rPr>
+              <a:t>CHRISTENSEN 2016</a:t>
+            </a:r>
+          </a:p>
+        </p:txBody>
+      </p:sp>
+      <p:sp>
+        <p:nvSpPr>
+          <p:cNvPr id="57" name="TextBox 56"/>
+          <p:cNvSpPr txBox="1"/>
+          <p:nvPr/>
+        </p:nvSpPr>
+        <p:spPr>
+          <a:xfrm>
+            <a:off x="640080" y="5934456"/>
+            <a:ext cx="3429000" cy="274320"/>
+          </a:xfrm>
+          <a:prstGeom prst="rect">
+            <a:avLst/>
+          </a:prstGeom>
+          <a:noFill/>
+        </p:spPr>
+        <p:txBody>
+          <a:bodyPr wrap="square" lIns="45720" rIns="45720" tIns="18288" bIns="18288" anchor="t">
+            <a:spAutoFit/>
+          </a:bodyPr>
+          <a:lstStyle/>
+          <a:p>
+            <a:pPr algn="l">
+              <a:lnSpc>
+                <a:spcPct val="125000"/>
+              </a:lnSpc>
+            </a:pPr>
+            <a:r>
+              <a:rPr sz="900" b="0" i="1">
+                <a:solidFill>
+                  <a:srgbClr val="1E1B4B"/>
+                </a:solidFill>
+                <a:latin typeface="Calibri"/>
+              </a:rPr>
+              <a:t>Competing Against Luck. HBR.</a:t>
+            </a:r>
+          </a:p>
+        </p:txBody>
+      </p:sp>
+      <p:sp>
+        <p:nvSpPr>
+          <p:cNvPr id="58" name="TextBox 57"/>
+          <p:cNvSpPr txBox="1"/>
+          <p:nvPr/>
+        </p:nvSpPr>
+        <p:spPr>
+          <a:xfrm>
+            <a:off x="640080" y="6163056"/>
+            <a:ext cx="3429000" cy="502920"/>
+          </a:xfrm>
+          <a:prstGeom prst="rect">
+            <a:avLst/>
+          </a:prstGeom>
+          <a:noFill/>
+        </p:spPr>
+        <p:txBody>
+          <a:bodyPr wrap="square" lIns="45720" rIns="45720" tIns="18288" bIns="18288" anchor="t">
+            <a:spAutoFit/>
+          </a:bodyPr>
+          <a:lstStyle/>
+          <a:p>
+            <a:pPr algn="l">
+              <a:lnSpc>
+                <a:spcPct val="130000"/>
+              </a:lnSpc>
+            </a:pPr>
+            <a:r>
+              <a:rPr sz="900" b="0" i="0">
+                <a:solidFill>
+                  <a:srgbClr val="1E1B4B"/>
+                </a:solidFill>
+                <a:latin typeface="Calibri"/>
+              </a:rPr>
+              <a:t>Jobs to be Done framework. Used on the approach slide.</a:t>
+            </a:r>
+          </a:p>
+        </p:txBody>
+      </p:sp>
+      <p:sp>
+        <p:nvSpPr>
+          <p:cNvPr id="59" name="Rounded Rectangle 58"/>
+          <p:cNvSpPr/>
+          <p:nvPr/>
+        </p:nvSpPr>
+        <p:spPr>
+          <a:xfrm>
+            <a:off x="4279392" y="5568696"/>
+            <a:ext cx="3703320" cy="1097280"/>
+          </a:xfrm>
+          <a:prstGeom prst="roundRect">
+            <a:avLst>
+              <a:gd name="adj" fmla="val 3000"/>
+            </a:avLst>
+          </a:prstGeom>
+          <a:solidFill>
+            <a:srgbClr val="F4F6FB"/>
+          </a:solidFill>
+          <a:ln w="6350">
+            <a:solidFill>
+              <a:srgbClr val="DDE2EE"/>
+            </a:solidFill>
+          </a:ln>
+          <a:effectLst/>
+        </p:spPr>
+        <p:style>
+          <a:lnRef idx="1">
+            <a:schemeClr val="accent1"/>
+          </a:lnRef>
+          <a:fillRef idx="3">
+            <a:schemeClr val="accent1"/>
+          </a:fillRef>
+          <a:effectRef idx="2">
+            <a:schemeClr val="accent1"/>
+          </a:effectRef>
+          <a:fontRef idx="minor">
+            <a:schemeClr val="lt1"/>
+          </a:fontRef>
+        </p:style>
+        <p:txBody>
+          <a:bodyPr rtlCol="0" anchor="ctr"/>
+          <a:lstStyle/>
+          <a:p>
+            <a:pPr algn="ctr"/>
+          </a:p>
+        </p:txBody>
+      </p:sp>
+      <p:sp>
+        <p:nvSpPr>
+          <p:cNvPr id="60" name="Rectangle 59"/>
+          <p:cNvSpPr/>
+          <p:nvPr/>
+        </p:nvSpPr>
+        <p:spPr>
+          <a:xfrm>
+            <a:off x="4279392" y="5568696"/>
+            <a:ext cx="73152" cy="1097280"/>
+          </a:xfrm>
+          <a:prstGeom prst="rect">
+            <a:avLst/>
+          </a:prstGeom>
+          <a:solidFill>
+            <a:srgbClr val="1E1B4B"/>
+          </a:solidFill>
+          <a:ln>
+            <a:noFill/>
+          </a:ln>
+          <a:effectLst/>
+        </p:spPr>
+        <p:style>
+          <a:lnRef idx="1">
+            <a:schemeClr val="accent1"/>
+          </a:lnRef>
+          <a:fillRef idx="3">
+            <a:schemeClr val="accent1"/>
+          </a:fillRef>
+          <a:effectRef idx="2">
+            <a:schemeClr val="accent1"/>
+          </a:effectRef>
+          <a:fontRef idx="minor">
+            <a:schemeClr val="lt1"/>
+          </a:fontRef>
+        </p:style>
+        <p:txBody>
+          <a:bodyPr rtlCol="0" anchor="ctr"/>
+          <a:lstStyle/>
+          <a:p>
+            <a:pPr algn="ctr"/>
+          </a:p>
+        </p:txBody>
+      </p:sp>
+      <p:sp>
+        <p:nvSpPr>
+          <p:cNvPr id="61" name="TextBox 60"/>
+          <p:cNvSpPr txBox="1"/>
+          <p:nvPr/>
+        </p:nvSpPr>
+        <p:spPr>
+          <a:xfrm>
+            <a:off x="4462272" y="5687568"/>
+            <a:ext cx="3429000" cy="274320"/>
+          </a:xfrm>
+          <a:prstGeom prst="rect">
+            <a:avLst/>
+          </a:prstGeom>
+          <a:noFill/>
+        </p:spPr>
+        <p:txBody>
+          <a:bodyPr wrap="square" lIns="45720" rIns="45720" tIns="18288" bIns="18288" anchor="t">
+            <a:spAutoFit/>
+          </a:bodyPr>
+          <a:lstStyle/>
+          <a:p>
+            <a:pPr algn="l">
+              <a:lnSpc>
+                <a:spcPct val="125000"/>
+              </a:lnSpc>
+            </a:pPr>
+            <a:r>
+              <a:rPr sz="950" b="1" i="0">
+                <a:solidFill>
+                  <a:srgbClr val="1E1B4B"/>
+                </a:solidFill>
+                <a:latin typeface="Calibri"/>
+              </a:rPr>
+              <a:t>MCCLURE 2007</a:t>
+            </a:r>
+          </a:p>
+        </p:txBody>
+      </p:sp>
+      <p:sp>
+        <p:nvSpPr>
+          <p:cNvPr id="62" name="TextBox 61"/>
+          <p:cNvSpPr txBox="1"/>
+          <p:nvPr/>
+        </p:nvSpPr>
+        <p:spPr>
+          <a:xfrm>
+            <a:off x="4462272" y="5934456"/>
+            <a:ext cx="3429000" cy="274320"/>
+          </a:xfrm>
+          <a:prstGeom prst="rect">
+            <a:avLst/>
+          </a:prstGeom>
+          <a:noFill/>
+        </p:spPr>
+        <p:txBody>
+          <a:bodyPr wrap="square" lIns="45720" rIns="45720" tIns="18288" bIns="18288" anchor="t">
+            <a:spAutoFit/>
+          </a:bodyPr>
+          <a:lstStyle/>
+          <a:p>
+            <a:pPr algn="l">
+              <a:lnSpc>
+                <a:spcPct val="125000"/>
+              </a:lnSpc>
+            </a:pPr>
+            <a:r>
+              <a:rPr sz="900" b="0" i="1">
+                <a:solidFill>
+                  <a:srgbClr val="1E1B4B"/>
+                </a:solidFill>
+                <a:latin typeface="Calibri"/>
+              </a:rPr>
+              <a:t>Startup Metrics for Pirates.</a:t>
+            </a:r>
+          </a:p>
+        </p:txBody>
+      </p:sp>
+      <p:sp>
+        <p:nvSpPr>
+          <p:cNvPr id="63" name="TextBox 62"/>
+          <p:cNvSpPr txBox="1"/>
+          <p:nvPr/>
+        </p:nvSpPr>
+        <p:spPr>
+          <a:xfrm>
+            <a:off x="4462272" y="6163056"/>
+            <a:ext cx="3429000" cy="502920"/>
+          </a:xfrm>
+          <a:prstGeom prst="rect">
+            <a:avLst/>
+          </a:prstGeom>
+          <a:noFill/>
+        </p:spPr>
+        <p:txBody>
+          <a:bodyPr wrap="square" lIns="45720" rIns="45720" tIns="18288" bIns="18288" anchor="t">
+            <a:spAutoFit/>
+          </a:bodyPr>
+          <a:lstStyle/>
+          <a:p>
+            <a:pPr algn="l">
+              <a:lnSpc>
+                <a:spcPct val="130000"/>
+              </a:lnSpc>
+            </a:pPr>
+            <a:r>
+              <a:rPr sz="900" b="0" i="0">
+                <a:solidFill>
+                  <a:srgbClr val="1E1B4B"/>
+                </a:solidFill>
+                <a:latin typeface="Calibri"/>
+              </a:rPr>
+              <a:t>AARRR funnel framework. Used to map the engagement roadmap.</a:t>
+            </a:r>
+          </a:p>
+        </p:txBody>
+      </p:sp>
+      <p:sp>
+        <p:nvSpPr>
+          <p:cNvPr id="64" name="Rounded Rectangle 63"/>
+          <p:cNvSpPr/>
+          <p:nvPr/>
+        </p:nvSpPr>
+        <p:spPr>
+          <a:xfrm>
+            <a:off x="8101584" y="5568696"/>
+            <a:ext cx="3703320" cy="1097280"/>
+          </a:xfrm>
+          <a:prstGeom prst="roundRect">
+            <a:avLst>
+              <a:gd name="adj" fmla="val 3000"/>
+            </a:avLst>
+          </a:prstGeom>
+          <a:solidFill>
+            <a:srgbClr val="F4F6FB"/>
+          </a:solidFill>
+          <a:ln w="6350">
+            <a:solidFill>
+              <a:srgbClr val="DDE2EE"/>
+            </a:solidFill>
+          </a:ln>
+          <a:effectLst/>
+        </p:spPr>
+        <p:style>
+          <a:lnRef idx="1">
+            <a:schemeClr val="accent1"/>
+          </a:lnRef>
+          <a:fillRef idx="3">
+            <a:schemeClr val="accent1"/>
+          </a:fillRef>
+          <a:effectRef idx="2">
+            <a:schemeClr val="accent1"/>
+          </a:effectRef>
+          <a:fontRef idx="minor">
+            <a:schemeClr val="lt1"/>
+          </a:fontRef>
+        </p:style>
+        <p:txBody>
+          <a:bodyPr rtlCol="0" anchor="ctr"/>
+          <a:lstStyle/>
+          <a:p>
+            <a:pPr algn="ctr"/>
+          </a:p>
+        </p:txBody>
+      </p:sp>
+      <p:sp>
+        <p:nvSpPr>
+          <p:cNvPr id="65" name="Rectangle 64"/>
+          <p:cNvSpPr/>
+          <p:nvPr/>
+        </p:nvSpPr>
+        <p:spPr>
+          <a:xfrm>
+            <a:off x="8101584" y="5568696"/>
+            <a:ext cx="73152" cy="1097280"/>
+          </a:xfrm>
+          <a:prstGeom prst="rect">
+            <a:avLst/>
+          </a:prstGeom>
+          <a:solidFill>
+            <a:srgbClr val="1E1B4B"/>
+          </a:solidFill>
+          <a:ln>
+            <a:noFill/>
+          </a:ln>
+          <a:effectLst/>
+        </p:spPr>
+        <p:style>
+          <a:lnRef idx="1">
+            <a:schemeClr val="accent1"/>
+          </a:lnRef>
+          <a:fillRef idx="3">
+            <a:schemeClr val="accent1"/>
+          </a:fillRef>
+          <a:effectRef idx="2">
+            <a:schemeClr val="accent1"/>
+          </a:effectRef>
+          <a:fontRef idx="minor">
+            <a:schemeClr val="lt1"/>
+          </a:fontRef>
+        </p:style>
+        <p:txBody>
+          <a:bodyPr rtlCol="0" anchor="ctr"/>
+          <a:lstStyle/>
+          <a:p>
+            <a:pPr algn="ctr"/>
+          </a:p>
+        </p:txBody>
+      </p:sp>
+      <p:sp>
+        <p:nvSpPr>
+          <p:cNvPr id="66" name="TextBox 65"/>
+          <p:cNvSpPr txBox="1"/>
+          <p:nvPr/>
+        </p:nvSpPr>
+        <p:spPr>
+          <a:xfrm>
+            <a:off x="8284464" y="5687568"/>
+            <a:ext cx="3429000" cy="274320"/>
+          </a:xfrm>
+          <a:prstGeom prst="rect">
+            <a:avLst/>
+          </a:prstGeom>
+          <a:noFill/>
+        </p:spPr>
+        <p:txBody>
+          <a:bodyPr wrap="square" lIns="45720" rIns="45720" tIns="18288" bIns="18288" anchor="t">
+            <a:spAutoFit/>
+          </a:bodyPr>
+          <a:lstStyle/>
+          <a:p>
+            <a:pPr algn="l">
+              <a:lnSpc>
+                <a:spcPct val="125000"/>
+              </a:lnSpc>
+            </a:pPr>
+            <a:r>
+              <a:rPr sz="950" b="1" i="0">
+                <a:solidFill>
+                  <a:srgbClr val="1E1B4B"/>
+                </a:solidFill>
+                <a:latin typeface="Calibri"/>
+              </a:rPr>
+              <a:t>SEAN ELLIS / AMPLITUDE</a:t>
+            </a:r>
+          </a:p>
+        </p:txBody>
+      </p:sp>
+      <p:sp>
+        <p:nvSpPr>
+          <p:cNvPr id="67" name="TextBox 66"/>
+          <p:cNvSpPr txBox="1"/>
+          <p:nvPr/>
+        </p:nvSpPr>
+        <p:spPr>
+          <a:xfrm>
+            <a:off x="8284464" y="5934456"/>
+            <a:ext cx="3429000" cy="274320"/>
+          </a:xfrm>
+          <a:prstGeom prst="rect">
+            <a:avLst/>
+          </a:prstGeom>
+          <a:noFill/>
+        </p:spPr>
+        <p:txBody>
+          <a:bodyPr wrap="square" lIns="45720" rIns="45720" tIns="18288" bIns="18288" anchor="t">
+            <a:spAutoFit/>
+          </a:bodyPr>
+          <a:lstStyle/>
+          <a:p>
+            <a:pPr algn="l">
+              <a:lnSpc>
+                <a:spcPct val="125000"/>
+              </a:lnSpc>
+            </a:pPr>
+            <a:r>
+              <a:rPr sz="900" b="0" i="1">
+                <a:solidFill>
+                  <a:srgbClr val="1E1B4B"/>
+                </a:solidFill>
+                <a:latin typeface="Calibri"/>
+              </a:rPr>
+              <a:t>North Star Playbook.</a:t>
+            </a:r>
+          </a:p>
+        </p:txBody>
+      </p:sp>
+      <p:sp>
+        <p:nvSpPr>
+          <p:cNvPr id="68" name="TextBox 67"/>
+          <p:cNvSpPr txBox="1"/>
+          <p:nvPr/>
+        </p:nvSpPr>
+        <p:spPr>
+          <a:xfrm>
+            <a:off x="8284464" y="6163056"/>
+            <a:ext cx="3429000" cy="502920"/>
+          </a:xfrm>
+          <a:prstGeom prst="rect">
+            <a:avLst/>
+          </a:prstGeom>
+          <a:noFill/>
+        </p:spPr>
+        <p:txBody>
+          <a:bodyPr wrap="square" lIns="45720" rIns="45720" tIns="18288" bIns="18288" anchor="t">
+            <a:spAutoFit/>
+          </a:bodyPr>
+          <a:lstStyle/>
+          <a:p>
+            <a:pPr algn="l">
+              <a:lnSpc>
+                <a:spcPct val="130000"/>
+              </a:lnSpc>
+            </a:pPr>
+            <a:r>
+              <a:rPr sz="900" b="0" i="0">
+                <a:solidFill>
+                  <a:srgbClr val="1E1B4B"/>
+                </a:solidFill>
+                <a:latin typeface="Calibri"/>
+              </a:rPr>
+              <a:t>North Star Metric framework. Used for the leadership ask.</a:t>
+            </a:r>
+          </a:p>
+        </p:txBody>
+      </p:sp>
+      <p:sp>
+        <p:nvSpPr>
+          <p:cNvPr id="69" name="Rounded Rectangle 68"/>
+          <p:cNvSpPr/>
+          <p:nvPr/>
+        </p:nvSpPr>
+        <p:spPr>
+          <a:xfrm>
+            <a:off x="457200" y="6784848"/>
+            <a:ext cx="11274552" cy="457200"/>
+          </a:xfrm>
+          <a:prstGeom prst="roundRect">
+            <a:avLst>
+              <a:gd name="adj" fmla="val 3000"/>
+            </a:avLst>
+          </a:prstGeom>
+          <a:solidFill>
+            <a:srgbClr val="100E2E"/>
+          </a:solidFill>
+          <a:ln>
+            <a:noFill/>
+          </a:ln>
+          <a:effectLst/>
+        </p:spPr>
+        <p:style>
+          <a:lnRef idx="1">
+            <a:schemeClr val="accent1"/>
+          </a:lnRef>
+          <a:fillRef idx="3">
+            <a:schemeClr val="accent1"/>
+          </a:fillRef>
+          <a:effectRef idx="2">
+            <a:schemeClr val="accent1"/>
+          </a:effectRef>
+          <a:fontRef idx="minor">
+            <a:schemeClr val="lt1"/>
+          </a:fontRef>
+        </p:style>
+        <p:txBody>
+          <a:bodyPr rtlCol="0" anchor="ctr"/>
+          <a:lstStyle/>
+          <a:p>
+            <a:pPr algn="ctr"/>
+          </a:p>
+        </p:txBody>
+      </p:sp>
+      <p:sp>
+        <p:nvSpPr>
+          <p:cNvPr id="70" name="TextBox 69"/>
+          <p:cNvSpPr txBox="1"/>
+          <p:nvPr/>
+        </p:nvSpPr>
+        <p:spPr>
+          <a:xfrm>
+            <a:off x="640080" y="6894576"/>
+            <a:ext cx="10972800" cy="274320"/>
+          </a:xfrm>
+          <a:prstGeom prst="rect">
+            <a:avLst/>
+          </a:prstGeom>
+          <a:noFill/>
+        </p:spPr>
+        <p:txBody>
+          <a:bodyPr wrap="square" lIns="45720" rIns="45720" tIns="18288" bIns="18288" anchor="t">
+            <a:spAutoFit/>
+          </a:bodyPr>
+          <a:lstStyle/>
+          <a:p>
+            <a:pPr algn="l">
+              <a:lnSpc>
+                <a:spcPct val="125000"/>
+              </a:lnSpc>
+            </a:pPr>
+            <a:r>
+              <a:rPr sz="900" b="1" i="0">
+                <a:solidFill>
+                  <a:srgbClr val="14B8A6"/>
+                </a:solidFill>
+                <a:latin typeface="Calibri"/>
+              </a:rPr>
+              <a:t>INDICATIVE MODELS</a:t>
+            </a:r>
+          </a:p>
+        </p:txBody>
+      </p:sp>
+      <p:sp>
+        <p:nvSpPr>
+          <p:cNvPr id="71" name="TextBox 70"/>
+          <p:cNvSpPr txBox="1"/>
+          <p:nvPr/>
+        </p:nvSpPr>
+        <p:spPr>
+          <a:xfrm>
+            <a:off x="640080" y="7031736"/>
+            <a:ext cx="10972800" cy="274320"/>
+          </a:xfrm>
+          <a:prstGeom prst="rect">
+            <a:avLst/>
+          </a:prstGeom>
+          <a:noFill/>
+        </p:spPr>
+        <p:txBody>
+          <a:bodyPr wrap="square" lIns="45720" rIns="45720" tIns="18288" bIns="18288" anchor="t">
+            <a:spAutoFit/>
+          </a:bodyPr>
+          <a:lstStyle/>
+          <a:p>
+            <a:pPr algn="l">
+              <a:lnSpc>
+                <a:spcPct val="125000"/>
+              </a:lnSpc>
+            </a:pPr>
+            <a:r>
+              <a:rPr sz="950" b="0" i="1">
                 <a:solidFill>
                   <a:srgbClr val="C4B5FD"/>
                 </a:solidFill>
                 <a:latin typeface="Calibri"/>
               </a:rPr>
-              <a:t/>
-            </a:r>
-          </a:p>
-        </p:txBody>
-      </p:sp>
-      <p:sp>
-        <p:nvSpPr>
-          <p:cNvPr id="14" name="TextBox 13"/>
-          <p:cNvSpPr txBox="1"/>
-          <p:nvPr/>
-        </p:nvSpPr>
-        <p:spPr>
-          <a:xfrm>
-            <a:off x="11094415" y="6492240"/>
-            <a:ext cx="640080" cy="274320"/>
-          </a:xfrm>
-          <a:prstGeom prst="rect">
-            <a:avLst/>
-          </a:prstGeom>
-          <a:noFill/>
-        </p:spPr>
-        <p:txBody>
-          <a:bodyPr wrap="square" lIns="45720" rIns="45720" tIns="18288" bIns="18288" anchor="t">
-            <a:spAutoFit/>
-          </a:bodyPr>
-          <a:lstStyle/>
-          <a:p>
-            <a:pPr algn="r">
-              <a:lnSpc>
-                <a:spcPct val="125000"/>
-              </a:lnSpc>
-            </a:pPr>
-            <a:r>
-              <a:rPr sz="850" b="0" i="0">
-                <a:solidFill>
-                  <a:srgbClr val="C4B5FD"/>
-                </a:solidFill>
-                <a:latin typeface="Calibri"/>
-              </a:rPr>
-              <a:t>19 / 19</a:t>
+              <a:t>Net Promoter Score lift, referral mix, and engagement tier metrics are modelled forecasts. To be validated quarter by quarter.</a:t>
             </a:r>
           </a:p>
         </p:txBody>
@@ -17243,7 +19773,7 @@
                 </a:solidFill>
                 <a:latin typeface="Calibri"/>
               </a:rPr>
-              <a:t>2 / 19</a:t>
+              <a:t>2 / 20</a:t>
             </a:r>
           </a:p>
         </p:txBody>
@@ -18563,6 +21093,571 @@
                 <a:latin typeface="Calibri"/>
               </a:rPr>
               <a:t>All named, all auditable. None invented for this deck.</a:t>
+            </a:r>
+          </a:p>
+        </p:txBody>
+      </p:sp>
+    </p:spTree>
+  </p:cSld>
+  <p:clrMapOvr>
+    <a:masterClrMapping/>
+  </p:clrMapOvr>
+</p:sld>
+</file>
+
+<file path=ppt/slides/slide20.xml><?xml version="1.0" encoding="utf-8"?>
+<p:sld xmlns:a="http://schemas.openxmlformats.org/drawingml/2006/main" xmlns:p="http://schemas.openxmlformats.org/presentationml/2006/main" xmlns:r="http://schemas.openxmlformats.org/officeDocument/2006/relationships">
+  <p:cSld>
+    <p:spTree>
+      <p:nvGrpSpPr>
+        <p:cNvPr id="1" name=""/>
+        <p:cNvGrpSpPr/>
+        <p:nvPr/>
+      </p:nvGrpSpPr>
+      <p:grpSpPr/>
+      <p:pic>
+        <p:nvPicPr>
+          <p:cNvPr id="2" name="Picture 1" descr="handshake.jpg"/>
+          <p:cNvPicPr>
+            <a:picLocks noChangeAspect="1"/>
+          </p:cNvPicPr>
+          <p:nvPr/>
+        </p:nvPicPr>
+        <p:blipFill>
+          <a:blip r:embed="rId2"/>
+          <a:stretch>
+            <a:fillRect/>
+          </a:stretch>
+        </p:blipFill>
+        <p:spPr>
+          <a:xfrm>
+            <a:off x="0" y="0"/>
+            <a:ext cx="12191695" cy="6858000"/>
+          </a:xfrm>
+          <a:prstGeom prst="rect">
+            <a:avLst/>
+          </a:prstGeom>
+        </p:spPr>
+      </p:pic>
+      <p:sp>
+        <p:nvSpPr>
+          <p:cNvPr id="3" name="Rectangle 2"/>
+          <p:cNvSpPr/>
+          <p:nvPr/>
+        </p:nvSpPr>
+        <p:spPr>
+          <a:xfrm>
+            <a:off x="0" y="0"/>
+            <a:ext cx="12191695" cy="6858000"/>
+          </a:xfrm>
+          <a:prstGeom prst="rect">
+            <a:avLst/>
+          </a:prstGeom>
+          <a:solidFill>
+            <a:srgbClr val="100E2E">
+              <a:alpha val="78000"/>
+            </a:srgbClr>
+          </a:solidFill>
+          <a:ln>
+            <a:noFill/>
+          </a:ln>
+        </p:spPr>
+        <p:style>
+          <a:lnRef idx="1">
+            <a:schemeClr val="accent1"/>
+          </a:lnRef>
+          <a:fillRef idx="3">
+            <a:schemeClr val="accent1"/>
+          </a:fillRef>
+          <a:effectRef idx="2">
+            <a:schemeClr val="accent1"/>
+          </a:effectRef>
+          <a:fontRef idx="minor">
+            <a:schemeClr val="lt1"/>
+          </a:fontRef>
+        </p:style>
+        <p:txBody>
+          <a:bodyPr rtlCol="0" anchor="ctr"/>
+          <a:lstStyle/>
+          <a:p>
+            <a:pPr algn="ctr"/>
+          </a:p>
+        </p:txBody>
+      </p:sp>
+      <p:sp>
+        <p:nvSpPr>
+          <p:cNvPr id="4" name="Rectangle 3"/>
+          <p:cNvSpPr/>
+          <p:nvPr/>
+        </p:nvSpPr>
+        <p:spPr>
+          <a:xfrm>
+            <a:off x="0" y="0"/>
+            <a:ext cx="320040" cy="6858000"/>
+          </a:xfrm>
+          <a:prstGeom prst="rect">
+            <a:avLst/>
+          </a:prstGeom>
+          <a:solidFill>
+            <a:srgbClr val="14B8A6"/>
+          </a:solidFill>
+          <a:ln>
+            <a:noFill/>
+          </a:ln>
+          <a:effectLst/>
+        </p:spPr>
+        <p:style>
+          <a:lnRef idx="1">
+            <a:schemeClr val="accent1"/>
+          </a:lnRef>
+          <a:fillRef idx="3">
+            <a:schemeClr val="accent1"/>
+          </a:fillRef>
+          <a:effectRef idx="2">
+            <a:schemeClr val="accent1"/>
+          </a:effectRef>
+          <a:fontRef idx="minor">
+            <a:schemeClr val="lt1"/>
+          </a:fontRef>
+        </p:style>
+        <p:txBody>
+          <a:bodyPr rtlCol="0" anchor="ctr"/>
+          <a:lstStyle/>
+          <a:p>
+            <a:pPr algn="ctr"/>
+          </a:p>
+        </p:txBody>
+      </p:sp>
+      <p:sp>
+        <p:nvSpPr>
+          <p:cNvPr id="5" name="Rounded Rectangle 4"/>
+          <p:cNvSpPr/>
+          <p:nvPr/>
+        </p:nvSpPr>
+        <p:spPr>
+          <a:xfrm>
+            <a:off x="530352" y="484632"/>
+            <a:ext cx="1681935" cy="630936"/>
+          </a:xfrm>
+          <a:prstGeom prst="roundRect">
+            <a:avLst>
+              <a:gd name="adj" fmla="val 18000"/>
+            </a:avLst>
+          </a:prstGeom>
+          <a:solidFill>
+            <a:srgbClr val="FFFFFF"/>
+          </a:solidFill>
+          <a:ln>
+            <a:noFill/>
+          </a:ln>
+        </p:spPr>
+        <p:style>
+          <a:lnRef idx="1">
+            <a:schemeClr val="accent1"/>
+          </a:lnRef>
+          <a:fillRef idx="3">
+            <a:schemeClr val="accent1"/>
+          </a:fillRef>
+          <a:effectRef idx="2">
+            <a:schemeClr val="accent1"/>
+          </a:effectRef>
+          <a:fontRef idx="minor">
+            <a:schemeClr val="lt1"/>
+          </a:fontRef>
+        </p:style>
+        <p:txBody>
+          <a:bodyPr rtlCol="0" anchor="ctr"/>
+          <a:lstStyle/>
+          <a:p>
+            <a:pPr algn="ctr"/>
+          </a:p>
+        </p:txBody>
+      </p:sp>
+      <p:pic>
+        <p:nvPicPr>
+          <p:cNvPr id="6" name="Picture 5" descr="amity_online_logo.png"/>
+          <p:cNvPicPr>
+            <a:picLocks noChangeAspect="1"/>
+          </p:cNvPicPr>
+          <p:nvPr/>
+        </p:nvPicPr>
+        <p:blipFill>
+          <a:blip r:embed="rId3"/>
+          <a:stretch>
+            <a:fillRect/>
+          </a:stretch>
+        </p:blipFill>
+        <p:spPr>
+          <a:xfrm>
+            <a:off x="640080" y="548640"/>
+            <a:ext cx="1462479" cy="502920"/>
+          </a:xfrm>
+          <a:prstGeom prst="rect">
+            <a:avLst/>
+          </a:prstGeom>
+        </p:spPr>
+      </p:pic>
+      <p:sp>
+        <p:nvSpPr>
+          <p:cNvPr id="7" name="TextBox 6"/>
+          <p:cNvSpPr txBox="1"/>
+          <p:nvPr/>
+        </p:nvSpPr>
+        <p:spPr>
+          <a:xfrm>
+            <a:off x="640080" y="1828800"/>
+            <a:ext cx="10972800" cy="411480"/>
+          </a:xfrm>
+          <a:prstGeom prst="rect">
+            <a:avLst/>
+          </a:prstGeom>
+          <a:noFill/>
+        </p:spPr>
+        <p:txBody>
+          <a:bodyPr wrap="square" lIns="45720" rIns="45720" tIns="18288" bIns="18288" anchor="t">
+            <a:spAutoFit/>
+          </a:bodyPr>
+          <a:lstStyle/>
+          <a:p>
+            <a:pPr algn="l">
+              <a:lnSpc>
+                <a:spcPct val="100000"/>
+              </a:lnSpc>
+            </a:pPr>
+            <a:r>
+              <a:rPr sz="1200" b="1" i="0">
+                <a:solidFill>
+                  <a:srgbClr val="14B8A6"/>
+                </a:solidFill>
+                <a:latin typeface="Calibri"/>
+              </a:rPr>
+              <a:t>ONE LEARNER. ONE STORY. ONE PROMISE.</a:t>
+            </a:r>
+          </a:p>
+        </p:txBody>
+      </p:sp>
+      <p:sp>
+        <p:nvSpPr>
+          <p:cNvPr id="8" name="TextBox 7"/>
+          <p:cNvSpPr txBox="1"/>
+          <p:nvPr/>
+        </p:nvSpPr>
+        <p:spPr>
+          <a:xfrm>
+            <a:off x="640080" y="2286000"/>
+            <a:ext cx="10972800" cy="2194560"/>
+          </a:xfrm>
+          <a:prstGeom prst="rect">
+            <a:avLst/>
+          </a:prstGeom>
+          <a:noFill/>
+        </p:spPr>
+        <p:txBody>
+          <a:bodyPr wrap="square" lIns="45720" rIns="45720" tIns="18288" bIns="18288" anchor="t">
+            <a:spAutoFit/>
+          </a:bodyPr>
+          <a:lstStyle/>
+          <a:p>
+            <a:pPr algn="l">
+              <a:lnSpc>
+                <a:spcPct val="110000"/>
+              </a:lnSpc>
+            </a:pPr>
+            <a:r>
+              <a:rPr sz="4000" b="1" i="0">
+                <a:solidFill>
+                  <a:srgbClr val="FFFFFF"/>
+                </a:solidFill>
+                <a:latin typeface="Calibri"/>
+              </a:rPr>
+              <a:t>Rohit doesn't need</a:t>
+            </a:r>
+          </a:p>
+          <a:p>
+            <a:pPr algn="l">
+              <a:lnSpc>
+                <a:spcPct val="110000"/>
+              </a:lnSpc>
+            </a:pPr>
+            <a:r>
+              <a:rPr sz="4000" b="1" i="0">
+                <a:solidFill>
+                  <a:srgbClr val="FFFFFF"/>
+                </a:solidFill>
+                <a:latin typeface="Calibri"/>
+              </a:rPr>
+              <a:t>another webinar.</a:t>
+            </a:r>
+          </a:p>
+          <a:p>
+            <a:pPr algn="l">
+              <a:lnSpc>
+                <a:spcPct val="110000"/>
+              </a:lnSpc>
+            </a:pPr>
+            <a:r>
+              <a:rPr sz="4000" b="1" i="0">
+                <a:solidFill>
+                  <a:srgbClr val="FFFFFF"/>
+                </a:solidFill>
+                <a:latin typeface="Calibri"/>
+              </a:rPr>
+              <a:t>He needs a moment</a:t>
+            </a:r>
+          </a:p>
+          <a:p>
+            <a:pPr algn="l">
+              <a:lnSpc>
+                <a:spcPct val="110000"/>
+              </a:lnSpc>
+            </a:pPr>
+            <a:r>
+              <a:rPr sz="4000" b="1" i="0">
+                <a:solidFill>
+                  <a:srgbClr val="FFFFFF"/>
+                </a:solidFill>
+                <a:latin typeface="Calibri"/>
+              </a:rPr>
+              <a:t>he can show his family.</a:t>
+            </a:r>
+          </a:p>
+        </p:txBody>
+      </p:sp>
+      <p:sp>
+        <p:nvSpPr>
+          <p:cNvPr id="9" name="TextBox 8"/>
+          <p:cNvSpPr txBox="1"/>
+          <p:nvPr/>
+        </p:nvSpPr>
+        <p:spPr>
+          <a:xfrm>
+            <a:off x="640080" y="5029200"/>
+            <a:ext cx="10972800" cy="411480"/>
+          </a:xfrm>
+          <a:prstGeom prst="rect">
+            <a:avLst/>
+          </a:prstGeom>
+          <a:noFill/>
+        </p:spPr>
+        <p:txBody>
+          <a:bodyPr wrap="square" lIns="45720" rIns="45720" tIns="18288" bIns="18288" anchor="t">
+            <a:spAutoFit/>
+          </a:bodyPr>
+          <a:lstStyle/>
+          <a:p>
+            <a:pPr algn="l">
+              <a:lnSpc>
+                <a:spcPct val="135000"/>
+              </a:lnSpc>
+            </a:pPr>
+            <a:r>
+              <a:rPr sz="1500" b="0" i="1">
+                <a:solidFill>
+                  <a:srgbClr val="C4B5FD"/>
+                </a:solidFill>
+                <a:latin typeface="Calibri"/>
+              </a:rPr>
+              <a:t>If we get that right, retention takes care of itself. Advocacy follows. So does enrolment.</a:t>
+            </a:r>
+          </a:p>
+        </p:txBody>
+      </p:sp>
+      <p:sp>
+        <p:nvSpPr>
+          <p:cNvPr id="10" name="Rectangle 9"/>
+          <p:cNvSpPr/>
+          <p:nvPr/>
+        </p:nvSpPr>
+        <p:spPr>
+          <a:xfrm>
+            <a:off x="640080" y="5852160"/>
+            <a:ext cx="54864" cy="548640"/>
+          </a:xfrm>
+          <a:prstGeom prst="rect">
+            <a:avLst/>
+          </a:prstGeom>
+          <a:solidFill>
+            <a:srgbClr val="14B8A6"/>
+          </a:solidFill>
+          <a:ln>
+            <a:noFill/>
+          </a:ln>
+          <a:effectLst/>
+        </p:spPr>
+        <p:style>
+          <a:lnRef idx="1">
+            <a:schemeClr val="accent1"/>
+          </a:lnRef>
+          <a:fillRef idx="3">
+            <a:schemeClr val="accent1"/>
+          </a:fillRef>
+          <a:effectRef idx="2">
+            <a:schemeClr val="accent1"/>
+          </a:effectRef>
+          <a:fontRef idx="minor">
+            <a:schemeClr val="lt1"/>
+          </a:fontRef>
+        </p:style>
+        <p:txBody>
+          <a:bodyPr rtlCol="0" anchor="ctr"/>
+          <a:lstStyle/>
+          <a:p>
+            <a:pPr algn="ctr"/>
+          </a:p>
+        </p:txBody>
+      </p:sp>
+      <p:sp>
+        <p:nvSpPr>
+          <p:cNvPr id="11" name="TextBox 10"/>
+          <p:cNvSpPr txBox="1"/>
+          <p:nvPr/>
+        </p:nvSpPr>
+        <p:spPr>
+          <a:xfrm>
+            <a:off x="777240" y="5852160"/>
+            <a:ext cx="7315200" cy="292608"/>
+          </a:xfrm>
+          <a:prstGeom prst="rect">
+            <a:avLst/>
+          </a:prstGeom>
+          <a:noFill/>
+        </p:spPr>
+        <p:txBody>
+          <a:bodyPr wrap="square" lIns="45720" rIns="45720" tIns="18288" bIns="18288" anchor="t">
+            <a:spAutoFit/>
+          </a:bodyPr>
+          <a:lstStyle/>
+          <a:p>
+            <a:pPr algn="l">
+              <a:lnSpc>
+                <a:spcPct val="125000"/>
+              </a:lnSpc>
+            </a:pPr>
+            <a:r>
+              <a:rPr sz="950" b="1" i="0">
+                <a:solidFill>
+                  <a:srgbClr val="14B8A6"/>
+                </a:solidFill>
+                <a:latin typeface="Calibri"/>
+              </a:rPr>
+              <a:t>WITH GRATITUDE</a:t>
+            </a:r>
+          </a:p>
+        </p:txBody>
+      </p:sp>
+      <p:sp>
+        <p:nvSpPr>
+          <p:cNvPr id="12" name="TextBox 11"/>
+          <p:cNvSpPr txBox="1"/>
+          <p:nvPr/>
+        </p:nvSpPr>
+        <p:spPr>
+          <a:xfrm>
+            <a:off x="777240" y="6080760"/>
+            <a:ext cx="7315200" cy="365760"/>
+          </a:xfrm>
+          <a:prstGeom prst="rect">
+            <a:avLst/>
+          </a:prstGeom>
+          <a:noFill/>
+        </p:spPr>
+        <p:txBody>
+          <a:bodyPr wrap="square" lIns="45720" rIns="45720" tIns="18288" bIns="18288" anchor="t">
+            <a:spAutoFit/>
+          </a:bodyPr>
+          <a:lstStyle/>
+          <a:p>
+            <a:pPr algn="l">
+              <a:lnSpc>
+                <a:spcPct val="125000"/>
+              </a:lnSpc>
+            </a:pPr>
+            <a:r>
+              <a:rPr sz="1400" b="1" i="0">
+                <a:solidFill>
+                  <a:srgbClr val="FFFFFF"/>
+                </a:solidFill>
+                <a:latin typeface="Calibri"/>
+              </a:rPr>
+              <a:t>Paras Jain   |   Marketing Manager Assignment</a:t>
+            </a:r>
+          </a:p>
+        </p:txBody>
+      </p:sp>
+      <p:sp>
+        <p:nvSpPr>
+          <p:cNvPr id="13" name="TextBox 12"/>
+          <p:cNvSpPr txBox="1"/>
+          <p:nvPr/>
+        </p:nvSpPr>
+        <p:spPr>
+          <a:xfrm>
+            <a:off x="457200" y="6492240"/>
+            <a:ext cx="9144000" cy="274320"/>
+          </a:xfrm>
+          <a:prstGeom prst="rect">
+            <a:avLst/>
+          </a:prstGeom>
+          <a:noFill/>
+        </p:spPr>
+        <p:txBody>
+          <a:bodyPr wrap="square" lIns="45720" rIns="45720" tIns="18288" bIns="18288" anchor="t">
+            <a:spAutoFit/>
+          </a:bodyPr>
+          <a:lstStyle/>
+          <a:p>
+            <a:pPr algn="l">
+              <a:lnSpc>
+                <a:spcPct val="125000"/>
+              </a:lnSpc>
+            </a:pPr>
+            <a:r>
+              <a:rPr sz="850" b="0" i="1">
+                <a:solidFill>
+                  <a:srgbClr val="C4B5FD"/>
+                </a:solidFill>
+                <a:latin typeface="Calibri"/>
+              </a:rPr>
+              <a:t/>
+            </a:r>
+          </a:p>
+        </p:txBody>
+      </p:sp>
+      <p:sp>
+        <p:nvSpPr>
+          <p:cNvPr id="14" name="TextBox 13"/>
+          <p:cNvSpPr txBox="1"/>
+          <p:nvPr/>
+        </p:nvSpPr>
+        <p:spPr>
+          <a:xfrm>
+            <a:off x="11094415" y="6492240"/>
+            <a:ext cx="640080" cy="274320"/>
+          </a:xfrm>
+          <a:prstGeom prst="rect">
+            <a:avLst/>
+          </a:prstGeom>
+          <a:noFill/>
+        </p:spPr>
+        <p:txBody>
+          <a:bodyPr wrap="square" lIns="45720" rIns="45720" tIns="18288" bIns="18288" anchor="t">
+            <a:spAutoFit/>
+          </a:bodyPr>
+          <a:lstStyle/>
+          <a:p>
+            <a:pPr algn="r">
+              <a:lnSpc>
+                <a:spcPct val="125000"/>
+              </a:lnSpc>
+            </a:pPr>
+            <a:r>
+              <a:rPr sz="850" b="0" i="0">
+                <a:solidFill>
+                  <a:srgbClr val="C4B5FD"/>
+                </a:solidFill>
+                <a:latin typeface="Calibri"/>
+              </a:rPr>
+              <a:t>20 / 20</a:t>
             </a:r>
           </a:p>
         </p:txBody>
@@ -18973,7 +22068,7 @@
                 </a:solidFill>
                 <a:latin typeface="Calibri"/>
               </a:rPr>
-              <a:t>3 / 19</a:t>
+              <a:t>3 / 20</a:t>
             </a:r>
           </a:p>
         </p:txBody>
@@ -19215,7 +22310,7 @@
                 </a:solidFill>
                 <a:latin typeface="Calibri"/>
               </a:rPr>
-              <a:t>4 / 19</a:t>
+              <a:t>4 / 20</a:t>
             </a:r>
           </a:p>
         </p:txBody>
@@ -21450,7 +24545,7 @@
                 </a:solidFill>
                 <a:latin typeface="Calibri"/>
               </a:rPr>
-              <a:t>5 / 19</a:t>
+              <a:t>5 / 20</a:t>
             </a:r>
           </a:p>
         </p:txBody>
@@ -23252,7 +26347,7 @@
                 </a:solidFill>
                 <a:latin typeface="Calibri"/>
               </a:rPr>
-              <a:t>6 / 19</a:t>
+              <a:t>6 / 20</a:t>
             </a:r>
           </a:p>
         </p:txBody>
@@ -24692,7 +27787,7 @@
                 </a:solidFill>
                 <a:latin typeface="Calibri"/>
               </a:rPr>
-              <a:t>7 / 19</a:t>
+              <a:t>7 / 20</a:t>
             </a:r>
           </a:p>
         </p:txBody>
@@ -26068,7 +29163,7 @@
                 </a:solidFill>
                 <a:latin typeface="Calibri"/>
               </a:rPr>
-              <a:t>8 / 19</a:t>
+              <a:t>8 / 20</a:t>
             </a:r>
           </a:p>
         </p:txBody>
@@ -28486,7 +31581,7 @@
                 </a:solidFill>
                 <a:latin typeface="Calibri"/>
               </a:rPr>
-              <a:t>9 / 19</a:t>
+              <a:t>9 / 20</a:t>
             </a:r>
           </a:p>
         </p:txBody>
